--- a/presentation_charte_CFF.pptx
+++ b/presentation_charte_CFF.pptx
@@ -138,7 +138,7 @@
       </p:grpSpPr>
       <p:sp>
         <p:nvSpPr>
-          <p:cNvPr id="659639263" name="Header Placeholder 1"/>
+          <p:cNvPr id="1783954749" name="Header Placeholder 1"/>
           <p:cNvSpPr>
             <a:spLocks noGrp="1"/>
           </p:cNvSpPr>
@@ -172,7 +172,7 @@
       </p:sp>
       <p:sp>
         <p:nvSpPr>
-          <p:cNvPr id="1876834516" name="Date Placeholder 2"/>
+          <p:cNvPr id="435542827" name="Date Placeholder 2"/>
           <p:cNvSpPr>
             <a:spLocks noGrp="1"/>
           </p:cNvSpPr>
@@ -210,7 +210,7 @@
       </p:sp>
       <p:sp>
         <p:nvSpPr>
-          <p:cNvPr id="1590647517" name="Slide Image Placeholder 3"/>
+          <p:cNvPr id="1678268221" name="Slide Image Placeholder 3"/>
           <p:cNvSpPr>
             <a:spLocks noChangeAspect="1" noGrp="1" noRot="1"/>
           </p:cNvSpPr>
@@ -246,7 +246,7 @@
       </p:sp>
       <p:sp>
         <p:nvSpPr>
-          <p:cNvPr id="1548576235" name="Notes Placeholder 4"/>
+          <p:cNvPr id="1884828954" name="Notes Placeholder 4"/>
           <p:cNvSpPr>
             <a:spLocks noGrp="1"/>
           </p:cNvSpPr>
@@ -320,7 +320,7 @@
       </p:sp>
       <p:sp>
         <p:nvSpPr>
-          <p:cNvPr id="593828465" name="Footer Placeholder 5"/>
+          <p:cNvPr id="606227115" name="Footer Placeholder 5"/>
           <p:cNvSpPr>
             <a:spLocks noGrp="1"/>
           </p:cNvSpPr>
@@ -354,7 +354,7 @@
       </p:sp>
       <p:sp>
         <p:nvSpPr>
-          <p:cNvPr id="691562983" name="Slide Number Placeholder 6"/>
+          <p:cNvPr id="1318561442" name="Slide Number Placeholder 6"/>
           <p:cNvSpPr>
             <a:spLocks noGrp="1"/>
           </p:cNvSpPr>
@@ -507,7 +507,7 @@
       </p:grpSpPr>
       <p:sp>
         <p:nvSpPr>
-          <p:cNvPr id="2119219198" name="Slide Image Placeholder 1"/>
+          <p:cNvPr id="231788532" name="Slide Image Placeholder 1"/>
           <p:cNvSpPr>
             <a:spLocks noChangeAspect="1" noGrp="1" noRot="1"/>
           </p:cNvSpPr>
@@ -519,7 +519,7 @@
       </p:sp>
       <p:sp>
         <p:nvSpPr>
-          <p:cNvPr id="1010803259" name="Notes Placeholder 2"/>
+          <p:cNvPr id="318160481" name="Notes Placeholder 2"/>
           <p:cNvSpPr>
             <a:spLocks noGrp="1"/>
           </p:cNvSpPr>
@@ -545,7 +545,7 @@
       </p:sp>
       <p:sp>
         <p:nvSpPr>
-          <p:cNvPr id="184780479" name="Slide Number Placeholder 3"/>
+          <p:cNvPr id="802837895" name="Slide Number Placeholder 3"/>
           <p:cNvSpPr>
             <a:spLocks noGrp="1"/>
           </p:cNvSpPr>
@@ -596,7 +596,7 @@
       </p:grpSpPr>
       <p:sp>
         <p:nvSpPr>
-          <p:cNvPr id="2077611950" name="Slide Image Placeholder 1"/>
+          <p:cNvPr id="1767469509" name="Slide Image Placeholder 1"/>
           <p:cNvSpPr>
             <a:spLocks noChangeAspect="1" noGrp="1" noRot="1"/>
           </p:cNvSpPr>
@@ -608,7 +608,7 @@
       </p:sp>
       <p:sp>
         <p:nvSpPr>
-          <p:cNvPr id="25318135" name="Notes Placeholder 2"/>
+          <p:cNvPr id="1815233325" name="Notes Placeholder 2"/>
           <p:cNvSpPr>
             <a:spLocks noGrp="1"/>
           </p:cNvSpPr>
@@ -634,7 +634,7 @@
       </p:sp>
       <p:sp>
         <p:nvSpPr>
-          <p:cNvPr id="490377754" name="Slide Number Placeholder 3"/>
+          <p:cNvPr id="2139767548" name="Slide Number Placeholder 3"/>
           <p:cNvSpPr>
             <a:spLocks noGrp="1"/>
           </p:cNvSpPr>
@@ -685,7 +685,7 @@
       </p:grpSpPr>
       <p:sp>
         <p:nvSpPr>
-          <p:cNvPr id="1714947115" name="Slide Image Placeholder 1"/>
+          <p:cNvPr id="1632973118" name="Slide Image Placeholder 1"/>
           <p:cNvSpPr>
             <a:spLocks noChangeAspect="1" noGrp="1" noRot="1"/>
           </p:cNvSpPr>
@@ -697,7 +697,7 @@
       </p:sp>
       <p:sp>
         <p:nvSpPr>
-          <p:cNvPr id="536402584" name="Notes Placeholder 2"/>
+          <p:cNvPr id="1457919392" name="Notes Placeholder 2"/>
           <p:cNvSpPr>
             <a:spLocks noGrp="1"/>
           </p:cNvSpPr>
@@ -723,7 +723,7 @@
       </p:sp>
       <p:sp>
         <p:nvSpPr>
-          <p:cNvPr id="163328856" name="Slide Number Placeholder 3"/>
+          <p:cNvPr id="1043389316" name="Slide Number Placeholder 3"/>
           <p:cNvSpPr>
             <a:spLocks noGrp="1"/>
           </p:cNvSpPr>
@@ -774,7 +774,7 @@
       </p:grpSpPr>
       <p:sp>
         <p:nvSpPr>
-          <p:cNvPr id="1998920842" name="Slide Image Placeholder 1"/>
+          <p:cNvPr id="190573878" name="Slide Image Placeholder 1"/>
           <p:cNvSpPr>
             <a:spLocks noChangeAspect="1" noGrp="1" noRot="1"/>
           </p:cNvSpPr>
@@ -786,7 +786,7 @@
       </p:sp>
       <p:sp>
         <p:nvSpPr>
-          <p:cNvPr id="2027909265" name="Notes Placeholder 2"/>
+          <p:cNvPr id="863783575" name="Notes Placeholder 2"/>
           <p:cNvSpPr>
             <a:spLocks noGrp="1"/>
           </p:cNvSpPr>
@@ -812,7 +812,7 @@
       </p:sp>
       <p:sp>
         <p:nvSpPr>
-          <p:cNvPr id="1113110005" name="Slide Number Placeholder 3"/>
+          <p:cNvPr id="1752484159" name="Slide Number Placeholder 3"/>
           <p:cNvSpPr>
             <a:spLocks noGrp="1"/>
           </p:cNvSpPr>
@@ -863,7 +863,7 @@
       </p:grpSpPr>
       <p:sp>
         <p:nvSpPr>
-          <p:cNvPr id="692632833" name="Slide Image Placeholder 1"/>
+          <p:cNvPr id="1384781065" name="Slide Image Placeholder 1"/>
           <p:cNvSpPr>
             <a:spLocks noChangeAspect="1" noGrp="1" noRot="1"/>
           </p:cNvSpPr>
@@ -875,7 +875,7 @@
       </p:sp>
       <p:sp>
         <p:nvSpPr>
-          <p:cNvPr id="2028363911" name="Notes Placeholder 2"/>
+          <p:cNvPr id="1400159044" name="Notes Placeholder 2"/>
           <p:cNvSpPr>
             <a:spLocks noGrp="1"/>
           </p:cNvSpPr>
@@ -901,7 +901,7 @@
       </p:sp>
       <p:sp>
         <p:nvSpPr>
-          <p:cNvPr id="1826659593" name="Slide Number Placeholder 3"/>
+          <p:cNvPr id="561537872" name="Slide Number Placeholder 3"/>
           <p:cNvSpPr>
             <a:spLocks noGrp="1"/>
           </p:cNvSpPr>
@@ -952,7 +952,7 @@
       </p:grpSpPr>
       <p:sp>
         <p:nvSpPr>
-          <p:cNvPr id="1925989065" name="Slide Image Placeholder 1"/>
+          <p:cNvPr id="655796939" name="Slide Image Placeholder 1"/>
           <p:cNvSpPr>
             <a:spLocks noChangeAspect="1" noGrp="1" noRot="1"/>
           </p:cNvSpPr>
@@ -964,7 +964,7 @@
       </p:sp>
       <p:sp>
         <p:nvSpPr>
-          <p:cNvPr id="1830685120" name="Notes Placeholder 2"/>
+          <p:cNvPr id="757436026" name="Notes Placeholder 2"/>
           <p:cNvSpPr>
             <a:spLocks noGrp="1"/>
           </p:cNvSpPr>
@@ -990,7 +990,7 @@
       </p:sp>
       <p:sp>
         <p:nvSpPr>
-          <p:cNvPr id="1448340632" name="Slide Number Placeholder 3"/>
+          <p:cNvPr id="650215323" name="Slide Number Placeholder 3"/>
           <p:cNvSpPr>
             <a:spLocks noGrp="1"/>
           </p:cNvSpPr>
@@ -1041,7 +1041,7 @@
       </p:grpSpPr>
       <p:sp>
         <p:nvSpPr>
-          <p:cNvPr id="1333677606" name="Slide Image Placeholder 1"/>
+          <p:cNvPr id="828770892" name="Slide Image Placeholder 1"/>
           <p:cNvSpPr>
             <a:spLocks noChangeAspect="1" noGrp="1" noRot="1"/>
           </p:cNvSpPr>
@@ -1053,7 +1053,7 @@
       </p:sp>
       <p:sp>
         <p:nvSpPr>
-          <p:cNvPr id="429621463" name="Notes Placeholder 2"/>
+          <p:cNvPr id="1453882028" name="Notes Placeholder 2"/>
           <p:cNvSpPr>
             <a:spLocks noGrp="1"/>
           </p:cNvSpPr>
@@ -1079,7 +1079,7 @@
       </p:sp>
       <p:sp>
         <p:nvSpPr>
-          <p:cNvPr id="1407774228" name="Slide Number Placeholder 3"/>
+          <p:cNvPr id="377071852" name="Slide Number Placeholder 3"/>
           <p:cNvSpPr>
             <a:spLocks noGrp="1"/>
           </p:cNvSpPr>
@@ -1130,7 +1130,7 @@
       </p:grpSpPr>
       <p:sp>
         <p:nvSpPr>
-          <p:cNvPr id="1107179124" name="Slide Image Placeholder 1"/>
+          <p:cNvPr id="1671790778" name="Slide Image Placeholder 1"/>
           <p:cNvSpPr>
             <a:spLocks noChangeAspect="1" noGrp="1" noRot="1"/>
           </p:cNvSpPr>
@@ -1142,7 +1142,7 @@
       </p:sp>
       <p:sp>
         <p:nvSpPr>
-          <p:cNvPr id="825964931" name="Notes Placeholder 2"/>
+          <p:cNvPr id="731563547" name="Notes Placeholder 2"/>
           <p:cNvSpPr>
             <a:spLocks noGrp="1"/>
           </p:cNvSpPr>
@@ -1168,7 +1168,7 @@
       </p:sp>
       <p:sp>
         <p:nvSpPr>
-          <p:cNvPr id="122842465" name="Slide Number Placeholder 3"/>
+          <p:cNvPr id="1654528324" name="Slide Number Placeholder 3"/>
           <p:cNvSpPr>
             <a:spLocks noGrp="1"/>
           </p:cNvSpPr>
@@ -1533,7 +1533,7 @@
       </p:grpSpPr>
       <p:sp>
         <p:nvSpPr>
-          <p:cNvPr id="1339049967" name=""/>
+          <p:cNvPr id="1051118313" name=""/>
           <p:cNvSpPr/>
           <p:nvPr/>
         </p:nvSpPr>
@@ -1578,7 +1578,7 @@
       </p:sp>
       <p:sp>
         <p:nvSpPr>
-          <p:cNvPr id="160171384" name="Text 0"/>
+          <p:cNvPr id="1152734535" name="Text 0"/>
           <p:cNvSpPr/>
           <p:nvPr/>
         </p:nvSpPr>
@@ -1620,7 +1620,7 @@
       </p:sp>
       <p:sp>
         <p:nvSpPr>
-          <p:cNvPr id="515643139" name="Text 1"/>
+          <p:cNvPr id="1568357264" name="Text 1"/>
           <p:cNvSpPr/>
           <p:nvPr/>
         </p:nvSpPr>
@@ -1684,7 +1684,7 @@
       </p:sp>
       <p:sp>
         <p:nvSpPr>
-          <p:cNvPr id="1770477503" name="Text 2"/>
+          <p:cNvPr id="1635080004" name="Text 2"/>
           <p:cNvSpPr/>
           <p:nvPr/>
         </p:nvSpPr>
@@ -1726,7 +1726,7 @@
       </p:sp>
       <p:sp>
         <p:nvSpPr>
-          <p:cNvPr id="1873054842" name="Text 3"/>
+          <p:cNvPr id="1973767627" name="Text 3"/>
           <p:cNvSpPr/>
           <p:nvPr/>
         </p:nvSpPr>
@@ -1832,7 +1832,7 @@
       </p:grpSpPr>
       <p:sp>
         <p:nvSpPr>
-          <p:cNvPr id="1260407968" name="Shape 0"/>
+          <p:cNvPr id="1517213371" name="Shape 0"/>
           <p:cNvSpPr/>
           <p:nvPr/>
         </p:nvSpPr>
@@ -1852,7 +1852,7 @@
       </p:sp>
       <p:pic>
         <p:nvPicPr>
-          <p:cNvPr id="494731429" name="Image 0" descr="preencoded.png"/>
+          <p:cNvPr id="1889643193" name="Image 0" descr="preencoded.png"/>
           <p:cNvPicPr>
             <a:picLocks noChangeAspect="1"/>
           </p:cNvPicPr>
@@ -1874,7 +1874,7 @@
       </p:pic>
       <p:sp>
         <p:nvSpPr>
-          <p:cNvPr id="408643654" name="Text 1"/>
+          <p:cNvPr id="1172505790" name="Text 1"/>
           <p:cNvSpPr/>
           <p:nvPr/>
         </p:nvSpPr>
@@ -1914,7 +1914,7 @@
       </p:sp>
       <p:sp>
         <p:nvSpPr>
-          <p:cNvPr id="1262455927" name="Shape 2"/>
+          <p:cNvPr id="347829133" name="Shape 2"/>
           <p:cNvSpPr/>
           <p:nvPr/>
         </p:nvSpPr>
@@ -1936,7 +1936,7 @@
       </p:sp>
       <p:sp>
         <p:nvSpPr>
-          <p:cNvPr id="463394112" name="Text 3"/>
+          <p:cNvPr id="1168410293" name="Text 3"/>
           <p:cNvSpPr/>
           <p:nvPr/>
         </p:nvSpPr>
@@ -1976,7 +1976,7 @@
       </p:sp>
       <p:sp>
         <p:nvSpPr>
-          <p:cNvPr id="1102707654" name="Shape 4"/>
+          <p:cNvPr id="832989967" name="Shape 4"/>
           <p:cNvSpPr/>
           <p:nvPr/>
         </p:nvSpPr>
@@ -2005,7 +2005,7 @@
       </p:sp>
       <p:sp>
         <p:nvSpPr>
-          <p:cNvPr id="1880089099" name="Text 5"/>
+          <p:cNvPr id="874962085" name="Text 5"/>
           <p:cNvSpPr/>
           <p:nvPr/>
         </p:nvSpPr>
@@ -2045,7 +2045,7 @@
       </p:sp>
       <p:sp>
         <p:nvSpPr>
-          <p:cNvPr id="2139660716" name="Text 6"/>
+          <p:cNvPr id="1264408145" name="Text 6"/>
           <p:cNvSpPr/>
           <p:nvPr/>
         </p:nvSpPr>
@@ -2155,7 +2155,7 @@
       </p:sp>
       <p:sp>
         <p:nvSpPr>
-          <p:cNvPr id="1435502805" name="Shape 7"/>
+          <p:cNvPr id="164252154" name="Shape 7"/>
           <p:cNvSpPr/>
           <p:nvPr/>
         </p:nvSpPr>
@@ -2184,7 +2184,7 @@
       </p:sp>
       <p:sp>
         <p:nvSpPr>
-          <p:cNvPr id="873485602" name="Text 8"/>
+          <p:cNvPr id="992690019" name="Text 8"/>
           <p:cNvSpPr/>
           <p:nvPr/>
         </p:nvSpPr>
@@ -2224,7 +2224,7 @@
       </p:sp>
       <p:sp>
         <p:nvSpPr>
-          <p:cNvPr id="1075499760" name="Text 9"/>
+          <p:cNvPr id="1075545165" name="Text 9"/>
           <p:cNvSpPr/>
           <p:nvPr/>
         </p:nvSpPr>
@@ -2356,7 +2356,7 @@
       </p:sp>
       <p:sp>
         <p:nvSpPr>
-          <p:cNvPr id="1033180329" name="Shape 10"/>
+          <p:cNvPr id="145017372" name="Shape 10"/>
           <p:cNvSpPr/>
           <p:nvPr/>
         </p:nvSpPr>
@@ -2378,7 +2378,7 @@
       </p:sp>
       <p:sp>
         <p:nvSpPr>
-          <p:cNvPr id="118252737" name="Text 11"/>
+          <p:cNvPr id="479700784" name="Text 11"/>
           <p:cNvSpPr/>
           <p:nvPr/>
         </p:nvSpPr>
@@ -2469,7 +2469,7 @@
       </p:grpSpPr>
       <p:sp>
         <p:nvSpPr>
-          <p:cNvPr id="1497269236" name="Shape 0"/>
+          <p:cNvPr id="1670343850" name="Shape 0"/>
           <p:cNvSpPr/>
           <p:nvPr/>
         </p:nvSpPr>
@@ -2489,7 +2489,7 @@
       </p:sp>
       <p:pic>
         <p:nvPicPr>
-          <p:cNvPr id="1583995779" name="Image 0" descr="preencoded.png"/>
+          <p:cNvPr id="1978415054" name="Image 0" descr="preencoded.png"/>
           <p:cNvPicPr>
             <a:picLocks noChangeAspect="1"/>
           </p:cNvPicPr>
@@ -2511,7 +2511,7 @@
       </p:pic>
       <p:sp>
         <p:nvSpPr>
-          <p:cNvPr id="1699480977" name="Text 1"/>
+          <p:cNvPr id="301209276" name="Text 1"/>
           <p:cNvSpPr/>
           <p:nvPr/>
         </p:nvSpPr>
@@ -2551,7 +2551,7 @@
       </p:sp>
       <p:sp>
         <p:nvSpPr>
-          <p:cNvPr id="1713621488" name="Shape 2"/>
+          <p:cNvPr id="389629691" name="Shape 2"/>
           <p:cNvSpPr/>
           <p:nvPr/>
         </p:nvSpPr>
@@ -2573,7 +2573,7 @@
       </p:sp>
       <p:sp>
         <p:nvSpPr>
-          <p:cNvPr id="1570987328" name="Text 3"/>
+          <p:cNvPr id="1961414058" name="Text 3"/>
           <p:cNvSpPr/>
           <p:nvPr/>
         </p:nvSpPr>
@@ -2613,7 +2613,7 @@
       </p:sp>
       <p:sp>
         <p:nvSpPr>
-          <p:cNvPr id="158875944" name="Shape 4"/>
+          <p:cNvPr id="1609382519" name="Shape 4"/>
           <p:cNvSpPr/>
           <p:nvPr/>
         </p:nvSpPr>
@@ -2633,7 +2633,7 @@
       </p:sp>
       <p:sp>
         <p:nvSpPr>
-          <p:cNvPr id="2044054233" name="Text 5"/>
+          <p:cNvPr id="1317711620" name="Text 5"/>
           <p:cNvSpPr/>
           <p:nvPr/>
         </p:nvSpPr>
@@ -2673,7 +2673,7 @@
       </p:sp>
       <p:sp>
         <p:nvSpPr>
-          <p:cNvPr id="696920927" name="Text 6"/>
+          <p:cNvPr id="1579843632" name="Text 6"/>
           <p:cNvSpPr/>
           <p:nvPr/>
         </p:nvSpPr>
@@ -2727,7 +2727,7 @@
       </p:sp>
       <p:sp>
         <p:nvSpPr>
-          <p:cNvPr id="804561542" name="Shape 7"/>
+          <p:cNvPr id="203439483" name="Shape 7"/>
           <p:cNvSpPr/>
           <p:nvPr/>
         </p:nvSpPr>
@@ -2747,7 +2747,7 @@
       </p:sp>
       <p:sp>
         <p:nvSpPr>
-          <p:cNvPr id="423203999" name="Text 8"/>
+          <p:cNvPr id="1644868584" name="Text 8"/>
           <p:cNvSpPr/>
           <p:nvPr/>
         </p:nvSpPr>
@@ -2787,7 +2787,7 @@
       </p:sp>
       <p:sp>
         <p:nvSpPr>
-          <p:cNvPr id="522295203" name="Text 9"/>
+          <p:cNvPr id="680583005" name="Text 9"/>
           <p:cNvSpPr/>
           <p:nvPr/>
         </p:nvSpPr>
@@ -2841,7 +2841,7 @@
       </p:sp>
       <p:sp>
         <p:nvSpPr>
-          <p:cNvPr id="401485874" name="Shape 10"/>
+          <p:cNvPr id="1018802614" name="Shape 10"/>
           <p:cNvSpPr/>
           <p:nvPr/>
         </p:nvSpPr>
@@ -2861,7 +2861,7 @@
       </p:sp>
       <p:sp>
         <p:nvSpPr>
-          <p:cNvPr id="542655084" name="Text 11"/>
+          <p:cNvPr id="836565714" name="Text 11"/>
           <p:cNvSpPr/>
           <p:nvPr/>
         </p:nvSpPr>
@@ -2901,7 +2901,7 @@
       </p:sp>
       <p:sp>
         <p:nvSpPr>
-          <p:cNvPr id="609929245" name="Text 12"/>
+          <p:cNvPr id="823306765" name="Text 12"/>
           <p:cNvSpPr/>
           <p:nvPr/>
         </p:nvSpPr>
@@ -2995,7 +2995,7 @@
       </p:grpSpPr>
       <p:sp>
         <p:nvSpPr>
-          <p:cNvPr id="1282019897" name="Shape 0"/>
+          <p:cNvPr id="359049725" name="Shape 0"/>
           <p:cNvSpPr/>
           <p:nvPr/>
         </p:nvSpPr>
@@ -3015,7 +3015,7 @@
       </p:sp>
       <p:pic>
         <p:nvPicPr>
-          <p:cNvPr id="1852592546" name="Image 0" descr="preencoded.png"/>
+          <p:cNvPr id="1964065222" name="Image 0" descr="preencoded.png"/>
           <p:cNvPicPr>
             <a:picLocks noChangeAspect="1"/>
           </p:cNvPicPr>
@@ -3037,7 +3037,7 @@
       </p:pic>
       <p:sp>
         <p:nvSpPr>
-          <p:cNvPr id="1752156976" name="Text 1"/>
+          <p:cNvPr id="403858621" name="Text 1"/>
           <p:cNvSpPr/>
           <p:nvPr/>
         </p:nvSpPr>
@@ -3077,7 +3077,7 @@
       </p:sp>
       <p:sp>
         <p:nvSpPr>
-          <p:cNvPr id="1811181318" name="Shape 2"/>
+          <p:cNvPr id="1794108093" name="Shape 2"/>
           <p:cNvSpPr/>
           <p:nvPr/>
         </p:nvSpPr>
@@ -3099,7 +3099,7 @@
       </p:sp>
       <p:sp>
         <p:nvSpPr>
-          <p:cNvPr id="1556662021" name="Text 3"/>
+          <p:cNvPr id="151914962" name="Text 3"/>
           <p:cNvSpPr/>
           <p:nvPr/>
         </p:nvSpPr>
@@ -3139,7 +3139,7 @@
       </p:sp>
       <p:sp>
         <p:nvSpPr>
-          <p:cNvPr id="433282490" name="Shape 4"/>
+          <p:cNvPr id="1757592269" name="Shape 4"/>
           <p:cNvSpPr/>
           <p:nvPr/>
         </p:nvSpPr>
@@ -3159,7 +3159,7 @@
       </p:sp>
       <p:sp>
         <p:nvSpPr>
-          <p:cNvPr id="2059219209" name="Text 5"/>
+          <p:cNvPr id="181498509" name="Text 5"/>
           <p:cNvSpPr/>
           <p:nvPr/>
         </p:nvSpPr>
@@ -3199,7 +3199,7 @@
       </p:sp>
       <p:sp>
         <p:nvSpPr>
-          <p:cNvPr id="191259093" name="Text 6"/>
+          <p:cNvPr id="339620663" name="Text 6"/>
           <p:cNvSpPr/>
           <p:nvPr/>
         </p:nvSpPr>
@@ -3253,7 +3253,7 @@
       </p:sp>
       <p:sp>
         <p:nvSpPr>
-          <p:cNvPr id="1004696832" name="Shape 7"/>
+          <p:cNvPr id="1347771240" name="Shape 7"/>
           <p:cNvSpPr/>
           <p:nvPr/>
         </p:nvSpPr>
@@ -3273,7 +3273,7 @@
       </p:sp>
       <p:sp>
         <p:nvSpPr>
-          <p:cNvPr id="1591641589" name="Text 8"/>
+          <p:cNvPr id="1208023194" name="Text 8"/>
           <p:cNvSpPr/>
           <p:nvPr/>
         </p:nvSpPr>
@@ -3313,7 +3313,7 @@
       </p:sp>
       <p:sp>
         <p:nvSpPr>
-          <p:cNvPr id="1622914804" name="Text 9"/>
+          <p:cNvPr id="1439020366" name="Text 9"/>
           <p:cNvSpPr/>
           <p:nvPr/>
         </p:nvSpPr>
@@ -3367,7 +3367,7 @@
       </p:sp>
       <p:sp>
         <p:nvSpPr>
-          <p:cNvPr id="1606963571" name="Shape 10"/>
+          <p:cNvPr id="481292353" name="Shape 10"/>
           <p:cNvSpPr/>
           <p:nvPr/>
         </p:nvSpPr>
@@ -3387,7 +3387,7 @@
       </p:sp>
       <p:sp>
         <p:nvSpPr>
-          <p:cNvPr id="1103630236" name="Text 11"/>
+          <p:cNvPr id="1224662213" name="Text 11"/>
           <p:cNvSpPr/>
           <p:nvPr/>
         </p:nvSpPr>
@@ -3427,7 +3427,7 @@
       </p:sp>
       <p:sp>
         <p:nvSpPr>
-          <p:cNvPr id="1443345044" name="Text 12"/>
+          <p:cNvPr id="1614079205" name="Text 12"/>
           <p:cNvSpPr/>
           <p:nvPr/>
         </p:nvSpPr>
@@ -3481,7 +3481,7 @@
       </p:sp>
       <p:sp>
         <p:nvSpPr>
-          <p:cNvPr id="1291193684" name="Shape 13"/>
+          <p:cNvPr id="948545986" name="Shape 13"/>
           <p:cNvSpPr/>
           <p:nvPr/>
         </p:nvSpPr>
@@ -3501,7 +3501,7 @@
       </p:sp>
       <p:sp>
         <p:nvSpPr>
-          <p:cNvPr id="3609639" name="Text 14"/>
+          <p:cNvPr id="1690663278" name="Text 14"/>
           <p:cNvSpPr/>
           <p:nvPr/>
         </p:nvSpPr>
@@ -3541,7 +3541,7 @@
       </p:sp>
       <p:sp>
         <p:nvSpPr>
-          <p:cNvPr id="798977127" name="Text 15"/>
+          <p:cNvPr id="1853882234" name="Text 15"/>
           <p:cNvSpPr/>
           <p:nvPr/>
         </p:nvSpPr>
@@ -3635,7 +3635,7 @@
       </p:grpSpPr>
       <p:sp>
         <p:nvSpPr>
-          <p:cNvPr id="834567039" name="Shape 0"/>
+          <p:cNvPr id="1676863189" name="Shape 0"/>
           <p:cNvSpPr/>
           <p:nvPr/>
         </p:nvSpPr>
@@ -3655,7 +3655,7 @@
       </p:sp>
       <p:pic>
         <p:nvPicPr>
-          <p:cNvPr id="1050561795" name="Image 0" descr="preencoded.png"/>
+          <p:cNvPr id="1139250667" name="Image 0" descr="preencoded.png"/>
           <p:cNvPicPr>
             <a:picLocks noChangeAspect="1"/>
           </p:cNvPicPr>
@@ -3677,7 +3677,7 @@
       </p:pic>
       <p:sp>
         <p:nvSpPr>
-          <p:cNvPr id="478204271" name="Text 1"/>
+          <p:cNvPr id="2130727879" name="Text 1"/>
           <p:cNvSpPr/>
           <p:nvPr/>
         </p:nvSpPr>
@@ -3717,7 +3717,7 @@
       </p:sp>
       <p:sp>
         <p:nvSpPr>
-          <p:cNvPr id="6589324" name="Shape 2"/>
+          <p:cNvPr id="123396427" name="Shape 2"/>
           <p:cNvSpPr/>
           <p:nvPr/>
         </p:nvSpPr>
@@ -3739,7 +3739,7 @@
       </p:sp>
       <p:sp>
         <p:nvSpPr>
-          <p:cNvPr id="551185759" name="Text 3"/>
+          <p:cNvPr id="790788635" name="Text 3"/>
           <p:cNvSpPr/>
           <p:nvPr/>
         </p:nvSpPr>
@@ -3779,7 +3779,7 @@
       </p:sp>
       <p:sp>
         <p:nvSpPr>
-          <p:cNvPr id="429688116" name="Shape 4"/>
+          <p:cNvPr id="1324645375" name="Shape 4"/>
           <p:cNvSpPr/>
           <p:nvPr/>
         </p:nvSpPr>
@@ -3799,7 +3799,7 @@
       </p:sp>
       <p:sp>
         <p:nvSpPr>
-          <p:cNvPr id="690739577" name="Text 5"/>
+          <p:cNvPr id="515651770" name="Text 5"/>
           <p:cNvSpPr/>
           <p:nvPr/>
         </p:nvSpPr>
@@ -3839,7 +3839,7 @@
       </p:sp>
       <p:sp>
         <p:nvSpPr>
-          <p:cNvPr id="368849839" name="Text 6"/>
+          <p:cNvPr id="656284840" name="Text 6"/>
           <p:cNvSpPr/>
           <p:nvPr/>
         </p:nvSpPr>
@@ -3893,7 +3893,7 @@
       </p:sp>
       <p:sp>
         <p:nvSpPr>
-          <p:cNvPr id="178917257" name="Shape 7"/>
+          <p:cNvPr id="1097272148" name="Shape 7"/>
           <p:cNvSpPr/>
           <p:nvPr/>
         </p:nvSpPr>
@@ -3913,7 +3913,7 @@
       </p:sp>
       <p:sp>
         <p:nvSpPr>
-          <p:cNvPr id="977125911" name="Text 8"/>
+          <p:cNvPr id="121809245" name="Text 8"/>
           <p:cNvSpPr/>
           <p:nvPr/>
         </p:nvSpPr>
@@ -3953,7 +3953,7 @@
       </p:sp>
       <p:sp>
         <p:nvSpPr>
-          <p:cNvPr id="756824996" name="Text 9"/>
+          <p:cNvPr id="664336703" name="Text 9"/>
           <p:cNvSpPr/>
           <p:nvPr/>
         </p:nvSpPr>
@@ -4007,7 +4007,7 @@
       </p:sp>
       <p:sp>
         <p:nvSpPr>
-          <p:cNvPr id="998153890" name="Shape 10"/>
+          <p:cNvPr id="1516478487" name="Shape 10"/>
           <p:cNvSpPr/>
           <p:nvPr/>
         </p:nvSpPr>
@@ -4027,7 +4027,7 @@
       </p:sp>
       <p:sp>
         <p:nvSpPr>
-          <p:cNvPr id="489719918" name="Text 11"/>
+          <p:cNvPr id="865947942" name="Text 11"/>
           <p:cNvSpPr/>
           <p:nvPr/>
         </p:nvSpPr>
@@ -4067,7 +4067,7 @@
       </p:sp>
       <p:sp>
         <p:nvSpPr>
-          <p:cNvPr id="595327237" name="Text 12"/>
+          <p:cNvPr id="1773545303" name="Text 12"/>
           <p:cNvSpPr/>
           <p:nvPr/>
         </p:nvSpPr>
@@ -4121,7 +4121,7 @@
       </p:sp>
       <p:sp>
         <p:nvSpPr>
-          <p:cNvPr id="562697562" name="Shape 13"/>
+          <p:cNvPr id="1232450669" name="Shape 13"/>
           <p:cNvSpPr/>
           <p:nvPr/>
         </p:nvSpPr>
@@ -4141,7 +4141,7 @@
       </p:sp>
       <p:sp>
         <p:nvSpPr>
-          <p:cNvPr id="1470879487" name="Text 14"/>
+          <p:cNvPr id="407411596" name="Text 14"/>
           <p:cNvSpPr/>
           <p:nvPr/>
         </p:nvSpPr>
@@ -4181,7 +4181,7 @@
       </p:sp>
       <p:sp>
         <p:nvSpPr>
-          <p:cNvPr id="867143111" name="Text 15"/>
+          <p:cNvPr id="1761702408" name="Text 15"/>
           <p:cNvSpPr/>
           <p:nvPr/>
         </p:nvSpPr>
@@ -4275,7 +4275,7 @@
       </p:grpSpPr>
       <p:sp>
         <p:nvSpPr>
-          <p:cNvPr id="1520896777" name="Shape 0"/>
+          <p:cNvPr id="303028903" name="Shape 0"/>
           <p:cNvSpPr/>
           <p:nvPr/>
         </p:nvSpPr>
@@ -4295,7 +4295,7 @@
       </p:sp>
       <p:pic>
         <p:nvPicPr>
-          <p:cNvPr id="1123732443" name="Image 0" descr="preencoded.png"/>
+          <p:cNvPr id="1509832350" name="Image 0" descr="preencoded.png"/>
           <p:cNvPicPr>
             <a:picLocks noChangeAspect="1"/>
           </p:cNvPicPr>
@@ -4317,7 +4317,7 @@
       </p:pic>
       <p:sp>
         <p:nvSpPr>
-          <p:cNvPr id="989839604" name="Text 1"/>
+          <p:cNvPr id="1772558171" name="Text 1"/>
           <p:cNvSpPr/>
           <p:nvPr/>
         </p:nvSpPr>
@@ -4349,15 +4349,69 @@
                 <a:ea typeface="Calibri"/>
                 <a:cs typeface="Calibri"/>
               </a:rPr>
-              <a:t>Hybridation : la technologie au service de l'humain</a:t>
-            </a:r>
-            <a:endParaRPr lang="en-US" sz="2800"/>
-          </a:p>
-        </p:txBody>
-      </p:sp>
-      <p:sp>
-        <p:nvSpPr>
-          <p:cNvPr id="463792863" name="Shape 2"/>
+              <a:t>Hybridation : </a:t>
+            </a:r>
+            <a:r>
+              <a:rPr lang="en-US" sz="2800" b="1">
+                <a:solidFill>
+                  <a:srgbClr val="1F2328"/>
+                </a:solidFill>
+                <a:latin typeface="Calibri"/>
+                <a:ea typeface="Calibri"/>
+                <a:cs typeface="Calibri"/>
+              </a:rPr>
+              <a:t>la technologie </a:t>
+            </a:r>
+            <a:r>
+              <a:rPr lang="en-US" sz="2800" b="1">
+                <a:solidFill>
+                  <a:srgbClr val="1F2328"/>
+                </a:solidFill>
+                <a:latin typeface="Calibri"/>
+                <a:ea typeface="Calibri"/>
+                <a:cs typeface="Calibri"/>
+              </a:rPr>
+              <a:t>au service </a:t>
+            </a:r>
+            <a:endParaRPr lang="en-US" sz="2800" b="1">
+              <a:solidFill>
+                <a:srgbClr val="1F2328"/>
+              </a:solidFill>
+              <a:latin typeface="Calibri"/>
+              <a:ea typeface="Calibri"/>
+              <a:cs typeface="Calibri"/>
+            </a:endParaRPr>
+          </a:p>
+          <a:p>
+            <a:pPr marL="0" indent="0">
+              <a:buNone/>
+              <a:defRPr/>
+            </a:pPr>
+            <a:r>
+              <a:rPr lang="en-US" sz="2800" b="1">
+                <a:solidFill>
+                  <a:srgbClr val="1F2328"/>
+                </a:solidFill>
+                <a:latin typeface="Calibri"/>
+                <a:ea typeface="Calibri"/>
+                <a:cs typeface="Calibri"/>
+              </a:rPr>
+              <a:t>de l'humain</a:t>
+            </a:r>
+            <a:endParaRPr lang="en-US" sz="2800" b="1">
+              <a:solidFill>
+                <a:srgbClr val="1F2328"/>
+              </a:solidFill>
+              <a:latin typeface="Calibri"/>
+              <a:ea typeface="Calibri"/>
+              <a:cs typeface="Calibri"/>
+            </a:endParaRPr>
+          </a:p>
+        </p:txBody>
+      </p:sp>
+      <p:sp>
+        <p:nvSpPr>
+          <p:cNvPr id="881608356" name="Shape 2"/>
           <p:cNvSpPr/>
           <p:nvPr/>
         </p:nvSpPr>
@@ -4379,7 +4433,7 @@
       </p:sp>
       <p:sp>
         <p:nvSpPr>
-          <p:cNvPr id="1445882486" name="Text 3"/>
+          <p:cNvPr id="246468679" name="Text 3"/>
           <p:cNvSpPr/>
           <p:nvPr/>
         </p:nvSpPr>
@@ -4419,7 +4473,7 @@
       </p:sp>
       <p:sp>
         <p:nvSpPr>
-          <p:cNvPr id="944448057" name="Shape 4"/>
+          <p:cNvPr id="1533072108" name="Shape 4"/>
           <p:cNvSpPr/>
           <p:nvPr/>
         </p:nvSpPr>
@@ -4439,7 +4493,7 @@
       </p:sp>
       <p:sp>
         <p:nvSpPr>
-          <p:cNvPr id="748200201" name="Text 5"/>
+          <p:cNvPr id="1356129797" name="Text 5"/>
           <p:cNvSpPr/>
           <p:nvPr/>
         </p:nvSpPr>
@@ -4479,7 +4533,7 @@
       </p:sp>
       <p:sp>
         <p:nvSpPr>
-          <p:cNvPr id="931513839" name="Text 6"/>
+          <p:cNvPr id="523527572" name="Text 6"/>
           <p:cNvSpPr/>
           <p:nvPr/>
         </p:nvSpPr>
@@ -4533,7 +4587,7 @@
       </p:sp>
       <p:sp>
         <p:nvSpPr>
-          <p:cNvPr id="314792224" name="Shape 7"/>
+          <p:cNvPr id="255307718" name="Shape 7"/>
           <p:cNvSpPr/>
           <p:nvPr/>
         </p:nvSpPr>
@@ -4553,7 +4607,7 @@
       </p:sp>
       <p:sp>
         <p:nvSpPr>
-          <p:cNvPr id="562732657" name="Text 8"/>
+          <p:cNvPr id="995268248" name="Text 8"/>
           <p:cNvSpPr/>
           <p:nvPr/>
         </p:nvSpPr>
@@ -4593,7 +4647,7 @@
       </p:sp>
       <p:sp>
         <p:nvSpPr>
-          <p:cNvPr id="680336997" name="Text 9"/>
+          <p:cNvPr id="1656115838" name="Text 9"/>
           <p:cNvSpPr/>
           <p:nvPr/>
         </p:nvSpPr>
@@ -4647,7 +4701,7 @@
       </p:sp>
       <p:sp>
         <p:nvSpPr>
-          <p:cNvPr id="776305647" name="Shape 10"/>
+          <p:cNvPr id="748415393" name="Shape 10"/>
           <p:cNvSpPr/>
           <p:nvPr/>
         </p:nvSpPr>
@@ -4667,7 +4721,7 @@
       </p:sp>
       <p:sp>
         <p:nvSpPr>
-          <p:cNvPr id="72216905" name="Text 11"/>
+          <p:cNvPr id="1776584642" name="Text 11"/>
           <p:cNvSpPr/>
           <p:nvPr/>
         </p:nvSpPr>
@@ -4707,7 +4761,7 @@
       </p:sp>
       <p:sp>
         <p:nvSpPr>
-          <p:cNvPr id="1335462480" name="Text 12"/>
+          <p:cNvPr id="1964333141" name="Text 12"/>
           <p:cNvSpPr/>
           <p:nvPr/>
         </p:nvSpPr>
@@ -4801,7 +4855,7 @@
       </p:grpSpPr>
       <p:sp>
         <p:nvSpPr>
-          <p:cNvPr id="273577765" name="Shape 0"/>
+          <p:cNvPr id="522955634" name="Shape 0"/>
           <p:cNvSpPr/>
           <p:nvPr/>
         </p:nvSpPr>
@@ -4821,7 +4875,7 @@
       </p:sp>
       <p:pic>
         <p:nvPicPr>
-          <p:cNvPr id="721596811" name="Image 0" descr="preencoded.png"/>
+          <p:cNvPr id="1317709014" name="Image 0" descr="preencoded.png"/>
           <p:cNvPicPr>
             <a:picLocks noChangeAspect="1"/>
           </p:cNvPicPr>
@@ -4843,7 +4897,7 @@
       </p:pic>
       <p:sp>
         <p:nvSpPr>
-          <p:cNvPr id="2128325627" name="Text 1"/>
+          <p:cNvPr id="1637478763" name="Text 1"/>
           <p:cNvSpPr/>
           <p:nvPr/>
         </p:nvSpPr>
@@ -4875,7 +4929,32 @@
                 <a:ea typeface="Calibri"/>
                 <a:cs typeface="Calibri"/>
               </a:rPr>
-              <a:t>Durabilité : la sobriété, pas seulement « moins de papier »</a:t>
+              <a:t>Durabilité : la sobriété, pas seulement </a:t>
+            </a:r>
+            <a:endParaRPr lang="en-US" sz="2800" b="1">
+              <a:solidFill>
+                <a:srgbClr val="1F2328"/>
+              </a:solidFill>
+              <a:latin typeface="Calibri"/>
+              <a:ea typeface="Calibri"/>
+              <a:cs typeface="Calibri"/>
+            </a:endParaRPr>
+          </a:p>
+          <a:p>
+            <a:pPr marL="0" indent="0">
+              <a:buNone/>
+              <a:defRPr/>
+            </a:pPr>
+            <a:r>
+              <a:rPr lang="en-US" sz="2800" b="1">
+                <a:solidFill>
+                  <a:srgbClr val="1F2328"/>
+                </a:solidFill>
+                <a:latin typeface="Calibri"/>
+                <a:ea typeface="Calibri"/>
+                <a:cs typeface="Calibri"/>
+              </a:rPr>
+              <a:t>« moins de papier »</a:t>
             </a:r>
             <a:endParaRPr lang="en-US" sz="2800"/>
           </a:p>
@@ -4883,7 +4962,7 @@
       </p:sp>
       <p:sp>
         <p:nvSpPr>
-          <p:cNvPr id="1075697585" name="Shape 2"/>
+          <p:cNvPr id="881727421" name="Shape 2"/>
           <p:cNvSpPr/>
           <p:nvPr/>
         </p:nvSpPr>
@@ -4905,7 +4984,7 @@
       </p:sp>
       <p:sp>
         <p:nvSpPr>
-          <p:cNvPr id="299909333" name="Text 3"/>
+          <p:cNvPr id="1466893324" name="Text 3"/>
           <p:cNvSpPr/>
           <p:nvPr/>
         </p:nvSpPr>
@@ -4945,7 +5024,7 @@
       </p:sp>
       <p:sp>
         <p:nvSpPr>
-          <p:cNvPr id="326646144" name="Shape 4"/>
+          <p:cNvPr id="618692110" name="Shape 4"/>
           <p:cNvSpPr/>
           <p:nvPr/>
         </p:nvSpPr>
@@ -4965,7 +5044,7 @@
       </p:sp>
       <p:sp>
         <p:nvSpPr>
-          <p:cNvPr id="236241986" name="Text 5"/>
+          <p:cNvPr id="1551961406" name="Text 5"/>
           <p:cNvSpPr/>
           <p:nvPr/>
         </p:nvSpPr>
@@ -5005,7 +5084,7 @@
       </p:sp>
       <p:sp>
         <p:nvSpPr>
-          <p:cNvPr id="44410576" name="Text 6"/>
+          <p:cNvPr id="931758247" name="Text 6"/>
           <p:cNvSpPr/>
           <p:nvPr/>
         </p:nvSpPr>
@@ -5059,7 +5138,7 @@
       </p:sp>
       <p:sp>
         <p:nvSpPr>
-          <p:cNvPr id="1377424641" name="Shape 7"/>
+          <p:cNvPr id="1790048891" name="Shape 7"/>
           <p:cNvSpPr/>
           <p:nvPr/>
         </p:nvSpPr>
@@ -5079,7 +5158,7 @@
       </p:sp>
       <p:sp>
         <p:nvSpPr>
-          <p:cNvPr id="589154845" name="Text 8"/>
+          <p:cNvPr id="1706426205" name="Text 8"/>
           <p:cNvSpPr/>
           <p:nvPr/>
         </p:nvSpPr>
@@ -5119,7 +5198,7 @@
       </p:sp>
       <p:sp>
         <p:nvSpPr>
-          <p:cNvPr id="990888863" name="Text 9"/>
+          <p:cNvPr id="916925413" name="Text 9"/>
           <p:cNvSpPr/>
           <p:nvPr/>
         </p:nvSpPr>
@@ -5173,7 +5252,7 @@
       </p:sp>
       <p:sp>
         <p:nvSpPr>
-          <p:cNvPr id="1337178707" name="Shape 10"/>
+          <p:cNvPr id="1483860999" name="Shape 10"/>
           <p:cNvSpPr/>
           <p:nvPr/>
         </p:nvSpPr>
@@ -5193,7 +5272,7 @@
       </p:sp>
       <p:sp>
         <p:nvSpPr>
-          <p:cNvPr id="1964348568" name="Text 11"/>
+          <p:cNvPr id="2129556845" name="Text 11"/>
           <p:cNvSpPr/>
           <p:nvPr/>
         </p:nvSpPr>
@@ -5233,7 +5312,7 @@
       </p:sp>
       <p:sp>
         <p:nvSpPr>
-          <p:cNvPr id="924111887" name="Text 12"/>
+          <p:cNvPr id="1675251791" name="Text 12"/>
           <p:cNvSpPr/>
           <p:nvPr/>
         </p:nvSpPr>
@@ -5287,7 +5366,7 @@
       </p:sp>
       <p:sp>
         <p:nvSpPr>
-          <p:cNvPr id="987256243" name="Shape 13"/>
+          <p:cNvPr id="567503649" name="Shape 13"/>
           <p:cNvSpPr/>
           <p:nvPr/>
         </p:nvSpPr>
@@ -5307,7 +5386,7 @@
       </p:sp>
       <p:sp>
         <p:nvSpPr>
-          <p:cNvPr id="1102085682" name="Text 14"/>
+          <p:cNvPr id="1952930726" name="Text 14"/>
           <p:cNvSpPr/>
           <p:nvPr/>
         </p:nvSpPr>
@@ -5347,7 +5426,7 @@
       </p:sp>
       <p:sp>
         <p:nvSpPr>
-          <p:cNvPr id="1664859665" name="Text 15"/>
+          <p:cNvPr id="1527465565" name="Text 15"/>
           <p:cNvSpPr/>
           <p:nvPr/>
         </p:nvSpPr>
@@ -5441,7 +5520,7 @@
       </p:grpSpPr>
       <p:sp>
         <p:nvSpPr>
-          <p:cNvPr id="1742881296" name=""/>
+          <p:cNvPr id="2045640315" name=""/>
           <p:cNvSpPr/>
           <p:nvPr/>
         </p:nvSpPr>
@@ -5486,7 +5565,7 @@
       </p:sp>
       <p:sp>
         <p:nvSpPr>
-          <p:cNvPr id="801788063" name="Shape 0"/>
+          <p:cNvPr id="421653231" name="Shape 0"/>
           <p:cNvSpPr/>
           <p:nvPr/>
         </p:nvSpPr>
@@ -5508,7 +5587,7 @@
       </p:sp>
       <p:pic>
         <p:nvPicPr>
-          <p:cNvPr id="1049382470" name="Image 0" descr="preencoded.png"/>
+          <p:cNvPr id="345584798" name="Image 0" descr="preencoded.png"/>
           <p:cNvPicPr>
             <a:picLocks noChangeAspect="1"/>
           </p:cNvPicPr>
@@ -5530,7 +5609,7 @@
       </p:pic>
       <p:sp>
         <p:nvSpPr>
-          <p:cNvPr id="2125038076" name="Text 1"/>
+          <p:cNvPr id="2121393973" name="Text 1"/>
           <p:cNvSpPr/>
           <p:nvPr/>
         </p:nvSpPr>
@@ -5573,7 +5652,7 @@
       </p:sp>
       <p:sp>
         <p:nvSpPr>
-          <p:cNvPr id="1845186275" name="Text 2"/>
+          <p:cNvPr id="1933950571" name="Text 2"/>
           <p:cNvSpPr/>
           <p:nvPr/>
         </p:nvSpPr>
@@ -5615,7 +5694,7 @@
       </p:sp>
       <p:sp>
         <p:nvSpPr>
-          <p:cNvPr id="1028367654" name="Text 3"/>
+          <p:cNvPr id="766964092" name="Text 3"/>
           <p:cNvSpPr/>
           <p:nvPr/>
         </p:nvSpPr>

--- a/presentation_charte_CFF.pptx
+++ b/presentation_charte_CFF.pptx
@@ -1,24 +1,24 @@
 
 <file path=ppt/presentation.xml><?xml version="1.0" encoding="utf-8"?>
-<p:presentation xmlns:a="http://schemas.openxmlformats.org/drawingml/2006/main" xmlns:r="http://schemas.openxmlformats.org/officeDocument/2006/relationships" xmlns:p="http://schemas.openxmlformats.org/presentationml/2006/main" xmlns:m="http://schemas.openxmlformats.org/officeDocument/2006/math" xmlns:w="http://schemas.openxmlformats.org/wordprocessingml/2006/main" autoCompressPictures="0" saveSubsetFonts="1">
+<p:presentation xmlns:a="http://schemas.openxmlformats.org/drawingml/2006/main" xmlns:r="http://schemas.openxmlformats.org/officeDocument/2006/relationships" xmlns:p="http://schemas.openxmlformats.org/presentationml/2006/main" saveSubsetFonts="1" autoCompressPictures="0">
   <p:sldMasterIdLst>
     <p:sldMasterId id="2147483648" r:id="rId1"/>
   </p:sldMasterIdLst>
   <p:notesMasterIdLst>
-    <p:notesMasterId r:id="rId11"/>
+    <p:notesMasterId r:id="rId10"/>
   </p:notesMasterIdLst>
   <p:sldIdLst>
-    <p:sldId id="256" r:id="rId3"/>
-    <p:sldId id="257" r:id="rId4"/>
-    <p:sldId id="258" r:id="rId5"/>
-    <p:sldId id="259" r:id="rId6"/>
-    <p:sldId id="260" r:id="rId7"/>
-    <p:sldId id="261" r:id="rId8"/>
-    <p:sldId id="262" r:id="rId9"/>
-    <p:sldId id="263" r:id="rId10"/>
+    <p:sldId id="256" r:id="rId2"/>
+    <p:sldId id="257" r:id="rId3"/>
+    <p:sldId id="258" r:id="rId4"/>
+    <p:sldId id="259" r:id="rId5"/>
+    <p:sldId id="260" r:id="rId6"/>
+    <p:sldId id="261" r:id="rId7"/>
+    <p:sldId id="262" r:id="rId8"/>
+    <p:sldId id="263" r:id="rId9"/>
   </p:sldIdLst>
-  <p:sldSz cx="12191695" cy="6858000"/>
-  <p:notesSz cx="6858000" cy="12191695"/>
+  <p:sldSz cx="12192000" cy="6858000"/>
+  <p:notesSz cx="6858000" cy="12192000"/>
   <p:defaultTextStyle>
     <a:lvl1pPr marL="0" algn="l" defTabSz="914400" rtl="0">
       <a:defRPr sz="1800">
@@ -111,12 +111,28 @@
       </a:defRPr>
     </a:lvl9pPr>
   </p:defaultTextStyle>
+  <p:extLst>
+    <p:ext uri="{EFAFB233-063F-42B5-8137-9DF3F51BA10A}">
+      <p15:sldGuideLst xmlns:p15="http://schemas.microsoft.com/office/powerpoint/2012/main">
+        <p15:guide id="1" pos="3840">
+          <p15:clr>
+            <a:srgbClr val="A4A3A4"/>
+          </p15:clr>
+        </p15:guide>
+        <p15:guide id="2" orient="horz" pos="2160">
+          <p15:clr>
+            <a:srgbClr val="A4A3A4"/>
+          </p15:clr>
+        </p15:guide>
+      </p15:sldGuideLst>
+    </p:ext>
+  </p:extLst>
 </p:presentation>
 </file>
 
 <file path=ppt/notesMasters/notesMaster1.xml><?xml version="1.0" encoding="utf-8"?>
 <p:notesMaster xmlns:a="http://schemas.openxmlformats.org/drawingml/2006/main" xmlns:r="http://schemas.openxmlformats.org/officeDocument/2006/relationships" xmlns:p="http://schemas.openxmlformats.org/presentationml/2006/main">
-  <p:cSld name="">
+  <p:cSld>
     <p:bg>
       <p:bgRef idx="1001">
         <a:schemeClr val="bg1"/>
@@ -202,7 +218,7 @@
             </a:pPr>
             <a:fld id="{5282F153-3F37-0F45-9E97-73ACFA13230C}" type="datetimeFigureOut">
               <a:rPr lang="en-US"/>
-              <a:t>7/23/19</a:t>
+              <a:t>6/5/2026</a:t>
             </a:fld>
             <a:endParaRPr lang="en-US"/>
           </a:p>
@@ -212,7 +228,7 @@
         <p:nvSpPr>
           <p:cNvPr id="1678268221" name="Slide Image Placeholder 3"/>
           <p:cNvSpPr>
-            <a:spLocks noChangeAspect="1" noGrp="1" noRot="1"/>
+            <a:spLocks noGrp="1" noRot="1" noChangeAspect="1"/>
           </p:cNvSpPr>
           <p:nvPr>
             <p:ph type="sldImg" idx="2"/>
@@ -384,7 +400,7 @@
             </a:pPr>
             <a:fld id="{CE5E9CC1-C706-0F49-92D6-E571CC5EEA8F}" type="slidenum">
               <a:rPr lang="en-US"/>
-              <a:t>‹#›</a:t>
+              <a:t>‹N°›</a:t>
             </a:fld>
             <a:endParaRPr lang="en-US"/>
           </a:p>
@@ -489,8 +505,8 @@
 </file>
 
 <file path=ppt/notesSlides/notesSlide1.xml><?xml version="1.0" encoding="utf-8"?>
-<p:notes xmlns:a="http://schemas.openxmlformats.org/drawingml/2006/main" xmlns:r="http://schemas.openxmlformats.org/officeDocument/2006/relationships" xmlns:p="http://schemas.openxmlformats.org/presentationml/2006/main" xmlns:m="http://schemas.openxmlformats.org/officeDocument/2006/math" xmlns:w="http://schemas.openxmlformats.org/wordprocessingml/2006/main">
-  <p:cSld name="">
+<p:notes xmlns:a="http://schemas.openxmlformats.org/drawingml/2006/main" xmlns:r="http://schemas.openxmlformats.org/officeDocument/2006/relationships" xmlns:p="http://schemas.openxmlformats.org/presentationml/2006/main">
+  <p:cSld>
     <p:spTree>
       <p:nvGrpSpPr>
         <p:cNvPr id="1" name=""/>
@@ -509,7 +525,7 @@
         <p:nvSpPr>
           <p:cNvPr id="231788532" name="Slide Image Placeholder 1"/>
           <p:cNvSpPr>
-            <a:spLocks noChangeAspect="1" noGrp="1" noRot="1"/>
+            <a:spLocks noGrp="1" noRot="1" noChangeAspect="1"/>
           </p:cNvSpPr>
           <p:nvPr>
             <p:ph type="sldImg"/>
@@ -539,7 +555,6 @@
               <a:rPr lang="en-US"/>
               <a:t>Ouverture (ensemble, ou Sofian) : « Nous présentons notre charte éthique sur la numérisation des titres de transport aux CFF. Elle se divise en trois parties : l'accès et l'autonomie, l'IA et les données, puis la durabilité numérique. »</a:t>
             </a:r>
-            <a:endParaRPr lang="en-US"/>
           </a:p>
         </p:txBody>
       </p:sp>
@@ -578,8 +593,8 @@
 </file>
 
 <file path=ppt/notesSlides/notesSlide2.xml><?xml version="1.0" encoding="utf-8"?>
-<p:notes xmlns:a="http://schemas.openxmlformats.org/drawingml/2006/main" xmlns:r="http://schemas.openxmlformats.org/officeDocument/2006/relationships" xmlns:p="http://schemas.openxmlformats.org/presentationml/2006/main" xmlns:m="http://schemas.openxmlformats.org/officeDocument/2006/math" xmlns:w="http://schemas.openxmlformats.org/wordprocessingml/2006/main">
-  <p:cSld name="">
+<p:notes xmlns:a="http://schemas.openxmlformats.org/drawingml/2006/main" xmlns:r="http://schemas.openxmlformats.org/officeDocument/2006/relationships" xmlns:p="http://schemas.openxmlformats.org/presentationml/2006/main">
+  <p:cSld>
     <p:spTree>
       <p:nvGrpSpPr>
         <p:cNvPr id="1" name=""/>
@@ -598,7 +613,7 @@
         <p:nvSpPr>
           <p:cNvPr id="1767469509" name="Slide Image Placeholder 1"/>
           <p:cNvSpPr>
-            <a:spLocks noChangeAspect="1" noGrp="1" noRot="1"/>
+            <a:spLocks noGrp="1" noRot="1" noChangeAspect="1"/>
           </p:cNvSpPr>
           <p:nvPr>
             <p:ph type="sldImg"/>
@@ -628,7 +643,6 @@
               <a:rPr lang="en-US"/>
               <a:t>Sofian : présente brièvement les CFF (1,3 M de voyageurs/jour, service public), les technologies numériques des titres, et surtout les personnes vulnérables. Conclut sur la tension : faciliter pour le plus grand nombre peut exclure les plus dépendants. C'est le point de départ de la charte.</a:t>
             </a:r>
-            <a:endParaRPr lang="en-US"/>
           </a:p>
         </p:txBody>
       </p:sp>
@@ -667,8 +681,8 @@
 </file>
 
 <file path=ppt/notesSlides/notesSlide3.xml><?xml version="1.0" encoding="utf-8"?>
-<p:notes xmlns:a="http://schemas.openxmlformats.org/drawingml/2006/main" xmlns:r="http://schemas.openxmlformats.org/officeDocument/2006/relationships" xmlns:p="http://schemas.openxmlformats.org/presentationml/2006/main" xmlns:m="http://schemas.openxmlformats.org/officeDocument/2006/math" xmlns:w="http://schemas.openxmlformats.org/wordprocessingml/2006/main">
-  <p:cSld name="">
+<p:notes xmlns:a="http://schemas.openxmlformats.org/drawingml/2006/main" xmlns:r="http://schemas.openxmlformats.org/officeDocument/2006/relationships" xmlns:p="http://schemas.openxmlformats.org/presentationml/2006/main">
+  <p:cSld>
     <p:spTree>
       <p:nvGrpSpPr>
         <p:cNvPr id="1" name=""/>
@@ -687,7 +701,7 @@
         <p:nvSpPr>
           <p:cNvPr id="1632973118" name="Slide Image Placeholder 1"/>
           <p:cNvSpPr>
-            <a:spLocks noChangeAspect="1" noGrp="1" noRot="1"/>
+            <a:spLocks noGrp="1" noRot="1" noChangeAspect="1"/>
           </p:cNvSpPr>
           <p:nvPr>
             <p:ph type="sldImg"/>
@@ -717,7 +731,6 @@
               <a:rPr lang="en-US"/>
               <a:t>Sofian : nos premiers engagements. Le numérique est une option, pas une obligation : on garde toujours un guichet ou un billet papier, et renoncer au numérique ne doit jamais coûter plus cher. Les interfaces sont accessibles dès la conception, et personne n'est traité comme un citoyen de seconde classe.</a:t>
             </a:r>
-            <a:endParaRPr lang="en-US"/>
           </a:p>
         </p:txBody>
       </p:sp>
@@ -756,8 +769,8 @@
 </file>
 
 <file path=ppt/notesSlides/notesSlide4.xml><?xml version="1.0" encoding="utf-8"?>
-<p:notes xmlns:a="http://schemas.openxmlformats.org/drawingml/2006/main" xmlns:r="http://schemas.openxmlformats.org/officeDocument/2006/relationships" xmlns:p="http://schemas.openxmlformats.org/presentationml/2006/main" xmlns:m="http://schemas.openxmlformats.org/officeDocument/2006/math" xmlns:w="http://schemas.openxmlformats.org/wordprocessingml/2006/main">
-  <p:cSld name="">
+<p:notes xmlns:a="http://schemas.openxmlformats.org/drawingml/2006/main" xmlns:r="http://schemas.openxmlformats.org/officeDocument/2006/relationships" xmlns:p="http://schemas.openxmlformats.org/presentationml/2006/main">
+  <p:cSld>
     <p:spTree>
       <p:nvGrpSpPr>
         <p:cNvPr id="1" name=""/>
@@ -776,7 +789,7 @@
         <p:nvSpPr>
           <p:cNvPr id="190573878" name="Slide Image Placeholder 1"/>
           <p:cNvSpPr>
-            <a:spLocks noChangeAspect="1" noGrp="1" noRot="1"/>
+            <a:spLocks noGrp="1" noRot="1" noChangeAspect="1"/>
           </p:cNvSpPr>
           <p:nvPr>
             <p:ph type="sldImg"/>
@@ -806,7 +819,6 @@
               <a:rPr lang="en-US"/>
               <a:t>Arthur : sur l'IA (prix EasyRide, fraude, prévision d'affluence), nous posons quatre garde-fous : transparence, contrôle humain pour toute décision à conséquences, audit des biais, et non-substitution du jugement humain. L'algorithme aide, mais ne tranche jamais seul une amende ou un blocage.</a:t>
             </a:r>
-            <a:endParaRPr lang="en-US"/>
           </a:p>
         </p:txBody>
       </p:sp>
@@ -845,8 +857,8 @@
 </file>
 
 <file path=ppt/notesSlides/notesSlide5.xml><?xml version="1.0" encoding="utf-8"?>
-<p:notes xmlns:a="http://schemas.openxmlformats.org/drawingml/2006/main" xmlns:r="http://schemas.openxmlformats.org/officeDocument/2006/relationships" xmlns:p="http://schemas.openxmlformats.org/presentationml/2006/main" xmlns:m="http://schemas.openxmlformats.org/officeDocument/2006/math" xmlns:w="http://schemas.openxmlformats.org/wordprocessingml/2006/main">
-  <p:cSld name="">
+<p:notes xmlns:a="http://schemas.openxmlformats.org/drawingml/2006/main" xmlns:r="http://schemas.openxmlformats.org/officeDocument/2006/relationships" xmlns:p="http://schemas.openxmlformats.org/presentationml/2006/main">
+  <p:cSld>
     <p:spTree>
       <p:nvGrpSpPr>
         <p:cNvPr id="1" name=""/>
@@ -865,7 +877,7 @@
         <p:nvSpPr>
           <p:cNvPr id="1384781065" name="Slide Image Placeholder 1"/>
           <p:cNvSpPr>
-            <a:spLocks noChangeAspect="1" noGrp="1" noRot="1"/>
+            <a:spLocks noGrp="1" noRot="1" noChangeAspect="1"/>
           </p:cNvSpPr>
           <p:nvPr>
             <p:ph type="sldImg"/>
@@ -895,7 +907,6 @@
               <a:rPr lang="en-US"/>
               <a:t>Arthur : dans un service public, la confiance est essentielle. Nous minimisons les données, les hébergeons en Suisse, refusons toute revente publicitaire et tout historique permanent des trajets. Et nous refusons la biométrie obligatoire : on doit pouvoir se déplacer sans être identifié ni tracé.</a:t>
             </a:r>
-            <a:endParaRPr lang="en-US"/>
           </a:p>
         </p:txBody>
       </p:sp>
@@ -934,8 +945,8 @@
 </file>
 
 <file path=ppt/notesSlides/notesSlide6.xml><?xml version="1.0" encoding="utf-8"?>
-<p:notes xmlns:a="http://schemas.openxmlformats.org/drawingml/2006/main" xmlns:r="http://schemas.openxmlformats.org/officeDocument/2006/relationships" xmlns:p="http://schemas.openxmlformats.org/presentationml/2006/main" xmlns:m="http://schemas.openxmlformats.org/officeDocument/2006/math" xmlns:w="http://schemas.openxmlformats.org/wordprocessingml/2006/main">
-  <p:cSld name="">
+<p:notes xmlns:a="http://schemas.openxmlformats.org/drawingml/2006/main" xmlns:r="http://schemas.openxmlformats.org/officeDocument/2006/relationships" xmlns:p="http://schemas.openxmlformats.org/presentationml/2006/main">
+  <p:cSld>
     <p:spTree>
       <p:nvGrpSpPr>
         <p:cNvPr id="1" name=""/>
@@ -954,7 +965,7 @@
         <p:nvSpPr>
           <p:cNvPr id="655796939" name="Slide Image Placeholder 1"/>
           <p:cNvSpPr>
-            <a:spLocks noChangeAspect="1" noGrp="1" noRot="1"/>
+            <a:spLocks noGrp="1" noRot="1" noChangeAspect="1"/>
           </p:cNvSpPr>
           <p:nvPr>
             <p:ph type="sldImg"/>
@@ -984,7 +995,6 @@
               <a:rPr lang="en-US"/>
               <a:t>Mirco : la bonne hybridation met la technologie au service de l'humain. Elle augmente les capacités du voyageur et libère le personnel des tâches répétitives pour le recentrer sur la relation. Garder une présence humaine en gare est un choix assumé, pas une dépense à éliminer.</a:t>
             </a:r>
-            <a:endParaRPr lang="en-US"/>
           </a:p>
         </p:txBody>
       </p:sp>
@@ -1023,8 +1033,8 @@
 </file>
 
 <file path=ppt/notesSlides/notesSlide7.xml><?xml version="1.0" encoding="utf-8"?>
-<p:notes xmlns:a="http://schemas.openxmlformats.org/drawingml/2006/main" xmlns:r="http://schemas.openxmlformats.org/officeDocument/2006/relationships" xmlns:p="http://schemas.openxmlformats.org/presentationml/2006/main" xmlns:m="http://schemas.openxmlformats.org/officeDocument/2006/math" xmlns:w="http://schemas.openxmlformats.org/wordprocessingml/2006/main">
-  <p:cSld name="">
+<p:notes xmlns:a="http://schemas.openxmlformats.org/drawingml/2006/main" xmlns:r="http://schemas.openxmlformats.org/officeDocument/2006/relationships" xmlns:p="http://schemas.openxmlformats.org/presentationml/2006/main">
+  <p:cSld>
     <p:spTree>
       <p:nvGrpSpPr>
         <p:cNvPr id="1" name=""/>
@@ -1043,7 +1053,7 @@
         <p:nvSpPr>
           <p:cNvPr id="828770892" name="Slide Image Placeholder 1"/>
           <p:cNvSpPr>
-            <a:spLocks noChangeAspect="1" noGrp="1" noRot="1"/>
+            <a:spLocks noGrp="1" noRot="1" noChangeAspect="1"/>
           </p:cNvSpPr>
           <p:nvPr>
             <p:ph type="sldImg"/>
@@ -1073,7 +1083,6 @@
               <a:rPr lang="en-US"/>
               <a:t>Mirco : la durabilité ne se résume pas à supprimer le papier. Nous visons la sobriété : ne numériser que l'utile, des applications légères qui fonctionnent sur du matériel ancien, des supports durables comme le SwissPass, et une énergie renouvelable. Surtout, nous mesurons et publions l'empreinte réelle, car le numérique n'est pas immatériel.</a:t>
             </a:r>
-            <a:endParaRPr lang="en-US"/>
           </a:p>
         </p:txBody>
       </p:sp>
@@ -1112,8 +1121,8 @@
 </file>
 
 <file path=ppt/notesSlides/notesSlide8.xml><?xml version="1.0" encoding="utf-8"?>
-<p:notes xmlns:a="http://schemas.openxmlformats.org/drawingml/2006/main" xmlns:r="http://schemas.openxmlformats.org/officeDocument/2006/relationships" xmlns:p="http://schemas.openxmlformats.org/presentationml/2006/main" xmlns:m="http://schemas.openxmlformats.org/officeDocument/2006/math" xmlns:w="http://schemas.openxmlformats.org/wordprocessingml/2006/main">
-  <p:cSld name="">
+<p:notes xmlns:a="http://schemas.openxmlformats.org/drawingml/2006/main" xmlns:r="http://schemas.openxmlformats.org/officeDocument/2006/relationships" xmlns:p="http://schemas.openxmlformats.org/presentationml/2006/main">
+  <p:cSld>
     <p:spTree>
       <p:nvGrpSpPr>
         <p:cNvPr id="1" name=""/>
@@ -1132,7 +1141,7 @@
         <p:nvSpPr>
           <p:cNvPr id="1671790778" name="Slide Image Placeholder 1"/>
           <p:cNvSpPr>
-            <a:spLocks noChangeAspect="1" noGrp="1" noRot="1"/>
+            <a:spLocks noGrp="1" noRot="1" noChangeAspect="1"/>
           </p:cNvSpPr>
           <p:nvPr>
             <p:ph type="sldImg"/>
@@ -1162,7 +1171,6 @@
               <a:rPr lang="en-US"/>
               <a:t>Conclusion (ensemble, ou Mirco) : nos choix techniques sont des choix éthiques. Notre objectif : une mobilité numérique qui n'oublie personne, sobre et respectueuse de la vie privée. Remerciements.</a:t>
             </a:r>
-            <a:endParaRPr lang="en-US"/>
           </a:p>
         </p:txBody>
       </p:sp>
@@ -1201,7 +1209,7 @@
 </file>
 
 <file path=ppt/slideLayouts/slideLayout1.xml><?xml version="1.0" encoding="utf-8"?>
-<p:sldLayout xmlns:a="http://schemas.openxmlformats.org/drawingml/2006/main" xmlns:r="http://schemas.openxmlformats.org/officeDocument/2006/relationships" xmlns:p="http://schemas.openxmlformats.org/presentationml/2006/main" xmlns:m="http://schemas.openxmlformats.org/officeDocument/2006/math" xmlns:w="http://schemas.openxmlformats.org/wordprocessingml/2006/main" matchingName="" preserve="1" showMasterPhAnim="0" showMasterSp="1" userDrawn="1">
+<p:sldLayout xmlns:a="http://schemas.openxmlformats.org/drawingml/2006/main" xmlns:r="http://schemas.openxmlformats.org/officeDocument/2006/relationships" xmlns:p="http://schemas.openxmlformats.org/presentationml/2006/main" showMasterPhAnim="0" preserve="1" userDrawn="1">
   <p:cSld name="DEFAULT">
     <p:bg>
       <p:bgRef idx="1001">
@@ -1231,8 +1239,13 @@
 </file>
 
 <file path=ppt/slideMasters/slideMaster1.xml><?xml version="1.0" encoding="utf-8"?>
-<p:sldMaster xmlns:a="http://schemas.openxmlformats.org/drawingml/2006/main" xmlns:r="http://schemas.openxmlformats.org/officeDocument/2006/relationships" xmlns:p="http://schemas.openxmlformats.org/presentationml/2006/main" xmlns:m="http://schemas.openxmlformats.org/officeDocument/2006/math" xmlns:w="http://schemas.openxmlformats.org/wordprocessingml/2006/main" preserve="0">
-  <p:cSld name="">
+<p:sldMaster xmlns:a="http://schemas.openxmlformats.org/drawingml/2006/main" xmlns:r="http://schemas.openxmlformats.org/officeDocument/2006/relationships" xmlns:p="http://schemas.openxmlformats.org/presentationml/2006/main">
+  <p:cSld>
+    <p:bg>
+      <p:bgRef idx="1001">
+        <a:schemeClr val="bg1"/>
+      </p:bgRef>
+    </p:bg>
     <p:spTree>
       <p:nvGrpSpPr>
         <p:cNvPr id="1" name=""/>
@@ -1253,7 +1266,7 @@
   <p:sldLayoutIdLst>
     <p:sldLayoutId id="2147483649" r:id="rId1"/>
   </p:sldLayoutIdLst>
-  <p:hf dt="0" ftr="0" hdr="0" sldNum="0"/>
+  <p:hf sldNum="0" hdr="0" ftr="0" dt="0"/>
   <p:txStyles>
     <p:titleStyle>
       <a:lvl1pPr algn="ctr" defTabSz="914400" rtl="0">
@@ -1508,13 +1521,14 @@
 </file>
 
 <file path=ppt/slides/slide1.xml><?xml version="1.0" encoding="utf-8"?>
-<p:sld xmlns:a="http://schemas.openxmlformats.org/drawingml/2006/main" xmlns:r="http://schemas.openxmlformats.org/officeDocument/2006/relationships" xmlns:p="http://schemas.openxmlformats.org/presentationml/2006/main" xmlns:m="http://schemas.openxmlformats.org/officeDocument/2006/math" xmlns:w="http://schemas.openxmlformats.org/wordprocessingml/2006/main" xmlns:mc="http://schemas.openxmlformats.org/markup-compatibility/2006" showMasterPhAnim="0" showMasterSp="1" show="1">
+<p:sld xmlns:a="http://schemas.openxmlformats.org/drawingml/2006/main" xmlns:r="http://schemas.openxmlformats.org/officeDocument/2006/relationships" xmlns:p="http://schemas.openxmlformats.org/presentationml/2006/main" showMasterPhAnim="0">
   <p:cSld name="Slide 1">
     <p:bg>
-      <p:bgPr shadeToTitle="0">
+      <p:bgPr>
         <a:solidFill>
           <a:srgbClr val="EB0000"/>
         </a:solidFill>
+        <a:effectLst/>
       </p:bgPr>
     </p:bg>
     <p:spTree>
@@ -1533,12 +1547,12 @@
       </p:grpSpPr>
       <p:sp>
         <p:nvSpPr>
-          <p:cNvPr id="1051118313" name=""/>
-          <p:cNvSpPr/>
-          <p:nvPr/>
-        </p:nvSpPr>
-        <p:spPr bwMode="auto">
-          <a:xfrm rot="0" flipH="0" flipV="0">
+          <p:cNvPr id="1051118313" name="Rectangle 1051118312"/>
+          <p:cNvSpPr/>
+          <p:nvPr/>
+        </p:nvSpPr>
+        <p:spPr bwMode="auto">
+          <a:xfrm>
             <a:off x="-120695" y="-55376"/>
             <a:ext cx="12626162" cy="7066220"/>
           </a:xfrm>
@@ -1575,6 +1589,13 @@
             <a:schemeClr val="lt1"/>
           </a:fontRef>
         </p:style>
+        <p:txBody>
+          <a:bodyPr/>
+          <a:lstStyle/>
+          <a:p>
+            <a:endParaRPr lang="fr-CH"/>
+          </a:p>
+        </p:txBody>
       </p:sp>
       <p:sp>
         <p:nvSpPr>
@@ -1795,11 +1816,11 @@
   <p:clrMapOvr>
     <a:masterClrMapping/>
   </p:clrMapOvr>
-  <mc:AlternateContent xmlns:mc="http://schemas.openxmlformats.org/markup-compatibility/2006">
-    <mc:Choice xmlns:p159="http://schemas.microsoft.com/office/powerpoint/2015/09/main" xmlns:p14="http://schemas.microsoft.com/office/powerpoint/2010/main" Requires="p159">
-      <p:transition p14:dur="500" advClick="1"/>
+  <mc:AlternateContent xmlns:mc="http://schemas.openxmlformats.org/markup-compatibility/2006" xmlns:p159="http://schemas.microsoft.com/office/powerpoint/2015/09/main">
+    <mc:Choice Requires="p159">
+      <p:transition/>
     </mc:Choice>
-    <mc:Fallback>
+    <mc:Fallback xmlns:w="http://schemas.openxmlformats.org/wordprocessingml/2006/main" xmlns:m="http://schemas.openxmlformats.org/officeDocument/2006/math" xmlns="">
       <p:transition advClick="1"/>
     </mc:Fallback>
   </mc:AlternateContent>
@@ -1807,13 +1828,14 @@
 </file>
 
 <file path=ppt/slides/slide2.xml><?xml version="1.0" encoding="utf-8"?>
-<p:sld xmlns:a="http://schemas.openxmlformats.org/drawingml/2006/main" xmlns:r="http://schemas.openxmlformats.org/officeDocument/2006/relationships" xmlns:p="http://schemas.openxmlformats.org/presentationml/2006/main" xmlns:m="http://schemas.openxmlformats.org/officeDocument/2006/math" xmlns:w="http://schemas.openxmlformats.org/wordprocessingml/2006/main" xmlns:mc="http://schemas.openxmlformats.org/markup-compatibility/2006" showMasterPhAnim="0" showMasterSp="1" show="1">
+<p:sld xmlns:a="http://schemas.openxmlformats.org/drawingml/2006/main" xmlns:r="http://schemas.openxmlformats.org/officeDocument/2006/relationships" xmlns:p="http://schemas.openxmlformats.org/presentationml/2006/main" showMasterPhAnim="0">
   <p:cSld name="Slide 2">
     <p:bg>
-      <p:bgPr shadeToTitle="0">
+      <p:bgPr>
         <a:solidFill>
           <a:srgbClr val="FFFFFF"/>
         </a:solidFill>
+        <a:effectLst/>
       </p:bgPr>
     </p:bg>
     <p:spTree>
@@ -1849,6 +1871,13 @@
           </a:solidFill>
           <a:ln/>
         </p:spPr>
+        <p:txBody>
+          <a:bodyPr/>
+          <a:lstStyle/>
+          <a:p>
+            <a:endParaRPr lang="fr-CH"/>
+          </a:p>
+        </p:txBody>
       </p:sp>
       <p:pic>
         <p:nvPicPr>
@@ -1933,6 +1962,13 @@
           </a:solidFill>
           <a:ln/>
         </p:spPr>
+        <p:txBody>
+          <a:bodyPr/>
+          <a:lstStyle/>
+          <a:p>
+            <a:endParaRPr lang="fr-CH"/>
+          </a:p>
+        </p:txBody>
       </p:sp>
       <p:sp>
         <p:nvSpPr>
@@ -1995,13 +2031,20 @@
           </a:solidFill>
           <a:ln/>
           <a:effectLst>
-            <a:outerShdw blurRad="88900" dist="38100" dir="8100000" sx="100000" sy="100000" kx="0" ky="0" algn="bl" rotWithShape="0">
+            <a:outerShdw blurRad="88900" dist="38100" dir="8100000" algn="bl" rotWithShape="0">
               <a:srgbClr val="000000">
                 <a:alpha val="10000"/>
               </a:srgbClr>
             </a:outerShdw>
           </a:effectLst>
         </p:spPr>
+        <p:txBody>
+          <a:bodyPr/>
+          <a:lstStyle/>
+          <a:p>
+            <a:endParaRPr lang="fr-CH"/>
+          </a:p>
+        </p:txBody>
       </p:sp>
       <p:sp>
         <p:nvSpPr>
@@ -2174,13 +2217,20 @@
           </a:solidFill>
           <a:ln/>
           <a:effectLst>
-            <a:outerShdw blurRad="88900" dist="38100" dir="8100000" sx="100000" sy="100000" kx="0" ky="0" algn="bl" rotWithShape="0">
+            <a:outerShdw blurRad="88900" dist="38100" dir="8100000" algn="bl" rotWithShape="0">
               <a:srgbClr val="000000">
                 <a:alpha val="10000"/>
               </a:srgbClr>
             </a:outerShdw>
           </a:effectLst>
         </p:spPr>
+        <p:txBody>
+          <a:bodyPr/>
+          <a:lstStyle/>
+          <a:p>
+            <a:endParaRPr lang="fr-CH"/>
+          </a:p>
+        </p:txBody>
       </p:sp>
       <p:sp>
         <p:nvSpPr>
@@ -2375,6 +2425,13 @@
           </a:solidFill>
           <a:ln/>
         </p:spPr>
+        <p:txBody>
+          <a:bodyPr/>
+          <a:lstStyle/>
+          <a:p>
+            <a:endParaRPr lang="fr-CH"/>
+          </a:p>
+        </p:txBody>
       </p:sp>
       <p:sp>
         <p:nvSpPr>
@@ -2432,11 +2489,11 @@
   <p:clrMapOvr>
     <a:masterClrMapping/>
   </p:clrMapOvr>
-  <mc:AlternateContent xmlns:mc="http://schemas.openxmlformats.org/markup-compatibility/2006">
-    <mc:Choice xmlns:p159="http://schemas.microsoft.com/office/powerpoint/2015/09/main" xmlns:p14="http://schemas.microsoft.com/office/powerpoint/2010/main" Requires="p159">
-      <p:transition p14:dur="500" advClick="1"/>
+  <mc:AlternateContent xmlns:mc="http://schemas.openxmlformats.org/markup-compatibility/2006" xmlns:p159="http://schemas.microsoft.com/office/powerpoint/2015/09/main">
+    <mc:Choice Requires="p159">
+      <p:transition/>
     </mc:Choice>
-    <mc:Fallback>
+    <mc:Fallback xmlns:w="http://schemas.openxmlformats.org/wordprocessingml/2006/main" xmlns:m="http://schemas.openxmlformats.org/officeDocument/2006/math" xmlns="">
       <p:transition advClick="1"/>
     </mc:Fallback>
   </mc:AlternateContent>
@@ -2444,13 +2501,14 @@
 </file>
 
 <file path=ppt/slides/slide3.xml><?xml version="1.0" encoding="utf-8"?>
-<p:sld xmlns:a="http://schemas.openxmlformats.org/drawingml/2006/main" xmlns:r="http://schemas.openxmlformats.org/officeDocument/2006/relationships" xmlns:p="http://schemas.openxmlformats.org/presentationml/2006/main" xmlns:m="http://schemas.openxmlformats.org/officeDocument/2006/math" xmlns:w="http://schemas.openxmlformats.org/wordprocessingml/2006/main" xmlns:mc="http://schemas.openxmlformats.org/markup-compatibility/2006" showMasterPhAnim="0" showMasterSp="1" show="1">
+<p:sld xmlns:a="http://schemas.openxmlformats.org/drawingml/2006/main" xmlns:r="http://schemas.openxmlformats.org/officeDocument/2006/relationships" xmlns:p="http://schemas.openxmlformats.org/presentationml/2006/main" showMasterPhAnim="0">
   <p:cSld name="Slide 3">
     <p:bg>
-      <p:bgPr shadeToTitle="0">
+      <p:bgPr>
         <a:solidFill>
           <a:srgbClr val="FFFFFF"/>
         </a:solidFill>
+        <a:effectLst/>
       </p:bgPr>
     </p:bg>
     <p:spTree>
@@ -2486,6 +2544,13 @@
           </a:solidFill>
           <a:ln/>
         </p:spPr>
+        <p:txBody>
+          <a:bodyPr/>
+          <a:lstStyle/>
+          <a:p>
+            <a:endParaRPr lang="fr-CH"/>
+          </a:p>
+        </p:txBody>
       </p:sp>
       <p:pic>
         <p:nvPicPr>
@@ -2570,6 +2635,13 @@
           </a:solidFill>
           <a:ln/>
         </p:spPr>
+        <p:txBody>
+          <a:bodyPr/>
+          <a:lstStyle/>
+          <a:p>
+            <a:endParaRPr lang="fr-CH"/>
+          </a:p>
+        </p:txBody>
       </p:sp>
       <p:sp>
         <p:nvSpPr>
@@ -2630,6 +2702,13 @@
           </a:solidFill>
           <a:ln/>
         </p:spPr>
+        <p:txBody>
+          <a:bodyPr/>
+          <a:lstStyle/>
+          <a:p>
+            <a:endParaRPr lang="fr-CH"/>
+          </a:p>
+        </p:txBody>
       </p:sp>
       <p:sp>
         <p:nvSpPr>
@@ -2744,6 +2823,13 @@
           </a:solidFill>
           <a:ln/>
         </p:spPr>
+        <p:txBody>
+          <a:bodyPr/>
+          <a:lstStyle/>
+          <a:p>
+            <a:endParaRPr lang="fr-CH"/>
+          </a:p>
+        </p:txBody>
       </p:sp>
       <p:sp>
         <p:nvSpPr>
@@ -2858,6 +2944,13 @@
           </a:solidFill>
           <a:ln/>
         </p:spPr>
+        <p:txBody>
+          <a:bodyPr/>
+          <a:lstStyle/>
+          <a:p>
+            <a:endParaRPr lang="fr-CH"/>
+          </a:p>
+        </p:txBody>
       </p:sp>
       <p:sp>
         <p:nvSpPr>
@@ -2958,11 +3051,11 @@
   <p:clrMapOvr>
     <a:masterClrMapping/>
   </p:clrMapOvr>
-  <mc:AlternateContent xmlns:mc="http://schemas.openxmlformats.org/markup-compatibility/2006">
-    <mc:Choice xmlns:p159="http://schemas.microsoft.com/office/powerpoint/2015/09/main" xmlns:p14="http://schemas.microsoft.com/office/powerpoint/2010/main" Requires="p159">
-      <p:transition p14:dur="500" advClick="1"/>
+  <mc:AlternateContent xmlns:mc="http://schemas.openxmlformats.org/markup-compatibility/2006" xmlns:p159="http://schemas.microsoft.com/office/powerpoint/2015/09/main">
+    <mc:Choice Requires="p159">
+      <p:transition/>
     </mc:Choice>
-    <mc:Fallback>
+    <mc:Fallback xmlns:w="http://schemas.openxmlformats.org/wordprocessingml/2006/main" xmlns:m="http://schemas.openxmlformats.org/officeDocument/2006/math" xmlns="">
       <p:transition advClick="1"/>
     </mc:Fallback>
   </mc:AlternateContent>
@@ -2970,13 +3063,14 @@
 </file>
 
 <file path=ppt/slides/slide4.xml><?xml version="1.0" encoding="utf-8"?>
-<p:sld xmlns:a="http://schemas.openxmlformats.org/drawingml/2006/main" xmlns:r="http://schemas.openxmlformats.org/officeDocument/2006/relationships" xmlns:p="http://schemas.openxmlformats.org/presentationml/2006/main" xmlns:m="http://schemas.openxmlformats.org/officeDocument/2006/math" xmlns:w="http://schemas.openxmlformats.org/wordprocessingml/2006/main" xmlns:mc="http://schemas.openxmlformats.org/markup-compatibility/2006" showMasterPhAnim="0" showMasterSp="1" show="1">
+<p:sld xmlns:a="http://schemas.openxmlformats.org/drawingml/2006/main" xmlns:r="http://schemas.openxmlformats.org/officeDocument/2006/relationships" xmlns:p="http://schemas.openxmlformats.org/presentationml/2006/main" showMasterPhAnim="0">
   <p:cSld name="Slide 4">
     <p:bg>
-      <p:bgPr shadeToTitle="0">
+      <p:bgPr>
         <a:solidFill>
           <a:srgbClr val="FFFFFF"/>
         </a:solidFill>
+        <a:effectLst/>
       </p:bgPr>
     </p:bg>
     <p:spTree>
@@ -3012,6 +3106,13 @@
           </a:solidFill>
           <a:ln/>
         </p:spPr>
+        <p:txBody>
+          <a:bodyPr/>
+          <a:lstStyle/>
+          <a:p>
+            <a:endParaRPr lang="fr-CH"/>
+          </a:p>
+        </p:txBody>
       </p:sp>
       <p:pic>
         <p:nvPicPr>
@@ -3096,6 +3197,13 @@
           </a:solidFill>
           <a:ln/>
         </p:spPr>
+        <p:txBody>
+          <a:bodyPr/>
+          <a:lstStyle/>
+          <a:p>
+            <a:endParaRPr lang="fr-CH"/>
+          </a:p>
+        </p:txBody>
       </p:sp>
       <p:sp>
         <p:nvSpPr>
@@ -3156,6 +3264,13 @@
           </a:solidFill>
           <a:ln/>
         </p:spPr>
+        <p:txBody>
+          <a:bodyPr/>
+          <a:lstStyle/>
+          <a:p>
+            <a:endParaRPr lang="fr-CH"/>
+          </a:p>
+        </p:txBody>
       </p:sp>
       <p:sp>
         <p:nvSpPr>
@@ -3270,6 +3385,13 @@
           </a:solidFill>
           <a:ln/>
         </p:spPr>
+        <p:txBody>
+          <a:bodyPr/>
+          <a:lstStyle/>
+          <a:p>
+            <a:endParaRPr lang="fr-CH"/>
+          </a:p>
+        </p:txBody>
       </p:sp>
       <p:sp>
         <p:nvSpPr>
@@ -3384,6 +3506,13 @@
           </a:solidFill>
           <a:ln/>
         </p:spPr>
+        <p:txBody>
+          <a:bodyPr/>
+          <a:lstStyle/>
+          <a:p>
+            <a:endParaRPr lang="fr-CH"/>
+          </a:p>
+        </p:txBody>
       </p:sp>
       <p:sp>
         <p:nvSpPr>
@@ -3498,6 +3627,13 @@
           </a:solidFill>
           <a:ln/>
         </p:spPr>
+        <p:txBody>
+          <a:bodyPr/>
+          <a:lstStyle/>
+          <a:p>
+            <a:endParaRPr lang="fr-CH"/>
+          </a:p>
+        </p:txBody>
       </p:sp>
       <p:sp>
         <p:nvSpPr>
@@ -3598,11 +3734,11 @@
   <p:clrMapOvr>
     <a:masterClrMapping/>
   </p:clrMapOvr>
-  <mc:AlternateContent xmlns:mc="http://schemas.openxmlformats.org/markup-compatibility/2006">
-    <mc:Choice xmlns:p159="http://schemas.microsoft.com/office/powerpoint/2015/09/main" xmlns:p14="http://schemas.microsoft.com/office/powerpoint/2010/main" Requires="p159">
-      <p:transition p14:dur="500" advClick="1"/>
+  <mc:AlternateContent xmlns:mc="http://schemas.openxmlformats.org/markup-compatibility/2006" xmlns:p159="http://schemas.microsoft.com/office/powerpoint/2015/09/main">
+    <mc:Choice Requires="p159">
+      <p:transition/>
     </mc:Choice>
-    <mc:Fallback>
+    <mc:Fallback xmlns:w="http://schemas.openxmlformats.org/wordprocessingml/2006/main" xmlns:m="http://schemas.openxmlformats.org/officeDocument/2006/math" xmlns="">
       <p:transition advClick="1"/>
     </mc:Fallback>
   </mc:AlternateContent>
@@ -3610,13 +3746,14 @@
 </file>
 
 <file path=ppt/slides/slide5.xml><?xml version="1.0" encoding="utf-8"?>
-<p:sld xmlns:a="http://schemas.openxmlformats.org/drawingml/2006/main" xmlns:r="http://schemas.openxmlformats.org/officeDocument/2006/relationships" xmlns:p="http://schemas.openxmlformats.org/presentationml/2006/main" xmlns:m="http://schemas.openxmlformats.org/officeDocument/2006/math" xmlns:w="http://schemas.openxmlformats.org/wordprocessingml/2006/main" xmlns:mc="http://schemas.openxmlformats.org/markup-compatibility/2006" showMasterPhAnim="0" showMasterSp="1" show="1">
+<p:sld xmlns:a="http://schemas.openxmlformats.org/drawingml/2006/main" xmlns:r="http://schemas.openxmlformats.org/officeDocument/2006/relationships" xmlns:p="http://schemas.openxmlformats.org/presentationml/2006/main" showMasterPhAnim="0">
   <p:cSld name="Slide 5">
     <p:bg>
-      <p:bgPr shadeToTitle="0">
+      <p:bgPr>
         <a:solidFill>
           <a:srgbClr val="FFFFFF"/>
         </a:solidFill>
+        <a:effectLst/>
       </p:bgPr>
     </p:bg>
     <p:spTree>
@@ -3652,6 +3789,13 @@
           </a:solidFill>
           <a:ln/>
         </p:spPr>
+        <p:txBody>
+          <a:bodyPr/>
+          <a:lstStyle/>
+          <a:p>
+            <a:endParaRPr lang="fr-CH"/>
+          </a:p>
+        </p:txBody>
       </p:sp>
       <p:pic>
         <p:nvPicPr>
@@ -3736,6 +3880,13 @@
           </a:solidFill>
           <a:ln/>
         </p:spPr>
+        <p:txBody>
+          <a:bodyPr/>
+          <a:lstStyle/>
+          <a:p>
+            <a:endParaRPr lang="fr-CH"/>
+          </a:p>
+        </p:txBody>
       </p:sp>
       <p:sp>
         <p:nvSpPr>
@@ -3796,6 +3947,13 @@
           </a:solidFill>
           <a:ln/>
         </p:spPr>
+        <p:txBody>
+          <a:bodyPr/>
+          <a:lstStyle/>
+          <a:p>
+            <a:endParaRPr lang="fr-CH"/>
+          </a:p>
+        </p:txBody>
       </p:sp>
       <p:sp>
         <p:nvSpPr>
@@ -3910,6 +4068,13 @@
           </a:solidFill>
           <a:ln/>
         </p:spPr>
+        <p:txBody>
+          <a:bodyPr/>
+          <a:lstStyle/>
+          <a:p>
+            <a:endParaRPr lang="fr-CH"/>
+          </a:p>
+        </p:txBody>
       </p:sp>
       <p:sp>
         <p:nvSpPr>
@@ -3980,7 +4145,7 @@
               <a:defRPr/>
             </a:pPr>
             <a:r>
-              <a:rPr lang="en-US" sz="1650" b="1">
+              <a:rPr lang="en-US" sz="1650" b="1" dirty="0">
                 <a:solidFill>
                   <a:srgbClr val="1F2328"/>
                 </a:solidFill>
@@ -3988,10 +4153,21 @@
                 <a:ea typeface="Calibri"/>
                 <a:cs typeface="Calibri"/>
               </a:rPr>
-              <a:t>Jamais de revente</a:t>
-            </a:r>
-            <a:r>
-              <a:rPr lang="en-US" sz="1650">
+              <a:t>Jamais de </a:t>
+            </a:r>
+            <a:r>
+              <a:rPr lang="en-US" sz="1650" b="1" dirty="0" err="1">
+                <a:solidFill>
+                  <a:srgbClr val="1F2328"/>
+                </a:solidFill>
+                <a:latin typeface="Calibri"/>
+                <a:ea typeface="Calibri"/>
+                <a:cs typeface="Calibri"/>
+              </a:rPr>
+              <a:t>revente</a:t>
+            </a:r>
+            <a:r>
+              <a:rPr lang="en-US" sz="1650" dirty="0">
                 <a:solidFill>
                   <a:srgbClr val="5B6470"/>
                 </a:solidFill>
@@ -3999,9 +4175,31 @@
                 <a:ea typeface="Calibri"/>
                 <a:cs typeface="Calibri"/>
               </a:rPr>
-              <a:t>  à des tiers à des fins publicitaires.</a:t>
-            </a:r>
-            <a:endParaRPr lang="en-US" sz="1650"/>
+              <a:t>  à des tiers à des fins </a:t>
+            </a:r>
+            <a:r>
+              <a:rPr lang="en-US" sz="1650" dirty="0" err="1">
+                <a:solidFill>
+                  <a:srgbClr val="5B6470"/>
+                </a:solidFill>
+                <a:latin typeface="Calibri"/>
+                <a:ea typeface="Calibri"/>
+                <a:cs typeface="Calibri"/>
+              </a:rPr>
+              <a:t>publicitaires</a:t>
+            </a:r>
+            <a:r>
+              <a:rPr lang="en-US" sz="1650" dirty="0">
+                <a:solidFill>
+                  <a:srgbClr val="5B6470"/>
+                </a:solidFill>
+                <a:latin typeface="Calibri"/>
+                <a:ea typeface="Calibri"/>
+                <a:cs typeface="Calibri"/>
+              </a:rPr>
+              <a:t>.</a:t>
+            </a:r>
+            <a:endParaRPr lang="en-US" sz="1650" dirty="0"/>
           </a:p>
         </p:txBody>
       </p:sp>
@@ -4024,6 +4222,13 @@
           </a:solidFill>
           <a:ln/>
         </p:spPr>
+        <p:txBody>
+          <a:bodyPr/>
+          <a:lstStyle/>
+          <a:p>
+            <a:endParaRPr lang="fr-CH"/>
+          </a:p>
+        </p:txBody>
       </p:sp>
       <p:sp>
         <p:nvSpPr>
@@ -4094,7 +4299,7 @@
               <a:defRPr/>
             </a:pPr>
             <a:r>
-              <a:rPr lang="en-US" sz="1650" b="1">
+              <a:rPr lang="en-US" sz="1650" b="1" dirty="0" err="1">
                 <a:solidFill>
                   <a:srgbClr val="1F2328"/>
                 </a:solidFill>
@@ -4102,10 +4307,32 @@
                 <a:ea typeface="Calibri"/>
                 <a:cs typeface="Calibri"/>
               </a:rPr>
-              <a:t>Refus d'un historique</a:t>
-            </a:r>
-            <a:r>
-              <a:rPr lang="en-US" sz="1650">
+              <a:t>Refus</a:t>
+            </a:r>
+            <a:r>
+              <a:rPr lang="en-US" sz="1650" b="1" dirty="0">
+                <a:solidFill>
+                  <a:srgbClr val="1F2328"/>
+                </a:solidFill>
+                <a:latin typeface="Calibri"/>
+                <a:ea typeface="Calibri"/>
+                <a:cs typeface="Calibri"/>
+              </a:rPr>
+              <a:t> d'un </a:t>
+            </a:r>
+            <a:r>
+              <a:rPr lang="en-US" sz="1650" b="1" dirty="0" err="1">
+                <a:solidFill>
+                  <a:srgbClr val="1F2328"/>
+                </a:solidFill>
+                <a:latin typeface="Calibri"/>
+                <a:ea typeface="Calibri"/>
+                <a:cs typeface="Calibri"/>
+              </a:rPr>
+              <a:t>historique</a:t>
+            </a:r>
+            <a:r>
+              <a:rPr lang="en-US" sz="1650" dirty="0">
                 <a:solidFill>
                   <a:srgbClr val="5B6470"/>
                 </a:solidFill>
@@ -4113,9 +4340,53 @@
                 <a:ea typeface="Calibri"/>
                 <a:cs typeface="Calibri"/>
               </a:rPr>
-              <a:t>  exhaustif et permanent des déplacements.</a:t>
-            </a:r>
-            <a:endParaRPr lang="en-US" sz="1650"/>
+              <a:t>  </a:t>
+            </a:r>
+            <a:r>
+              <a:rPr lang="en-US" sz="1650" dirty="0" err="1">
+                <a:solidFill>
+                  <a:srgbClr val="5B6470"/>
+                </a:solidFill>
+                <a:latin typeface="Calibri"/>
+                <a:ea typeface="Calibri"/>
+                <a:cs typeface="Calibri"/>
+              </a:rPr>
+              <a:t>exhaustif</a:t>
+            </a:r>
+            <a:r>
+              <a:rPr lang="en-US" sz="1650" dirty="0">
+                <a:solidFill>
+                  <a:srgbClr val="5B6470"/>
+                </a:solidFill>
+                <a:latin typeface="Calibri"/>
+                <a:ea typeface="Calibri"/>
+                <a:cs typeface="Calibri"/>
+              </a:rPr>
+              <a:t> et permanent des </a:t>
+            </a:r>
+            <a:r>
+              <a:rPr lang="en-US" sz="1650" dirty="0" err="1">
+                <a:solidFill>
+                  <a:srgbClr val="5B6470"/>
+                </a:solidFill>
+                <a:latin typeface="Calibri"/>
+                <a:ea typeface="Calibri"/>
+                <a:cs typeface="Calibri"/>
+              </a:rPr>
+              <a:t>déplacements</a:t>
+            </a:r>
+            <a:r>
+              <a:rPr lang="en-US" sz="1650" dirty="0">
+                <a:solidFill>
+                  <a:srgbClr val="5B6470"/>
+                </a:solidFill>
+                <a:latin typeface="Calibri"/>
+                <a:ea typeface="Calibri"/>
+                <a:cs typeface="Calibri"/>
+              </a:rPr>
+              <a:t>.</a:t>
+            </a:r>
+            <a:endParaRPr lang="en-US" sz="1650" dirty="0"/>
           </a:p>
         </p:txBody>
       </p:sp>
@@ -4138,6 +4409,13 @@
           </a:solidFill>
           <a:ln/>
         </p:spPr>
+        <p:txBody>
+          <a:bodyPr/>
+          <a:lstStyle/>
+          <a:p>
+            <a:endParaRPr lang="fr-CH"/>
+          </a:p>
+        </p:txBody>
       </p:sp>
       <p:sp>
         <p:nvSpPr>
@@ -4208,7 +4486,7 @@
               <a:defRPr/>
             </a:pPr>
             <a:r>
-              <a:rPr lang="en-US" sz="1650" b="1">
+              <a:rPr lang="en-US" sz="1650" b="1" dirty="0">
                 <a:solidFill>
                   <a:srgbClr val="1F2328"/>
                 </a:solidFill>
@@ -4216,10 +4494,54 @@
                 <a:ea typeface="Calibri"/>
                 <a:cs typeface="Calibri"/>
               </a:rPr>
-              <a:t>Pas de biométrie imposée :</a:t>
-            </a:r>
-            <a:r>
-              <a:rPr lang="en-US" sz="1650">
+              <a:t>Pas de </a:t>
+            </a:r>
+            <a:r>
+              <a:rPr lang="en-US" sz="1650" b="1" dirty="0" err="1">
+                <a:solidFill>
+                  <a:srgbClr val="1F2328"/>
+                </a:solidFill>
+                <a:latin typeface="Calibri"/>
+                <a:ea typeface="Calibri"/>
+                <a:cs typeface="Calibri"/>
+              </a:rPr>
+              <a:t>biométrie</a:t>
+            </a:r>
+            <a:r>
+              <a:rPr lang="en-US" sz="1650" b="1" dirty="0">
+                <a:solidFill>
+                  <a:srgbClr val="1F2328"/>
+                </a:solidFill>
+                <a:latin typeface="Calibri"/>
+                <a:ea typeface="Calibri"/>
+                <a:cs typeface="Calibri"/>
+              </a:rPr>
+              <a:t> </a:t>
+            </a:r>
+            <a:r>
+              <a:rPr lang="en-US" sz="1650" b="1" dirty="0" err="1">
+                <a:solidFill>
+                  <a:srgbClr val="1F2328"/>
+                </a:solidFill>
+                <a:latin typeface="Calibri"/>
+                <a:ea typeface="Calibri"/>
+                <a:cs typeface="Calibri"/>
+              </a:rPr>
+              <a:t>imposée</a:t>
+            </a:r>
+            <a:r>
+              <a:rPr lang="en-US" sz="1650" b="1" dirty="0">
+                <a:solidFill>
+                  <a:srgbClr val="1F2328"/>
+                </a:solidFill>
+                <a:latin typeface="Calibri"/>
+                <a:ea typeface="Calibri"/>
+                <a:cs typeface="Calibri"/>
+              </a:rPr>
+              <a:t> :</a:t>
+            </a:r>
+            <a:r>
+              <a:rPr lang="en-US" sz="1650" dirty="0">
                 <a:solidFill>
                   <a:srgbClr val="5B6470"/>
                 </a:solidFill>
@@ -4227,9 +4549,31 @@
                 <a:ea typeface="Calibri"/>
                 <a:cs typeface="Calibri"/>
               </a:rPr>
-              <a:t>  voyager de façon anonyme reste possible.</a:t>
-            </a:r>
-            <a:endParaRPr lang="en-US" sz="1650"/>
+              <a:t>  voyager de façon anonyme </a:t>
+            </a:r>
+            <a:r>
+              <a:rPr lang="en-US" sz="1650" dirty="0" err="1">
+                <a:solidFill>
+                  <a:srgbClr val="5B6470"/>
+                </a:solidFill>
+                <a:latin typeface="Calibri"/>
+                <a:ea typeface="Calibri"/>
+                <a:cs typeface="Calibri"/>
+              </a:rPr>
+              <a:t>reste</a:t>
+            </a:r>
+            <a:r>
+              <a:rPr lang="en-US" sz="1650" dirty="0">
+                <a:solidFill>
+                  <a:srgbClr val="5B6470"/>
+                </a:solidFill>
+                <a:latin typeface="Calibri"/>
+                <a:ea typeface="Calibri"/>
+                <a:cs typeface="Calibri"/>
+              </a:rPr>
+              <a:t> possible.</a:t>
+            </a:r>
+            <a:endParaRPr lang="en-US" sz="1650" dirty="0"/>
           </a:p>
         </p:txBody>
       </p:sp>
@@ -4238,11 +4582,11 @@
   <p:clrMapOvr>
     <a:masterClrMapping/>
   </p:clrMapOvr>
-  <mc:AlternateContent xmlns:mc="http://schemas.openxmlformats.org/markup-compatibility/2006">
-    <mc:Choice xmlns:p159="http://schemas.microsoft.com/office/powerpoint/2015/09/main" xmlns:p14="http://schemas.microsoft.com/office/powerpoint/2010/main" Requires="p159">
-      <p:transition p14:dur="500" advClick="1"/>
+  <mc:AlternateContent xmlns:mc="http://schemas.openxmlformats.org/markup-compatibility/2006" xmlns:p159="http://schemas.microsoft.com/office/powerpoint/2015/09/main">
+    <mc:Choice Requires="p159">
+      <p:transition/>
     </mc:Choice>
-    <mc:Fallback>
+    <mc:Fallback xmlns:w="http://schemas.openxmlformats.org/wordprocessingml/2006/main" xmlns:m="http://schemas.openxmlformats.org/officeDocument/2006/math" xmlns="">
       <p:transition advClick="1"/>
     </mc:Fallback>
   </mc:AlternateContent>
@@ -4250,13 +4594,14 @@
 </file>
 
 <file path=ppt/slides/slide6.xml><?xml version="1.0" encoding="utf-8"?>
-<p:sld xmlns:a="http://schemas.openxmlformats.org/drawingml/2006/main" xmlns:r="http://schemas.openxmlformats.org/officeDocument/2006/relationships" xmlns:p="http://schemas.openxmlformats.org/presentationml/2006/main" xmlns:m="http://schemas.openxmlformats.org/officeDocument/2006/math" xmlns:w="http://schemas.openxmlformats.org/wordprocessingml/2006/main" xmlns:mc="http://schemas.openxmlformats.org/markup-compatibility/2006" showMasterPhAnim="0" showMasterSp="1" show="1">
+<p:sld xmlns:a="http://schemas.openxmlformats.org/drawingml/2006/main" xmlns:r="http://schemas.openxmlformats.org/officeDocument/2006/relationships" xmlns:p="http://schemas.openxmlformats.org/presentationml/2006/main" showMasterPhAnim="0">
   <p:cSld name="Slide 6">
     <p:bg>
-      <p:bgPr shadeToTitle="0">
+      <p:bgPr>
         <a:solidFill>
           <a:srgbClr val="FFFFFF"/>
         </a:solidFill>
+        <a:effectLst/>
       </p:bgPr>
     </p:bg>
     <p:spTree>
@@ -4292,6 +4637,13 @@
           </a:solidFill>
           <a:ln/>
         </p:spPr>
+        <p:txBody>
+          <a:bodyPr/>
+          <a:lstStyle/>
+          <a:p>
+            <a:endParaRPr lang="fr-CH"/>
+          </a:p>
+        </p:txBody>
       </p:sp>
       <p:pic>
         <p:nvPicPr>
@@ -4349,38 +4701,8 @@
                 <a:ea typeface="Calibri"/>
                 <a:cs typeface="Calibri"/>
               </a:rPr>
-              <a:t>Hybridation : </a:t>
-            </a:r>
-            <a:r>
-              <a:rPr lang="en-US" sz="2800" b="1">
-                <a:solidFill>
-                  <a:srgbClr val="1F2328"/>
-                </a:solidFill>
-                <a:latin typeface="Calibri"/>
-                <a:ea typeface="Calibri"/>
-                <a:cs typeface="Calibri"/>
-              </a:rPr>
-              <a:t>la technologie </a:t>
-            </a:r>
-            <a:r>
-              <a:rPr lang="en-US" sz="2800" b="1">
-                <a:solidFill>
-                  <a:srgbClr val="1F2328"/>
-                </a:solidFill>
-                <a:latin typeface="Calibri"/>
-                <a:ea typeface="Calibri"/>
-                <a:cs typeface="Calibri"/>
-              </a:rPr>
-              <a:t>au service </a:t>
-            </a:r>
-            <a:endParaRPr lang="en-US" sz="2800" b="1">
-              <a:solidFill>
-                <a:srgbClr val="1F2328"/>
-              </a:solidFill>
-              <a:latin typeface="Calibri"/>
-              <a:ea typeface="Calibri"/>
-              <a:cs typeface="Calibri"/>
-            </a:endParaRPr>
+              <a:t>Hybridation : la technologie au service </a:t>
+            </a:r>
           </a:p>
           <a:p>
             <a:pPr marL="0" indent="0">
@@ -4398,14 +4720,6 @@
               </a:rPr>
               <a:t>de l'humain</a:t>
             </a:r>
-            <a:endParaRPr lang="en-US" sz="2800" b="1">
-              <a:solidFill>
-                <a:srgbClr val="1F2328"/>
-              </a:solidFill>
-              <a:latin typeface="Calibri"/>
-              <a:ea typeface="Calibri"/>
-              <a:cs typeface="Calibri"/>
-            </a:endParaRPr>
           </a:p>
         </p:txBody>
       </p:sp>
@@ -4430,6 +4744,13 @@
           </a:solidFill>
           <a:ln/>
         </p:spPr>
+        <p:txBody>
+          <a:bodyPr/>
+          <a:lstStyle/>
+          <a:p>
+            <a:endParaRPr lang="fr-CH"/>
+          </a:p>
+        </p:txBody>
       </p:sp>
       <p:sp>
         <p:nvSpPr>
@@ -4490,6 +4811,13 @@
           </a:solidFill>
           <a:ln/>
         </p:spPr>
+        <p:txBody>
+          <a:bodyPr/>
+          <a:lstStyle/>
+          <a:p>
+            <a:endParaRPr lang="fr-CH"/>
+          </a:p>
+        </p:txBody>
       </p:sp>
       <p:sp>
         <p:nvSpPr>
@@ -4604,6 +4932,13 @@
           </a:solidFill>
           <a:ln/>
         </p:spPr>
+        <p:txBody>
+          <a:bodyPr/>
+          <a:lstStyle/>
+          <a:p>
+            <a:endParaRPr lang="fr-CH"/>
+          </a:p>
+        </p:txBody>
       </p:sp>
       <p:sp>
         <p:nvSpPr>
@@ -4718,6 +5053,13 @@
           </a:solidFill>
           <a:ln/>
         </p:spPr>
+        <p:txBody>
+          <a:bodyPr/>
+          <a:lstStyle/>
+          <a:p>
+            <a:endParaRPr lang="fr-CH"/>
+          </a:p>
+        </p:txBody>
       </p:sp>
       <p:sp>
         <p:nvSpPr>
@@ -4818,11 +5160,11 @@
   <p:clrMapOvr>
     <a:masterClrMapping/>
   </p:clrMapOvr>
-  <mc:AlternateContent xmlns:mc="http://schemas.openxmlformats.org/markup-compatibility/2006">
-    <mc:Choice xmlns:p159="http://schemas.microsoft.com/office/powerpoint/2015/09/main" xmlns:p14="http://schemas.microsoft.com/office/powerpoint/2010/main" Requires="p159">
-      <p:transition p14:dur="500" advClick="1"/>
+  <mc:AlternateContent xmlns:mc="http://schemas.openxmlformats.org/markup-compatibility/2006" xmlns:p159="http://schemas.microsoft.com/office/powerpoint/2015/09/main">
+    <mc:Choice Requires="p159">
+      <p:transition/>
     </mc:Choice>
-    <mc:Fallback>
+    <mc:Fallback xmlns:w="http://schemas.openxmlformats.org/wordprocessingml/2006/main" xmlns:m="http://schemas.openxmlformats.org/officeDocument/2006/math" xmlns="">
       <p:transition advClick="1"/>
     </mc:Fallback>
   </mc:AlternateContent>
@@ -4830,13 +5172,14 @@
 </file>
 
 <file path=ppt/slides/slide7.xml><?xml version="1.0" encoding="utf-8"?>
-<p:sld xmlns:a="http://schemas.openxmlformats.org/drawingml/2006/main" xmlns:r="http://schemas.openxmlformats.org/officeDocument/2006/relationships" xmlns:p="http://schemas.openxmlformats.org/presentationml/2006/main" xmlns:m="http://schemas.openxmlformats.org/officeDocument/2006/math" xmlns:w="http://schemas.openxmlformats.org/wordprocessingml/2006/main" xmlns:mc="http://schemas.openxmlformats.org/markup-compatibility/2006" showMasterPhAnim="0" showMasterSp="1" show="1">
+<p:sld xmlns:a="http://schemas.openxmlformats.org/drawingml/2006/main" xmlns:r="http://schemas.openxmlformats.org/officeDocument/2006/relationships" xmlns:p="http://schemas.openxmlformats.org/presentationml/2006/main" showMasterPhAnim="0">
   <p:cSld name="Slide 7">
     <p:bg>
-      <p:bgPr shadeToTitle="0">
+      <p:bgPr>
         <a:solidFill>
           <a:srgbClr val="FFFFFF"/>
         </a:solidFill>
+        <a:effectLst/>
       </p:bgPr>
     </p:bg>
     <p:spTree>
@@ -4872,6 +5215,13 @@
           </a:solidFill>
           <a:ln/>
         </p:spPr>
+        <p:txBody>
+          <a:bodyPr/>
+          <a:lstStyle/>
+          <a:p>
+            <a:endParaRPr lang="fr-CH"/>
+          </a:p>
+        </p:txBody>
       </p:sp>
       <p:pic>
         <p:nvPicPr>
@@ -4931,14 +5281,6 @@
               </a:rPr>
               <a:t>Durabilité : la sobriété, pas seulement </a:t>
             </a:r>
-            <a:endParaRPr lang="en-US" sz="2800" b="1">
-              <a:solidFill>
-                <a:srgbClr val="1F2328"/>
-              </a:solidFill>
-              <a:latin typeface="Calibri"/>
-              <a:ea typeface="Calibri"/>
-              <a:cs typeface="Calibri"/>
-            </a:endParaRPr>
           </a:p>
           <a:p>
             <a:pPr marL="0" indent="0">
@@ -4981,6 +5323,13 @@
           </a:solidFill>
           <a:ln/>
         </p:spPr>
+        <p:txBody>
+          <a:bodyPr/>
+          <a:lstStyle/>
+          <a:p>
+            <a:endParaRPr lang="fr-CH"/>
+          </a:p>
+        </p:txBody>
       </p:sp>
       <p:sp>
         <p:nvSpPr>
@@ -5041,6 +5390,13 @@
           </a:solidFill>
           <a:ln/>
         </p:spPr>
+        <p:txBody>
+          <a:bodyPr/>
+          <a:lstStyle/>
+          <a:p>
+            <a:endParaRPr lang="fr-CH"/>
+          </a:p>
+        </p:txBody>
       </p:sp>
       <p:sp>
         <p:nvSpPr>
@@ -5155,6 +5511,13 @@
           </a:solidFill>
           <a:ln/>
         </p:spPr>
+        <p:txBody>
+          <a:bodyPr/>
+          <a:lstStyle/>
+          <a:p>
+            <a:endParaRPr lang="fr-CH"/>
+          </a:p>
+        </p:txBody>
       </p:sp>
       <p:sp>
         <p:nvSpPr>
@@ -5269,6 +5632,13 @@
           </a:solidFill>
           <a:ln/>
         </p:spPr>
+        <p:txBody>
+          <a:bodyPr/>
+          <a:lstStyle/>
+          <a:p>
+            <a:endParaRPr lang="fr-CH"/>
+          </a:p>
+        </p:txBody>
       </p:sp>
       <p:sp>
         <p:nvSpPr>
@@ -5383,6 +5753,13 @@
           </a:solidFill>
           <a:ln/>
         </p:spPr>
+        <p:txBody>
+          <a:bodyPr/>
+          <a:lstStyle/>
+          <a:p>
+            <a:endParaRPr lang="fr-CH"/>
+          </a:p>
+        </p:txBody>
       </p:sp>
       <p:sp>
         <p:nvSpPr>
@@ -5483,11 +5860,11 @@
   <p:clrMapOvr>
     <a:masterClrMapping/>
   </p:clrMapOvr>
-  <mc:AlternateContent xmlns:mc="http://schemas.openxmlformats.org/markup-compatibility/2006">
-    <mc:Choice xmlns:p159="http://schemas.microsoft.com/office/powerpoint/2015/09/main" xmlns:p14="http://schemas.microsoft.com/office/powerpoint/2010/main" Requires="p159">
-      <p:transition p14:dur="500" advClick="1"/>
+  <mc:AlternateContent xmlns:mc="http://schemas.openxmlformats.org/markup-compatibility/2006" xmlns:p159="http://schemas.microsoft.com/office/powerpoint/2015/09/main">
+    <mc:Choice Requires="p159">
+      <p:transition/>
     </mc:Choice>
-    <mc:Fallback>
+    <mc:Fallback xmlns:w="http://schemas.openxmlformats.org/wordprocessingml/2006/main" xmlns:m="http://schemas.openxmlformats.org/officeDocument/2006/math" xmlns="">
       <p:transition advClick="1"/>
     </mc:Fallback>
   </mc:AlternateContent>
@@ -5495,13 +5872,14 @@
 </file>
 
 <file path=ppt/slides/slide8.xml><?xml version="1.0" encoding="utf-8"?>
-<p:sld xmlns:a="http://schemas.openxmlformats.org/drawingml/2006/main" xmlns:r="http://schemas.openxmlformats.org/officeDocument/2006/relationships" xmlns:p="http://schemas.openxmlformats.org/presentationml/2006/main" xmlns:m="http://schemas.openxmlformats.org/officeDocument/2006/math" xmlns:w="http://schemas.openxmlformats.org/wordprocessingml/2006/main" xmlns:mc="http://schemas.openxmlformats.org/markup-compatibility/2006" showMasterPhAnim="0" showMasterSp="1" show="1">
+<p:sld xmlns:a="http://schemas.openxmlformats.org/drawingml/2006/main" xmlns:r="http://schemas.openxmlformats.org/officeDocument/2006/relationships" xmlns:p="http://schemas.openxmlformats.org/presentationml/2006/main" showMasterPhAnim="0">
   <p:cSld name="Slide 8">
     <p:bg>
-      <p:bgPr shadeToTitle="0">
+      <p:bgPr>
         <a:solidFill>
           <a:srgbClr val="A60510"/>
         </a:solidFill>
+        <a:effectLst/>
       </p:bgPr>
     </p:bg>
     <p:spTree>
@@ -5520,12 +5898,12 @@
       </p:grpSpPr>
       <p:sp>
         <p:nvSpPr>
-          <p:cNvPr id="2045640315" name=""/>
-          <p:cNvSpPr/>
-          <p:nvPr/>
-        </p:nvSpPr>
-        <p:spPr bwMode="auto">
-          <a:xfrm rot="0" flipH="0" flipV="0">
+          <p:cNvPr id="2045640315" name="Rectangle 2045640314"/>
+          <p:cNvSpPr/>
+          <p:nvPr/>
+        </p:nvSpPr>
+        <p:spPr bwMode="auto">
+          <a:xfrm>
             <a:off x="13774" y="-55375"/>
             <a:ext cx="12626161" cy="7066219"/>
           </a:xfrm>
@@ -5562,6 +5940,13 @@
             <a:schemeClr val="lt1"/>
           </a:fontRef>
         </p:style>
+        <p:txBody>
+          <a:bodyPr/>
+          <a:lstStyle/>
+          <a:p>
+            <a:endParaRPr lang="fr-CH"/>
+          </a:p>
+        </p:txBody>
       </p:sp>
       <p:sp>
         <p:nvSpPr>
@@ -5584,6 +5969,13 @@
           </a:solidFill>
           <a:ln/>
         </p:spPr>
+        <p:txBody>
+          <a:bodyPr/>
+          <a:lstStyle/>
+          <a:p>
+            <a:endParaRPr lang="fr-CH"/>
+          </a:p>
+        </p:txBody>
       </p:sp>
       <p:pic>
         <p:nvPicPr>
@@ -5750,11 +6142,11 @@
   <p:clrMapOvr>
     <a:masterClrMapping/>
   </p:clrMapOvr>
-  <mc:AlternateContent xmlns:mc="http://schemas.openxmlformats.org/markup-compatibility/2006">
-    <mc:Choice xmlns:p159="http://schemas.microsoft.com/office/powerpoint/2015/09/main" xmlns:p14="http://schemas.microsoft.com/office/powerpoint/2010/main" Requires="p159">
-      <p:transition p14:dur="500" advClick="1"/>
+  <mc:AlternateContent xmlns:mc="http://schemas.openxmlformats.org/markup-compatibility/2006" xmlns:p159="http://schemas.microsoft.com/office/powerpoint/2015/09/main">
+    <mc:Choice Requires="p159">
+      <p:transition/>
     </mc:Choice>
-    <mc:Fallback>
+    <mc:Fallback xmlns:w="http://schemas.openxmlformats.org/wordprocessingml/2006/main" xmlns:m="http://schemas.openxmlformats.org/officeDocument/2006/math" xmlns="">
       <p:transition advClick="1"/>
     </mc:Fallback>
   </mc:AlternateContent>
@@ -5762,7 +6154,7 @@
 </file>
 
 <file path=ppt/theme/theme1.xml><?xml version="1.0" encoding="utf-8"?>
-<a:theme xmlns:a="http://schemas.openxmlformats.org/drawingml/2006/main" xmlns:r="http://schemas.openxmlformats.org/officeDocument/2006/relationships" xmlns:p="http://schemas.openxmlformats.org/presentationml/2006/main" name="Office Theme">
+<a:theme xmlns:a="http://schemas.openxmlformats.org/drawingml/2006/main" name="Office Theme">
   <a:themeElements>
     <a:clrScheme name="Office">
       <a:dk1>
@@ -5953,5 +6345,321 @@
     </a:fmtScheme>
   </a:themeElements>
   <a:objectDefaults/>
+  <a:extraClrSchemeLst/>
+</a:theme>
+</file>
+
+<file path=ppt/theme/theme2.xml><?xml version="1.0" encoding="utf-8"?>
+<a:theme xmlns:a="http://schemas.openxmlformats.org/drawingml/2006/main" name="Thème Office">
+  <a:themeElements>
+    <a:clrScheme name="Office">
+      <a:dk1>
+        <a:sysClr val="windowText" lastClr="000000"/>
+      </a:dk1>
+      <a:lt1>
+        <a:sysClr val="window" lastClr="FFFFFF"/>
+      </a:lt1>
+      <a:dk2>
+        <a:srgbClr val="0E2841"/>
+      </a:dk2>
+      <a:lt2>
+        <a:srgbClr val="E8E8E8"/>
+      </a:lt2>
+      <a:accent1>
+        <a:srgbClr val="156082"/>
+      </a:accent1>
+      <a:accent2>
+        <a:srgbClr val="E97132"/>
+      </a:accent2>
+      <a:accent3>
+        <a:srgbClr val="196B24"/>
+      </a:accent3>
+      <a:accent4>
+        <a:srgbClr val="0F9ED5"/>
+      </a:accent4>
+      <a:accent5>
+        <a:srgbClr val="A02B93"/>
+      </a:accent5>
+      <a:accent6>
+        <a:srgbClr val="4EA72E"/>
+      </a:accent6>
+      <a:hlink>
+        <a:srgbClr val="467886"/>
+      </a:hlink>
+      <a:folHlink>
+        <a:srgbClr val="96607D"/>
+      </a:folHlink>
+    </a:clrScheme>
+    <a:fontScheme name="Office">
+      <a:majorFont>
+        <a:latin typeface="Aptos Display" panose="02110004020202020204"/>
+        <a:ea typeface=""/>
+        <a:cs typeface=""/>
+        <a:font script="Jpan" typeface="游ゴシック Light"/>
+        <a:font script="Hang" typeface="맑은 고딕"/>
+        <a:font script="Hans" typeface="等线 Light"/>
+        <a:font script="Hant" typeface="新細明體"/>
+        <a:font script="Arab" typeface="Times New Roman"/>
+        <a:font script="Hebr" typeface="Times New Roman"/>
+        <a:font script="Thai" typeface="Angsana New"/>
+        <a:font script="Ethi" typeface="Nyala"/>
+        <a:font script="Beng" typeface="Vrinda"/>
+        <a:font script="Gujr" typeface="Shruti"/>
+        <a:font script="Khmr" typeface="MoolBoran"/>
+        <a:font script="Knda" typeface="Tunga"/>
+        <a:font script="Guru" typeface="Raavi"/>
+        <a:font script="Cans" typeface="Euphemia"/>
+        <a:font script="Cher" typeface="Plantagenet Cherokee"/>
+        <a:font script="Yiii" typeface="Microsoft Yi Baiti"/>
+        <a:font script="Tibt" typeface="Microsoft Himalaya"/>
+        <a:font script="Thaa" typeface="MV Boli"/>
+        <a:font script="Deva" typeface="Mangal"/>
+        <a:font script="Telu" typeface="Gautami"/>
+        <a:font script="Taml" typeface="Latha"/>
+        <a:font script="Syrc" typeface="Estrangelo Edessa"/>
+        <a:font script="Orya" typeface="Kalinga"/>
+        <a:font script="Mlym" typeface="Kartika"/>
+        <a:font script="Laoo" typeface="DokChampa"/>
+        <a:font script="Sinh" typeface="Iskoola Pota"/>
+        <a:font script="Mong" typeface="Mongolian Baiti"/>
+        <a:font script="Viet" typeface="Times New Roman"/>
+        <a:font script="Uigh" typeface="Microsoft Uighur"/>
+        <a:font script="Geor" typeface="Sylfaen"/>
+        <a:font script="Armn" typeface="Arial"/>
+        <a:font script="Bugi" typeface="Leelawadee UI"/>
+        <a:font script="Bopo" typeface="Microsoft JhengHei"/>
+        <a:font script="Java" typeface="Javanese Text"/>
+        <a:font script="Lisu" typeface="Segoe UI"/>
+        <a:font script="Mymr" typeface="Myanmar Text"/>
+        <a:font script="Nkoo" typeface="Ebrima"/>
+        <a:font script="Olck" typeface="Nirmala UI"/>
+        <a:font script="Osma" typeface="Ebrima"/>
+        <a:font script="Phag" typeface="Phagspa"/>
+        <a:font script="Syrn" typeface="Estrangelo Edessa"/>
+        <a:font script="Syrj" typeface="Estrangelo Edessa"/>
+        <a:font script="Syre" typeface="Estrangelo Edessa"/>
+        <a:font script="Sora" typeface="Nirmala UI"/>
+        <a:font script="Tale" typeface="Microsoft Tai Le"/>
+        <a:font script="Talu" typeface="Microsoft New Tai Lue"/>
+        <a:font script="Tfng" typeface="Ebrima"/>
+      </a:majorFont>
+      <a:minorFont>
+        <a:latin typeface="Aptos" panose="02110004020202020204"/>
+        <a:ea typeface=""/>
+        <a:cs typeface=""/>
+        <a:font script="Jpan" typeface="游ゴシック"/>
+        <a:font script="Hang" typeface="맑은 고딕"/>
+        <a:font script="Hans" typeface="等线"/>
+        <a:font script="Hant" typeface="新細明體"/>
+        <a:font script="Arab" typeface="Arial"/>
+        <a:font script="Hebr" typeface="Arial"/>
+        <a:font script="Thai" typeface="Cordia New"/>
+        <a:font script="Ethi" typeface="Nyala"/>
+        <a:font script="Beng" typeface="Vrinda"/>
+        <a:font script="Gujr" typeface="Shruti"/>
+        <a:font script="Khmr" typeface="DaunPenh"/>
+        <a:font script="Knda" typeface="Tunga"/>
+        <a:font script="Guru" typeface="Raavi"/>
+        <a:font script="Cans" typeface="Euphemia"/>
+        <a:font script="Cher" typeface="Plantagenet Cherokee"/>
+        <a:font script="Yiii" typeface="Microsoft Yi Baiti"/>
+        <a:font script="Tibt" typeface="Microsoft Himalaya"/>
+        <a:font script="Thaa" typeface="MV Boli"/>
+        <a:font script="Deva" typeface="Mangal"/>
+        <a:font script="Telu" typeface="Gautami"/>
+        <a:font script="Taml" typeface="Latha"/>
+        <a:font script="Syrc" typeface="Estrangelo Edessa"/>
+        <a:font script="Orya" typeface="Kalinga"/>
+        <a:font script="Mlym" typeface="Kartika"/>
+        <a:font script="Laoo" typeface="DokChampa"/>
+        <a:font script="Sinh" typeface="Iskoola Pota"/>
+        <a:font script="Mong" typeface="Mongolian Baiti"/>
+        <a:font script="Viet" typeface="Arial"/>
+        <a:font script="Uigh" typeface="Microsoft Uighur"/>
+        <a:font script="Geor" typeface="Sylfaen"/>
+        <a:font script="Armn" typeface="Arial"/>
+        <a:font script="Bugi" typeface="Leelawadee UI"/>
+        <a:font script="Bopo" typeface="Microsoft JhengHei"/>
+        <a:font script="Java" typeface="Javanese Text"/>
+        <a:font script="Lisu" typeface="Segoe UI"/>
+        <a:font script="Mymr" typeface="Myanmar Text"/>
+        <a:font script="Nkoo" typeface="Ebrima"/>
+        <a:font script="Olck" typeface="Nirmala UI"/>
+        <a:font script="Osma" typeface="Ebrima"/>
+        <a:font script="Phag" typeface="Phagspa"/>
+        <a:font script="Syrn" typeface="Estrangelo Edessa"/>
+        <a:font script="Syrj" typeface="Estrangelo Edessa"/>
+        <a:font script="Syre" typeface="Estrangelo Edessa"/>
+        <a:font script="Sora" typeface="Nirmala UI"/>
+        <a:font script="Tale" typeface="Microsoft Tai Le"/>
+        <a:font script="Talu" typeface="Microsoft New Tai Lue"/>
+        <a:font script="Tfng" typeface="Ebrima"/>
+      </a:minorFont>
+    </a:fontScheme>
+    <a:fmtScheme name="Office">
+      <a:fillStyleLst>
+        <a:solidFill>
+          <a:schemeClr val="phClr"/>
+        </a:solidFill>
+        <a:gradFill rotWithShape="1">
+          <a:gsLst>
+            <a:gs pos="0">
+              <a:schemeClr val="phClr">
+                <a:lumMod val="110000"/>
+                <a:satMod val="105000"/>
+                <a:tint val="67000"/>
+              </a:schemeClr>
+            </a:gs>
+            <a:gs pos="50000">
+              <a:schemeClr val="phClr">
+                <a:lumMod val="105000"/>
+                <a:satMod val="103000"/>
+                <a:tint val="73000"/>
+              </a:schemeClr>
+            </a:gs>
+            <a:gs pos="100000">
+              <a:schemeClr val="phClr">
+                <a:lumMod val="105000"/>
+                <a:satMod val="109000"/>
+                <a:tint val="81000"/>
+              </a:schemeClr>
+            </a:gs>
+          </a:gsLst>
+          <a:lin ang="5400000" scaled="0"/>
+        </a:gradFill>
+        <a:gradFill rotWithShape="1">
+          <a:gsLst>
+            <a:gs pos="0">
+              <a:schemeClr val="phClr">
+                <a:satMod val="103000"/>
+                <a:lumMod val="102000"/>
+                <a:tint val="94000"/>
+              </a:schemeClr>
+            </a:gs>
+            <a:gs pos="50000">
+              <a:schemeClr val="phClr">
+                <a:satMod val="110000"/>
+                <a:lumMod val="100000"/>
+                <a:shade val="100000"/>
+              </a:schemeClr>
+            </a:gs>
+            <a:gs pos="100000">
+              <a:schemeClr val="phClr">
+                <a:lumMod val="99000"/>
+                <a:satMod val="120000"/>
+                <a:shade val="78000"/>
+              </a:schemeClr>
+            </a:gs>
+          </a:gsLst>
+          <a:lin ang="5400000" scaled="0"/>
+        </a:gradFill>
+      </a:fillStyleLst>
+      <a:lnStyleLst>
+        <a:ln w="12700" cap="flat" cmpd="sng" algn="ctr">
+          <a:solidFill>
+            <a:schemeClr val="phClr"/>
+          </a:solidFill>
+          <a:prstDash val="solid"/>
+          <a:miter lim="800000"/>
+        </a:ln>
+        <a:ln w="19050" cap="flat" cmpd="sng" algn="ctr">
+          <a:solidFill>
+            <a:schemeClr val="phClr"/>
+          </a:solidFill>
+          <a:prstDash val="solid"/>
+          <a:miter lim="800000"/>
+        </a:ln>
+        <a:ln w="25400" cap="flat" cmpd="sng" algn="ctr">
+          <a:solidFill>
+            <a:schemeClr val="phClr"/>
+          </a:solidFill>
+          <a:prstDash val="solid"/>
+          <a:miter lim="800000"/>
+        </a:ln>
+      </a:lnStyleLst>
+      <a:effectStyleLst>
+        <a:effectStyle>
+          <a:effectLst/>
+        </a:effectStyle>
+        <a:effectStyle>
+          <a:effectLst/>
+        </a:effectStyle>
+        <a:effectStyle>
+          <a:effectLst>
+            <a:outerShdw blurRad="57150" dist="19050" dir="5400000" algn="ctr" rotWithShape="0">
+              <a:srgbClr val="000000">
+                <a:alpha val="63000"/>
+              </a:srgbClr>
+            </a:outerShdw>
+          </a:effectLst>
+        </a:effectStyle>
+      </a:effectStyleLst>
+      <a:bgFillStyleLst>
+        <a:solidFill>
+          <a:schemeClr val="phClr"/>
+        </a:solidFill>
+        <a:solidFill>
+          <a:schemeClr val="phClr">
+            <a:tint val="95000"/>
+            <a:satMod val="170000"/>
+          </a:schemeClr>
+        </a:solidFill>
+        <a:gradFill rotWithShape="1">
+          <a:gsLst>
+            <a:gs pos="0">
+              <a:schemeClr val="phClr">
+                <a:tint val="93000"/>
+                <a:satMod val="150000"/>
+                <a:shade val="98000"/>
+                <a:lumMod val="102000"/>
+              </a:schemeClr>
+            </a:gs>
+            <a:gs pos="50000">
+              <a:schemeClr val="phClr">
+                <a:tint val="98000"/>
+                <a:satMod val="130000"/>
+                <a:shade val="90000"/>
+                <a:lumMod val="103000"/>
+              </a:schemeClr>
+            </a:gs>
+            <a:gs pos="100000">
+              <a:schemeClr val="phClr">
+                <a:shade val="63000"/>
+                <a:satMod val="120000"/>
+              </a:schemeClr>
+            </a:gs>
+          </a:gsLst>
+          <a:lin ang="5400000" scaled="0"/>
+        </a:gradFill>
+      </a:bgFillStyleLst>
+    </a:fmtScheme>
+  </a:themeElements>
+  <a:objectDefaults>
+    <a:lnDef>
+      <a:spPr/>
+      <a:bodyPr/>
+      <a:lstStyle/>
+      <a:style>
+        <a:lnRef idx="2">
+          <a:schemeClr val="accent1"/>
+        </a:lnRef>
+        <a:fillRef idx="0">
+          <a:schemeClr val="accent1"/>
+        </a:fillRef>
+        <a:effectRef idx="1">
+          <a:schemeClr val="accent1"/>
+        </a:effectRef>
+        <a:fontRef idx="minor">
+          <a:schemeClr val="tx1"/>
+        </a:fontRef>
+      </a:style>
+    </a:lnDef>
+  </a:objectDefaults>
+  <a:extraClrSchemeLst/>
+  <a:extLst>
+    <a:ext uri="{05A4C25C-085E-4340-85A3-A5531E510DB2}">
+      <thm15:themeFamily xmlns:thm15="http://schemas.microsoft.com/office/thememl/2012/main" name="Office Theme" id="{2E142A2C-CD16-42D6-873A-C26D2A0506FA}" vid="{1BDDFF52-6CD6-40A5-AB3C-68EB2F1E4D0A}"/>
+    </a:ext>
+  </a:extLst>
 </a:theme>
 </file>
--- a/presentation_charte_CFF.pptx
+++ b/presentation_charte_CFF.pptx
@@ -1820,7 +1820,7 @@
     <mc:Choice Requires="p159">
       <p:transition/>
     </mc:Choice>
-    <mc:Fallback xmlns:w="http://schemas.openxmlformats.org/wordprocessingml/2006/main" xmlns:m="http://schemas.openxmlformats.org/officeDocument/2006/math" xmlns="">
+    <mc:Fallback xmlns="" xmlns:m="http://schemas.openxmlformats.org/officeDocument/2006/math" xmlns:w="http://schemas.openxmlformats.org/wordprocessingml/2006/main">
       <p:transition advClick="1"/>
     </mc:Fallback>
   </mc:AlternateContent>
@@ -2493,7 +2493,7 @@
     <mc:Choice Requires="p159">
       <p:transition/>
     </mc:Choice>
-    <mc:Fallback xmlns:w="http://schemas.openxmlformats.org/wordprocessingml/2006/main" xmlns:m="http://schemas.openxmlformats.org/officeDocument/2006/math" xmlns="">
+    <mc:Fallback xmlns="" xmlns:m="http://schemas.openxmlformats.org/officeDocument/2006/math" xmlns:w="http://schemas.openxmlformats.org/wordprocessingml/2006/main">
       <p:transition advClick="1"/>
     </mc:Fallback>
   </mc:AlternateContent>
@@ -3055,7 +3055,7 @@
     <mc:Choice Requires="p159">
       <p:transition/>
     </mc:Choice>
-    <mc:Fallback xmlns:w="http://schemas.openxmlformats.org/wordprocessingml/2006/main" xmlns:m="http://schemas.openxmlformats.org/officeDocument/2006/math" xmlns="">
+    <mc:Fallback xmlns="" xmlns:m="http://schemas.openxmlformats.org/officeDocument/2006/math" xmlns:w="http://schemas.openxmlformats.org/wordprocessingml/2006/main">
       <p:transition advClick="1"/>
     </mc:Fallback>
   </mc:AlternateContent>
@@ -3162,7 +3162,7 @@
               <a:defRPr/>
             </a:pPr>
             <a:r>
-              <a:rPr lang="en-US" sz="2800" b="1">
+              <a:rPr lang="en-US" sz="2800" b="1" dirty="0">
                 <a:solidFill>
                   <a:srgbClr val="1F2328"/>
                 </a:solidFill>
@@ -3170,9 +3170,42 @@
                 <a:ea typeface="Calibri"/>
                 <a:cs typeface="Calibri"/>
               </a:rPr>
-              <a:t>IA : garder l'humain aux commandes</a:t>
-            </a:r>
-            <a:endParaRPr lang="en-US" sz="2800"/>
+              <a:t>Garder </a:t>
+            </a:r>
+            <a:r>
+              <a:rPr lang="en-US" sz="2800" b="1" dirty="0" err="1">
+                <a:solidFill>
+                  <a:srgbClr val="1F2328"/>
+                </a:solidFill>
+                <a:latin typeface="Calibri"/>
+                <a:ea typeface="Calibri"/>
+                <a:cs typeface="Calibri"/>
+              </a:rPr>
+              <a:t>l'humain</a:t>
+            </a:r>
+            <a:r>
+              <a:rPr lang="en-US" sz="2800" b="1" dirty="0">
+                <a:solidFill>
+                  <a:srgbClr val="1F2328"/>
+                </a:solidFill>
+                <a:latin typeface="Calibri"/>
+                <a:ea typeface="Calibri"/>
+                <a:cs typeface="Calibri"/>
+              </a:rPr>
+              <a:t> aux </a:t>
+            </a:r>
+            <a:r>
+              <a:rPr lang="en-US" sz="2800" b="1" dirty="0" err="1">
+                <a:solidFill>
+                  <a:srgbClr val="1F2328"/>
+                </a:solidFill>
+                <a:latin typeface="Calibri"/>
+                <a:ea typeface="Calibri"/>
+                <a:cs typeface="Calibri"/>
+              </a:rPr>
+              <a:t>commandes</a:t>
+            </a:r>
+            <a:endParaRPr lang="en-US" sz="2800" dirty="0"/>
           </a:p>
         </p:txBody>
       </p:sp>
@@ -3738,7 +3771,7 @@
     <mc:Choice Requires="p159">
       <p:transition/>
     </mc:Choice>
-    <mc:Fallback xmlns:w="http://schemas.openxmlformats.org/wordprocessingml/2006/main" xmlns:m="http://schemas.openxmlformats.org/officeDocument/2006/math" xmlns="">
+    <mc:Fallback xmlns="" xmlns:m="http://schemas.openxmlformats.org/officeDocument/2006/math" xmlns:w="http://schemas.openxmlformats.org/wordprocessingml/2006/main">
       <p:transition advClick="1"/>
     </mc:Fallback>
   </mc:AlternateContent>
@@ -4586,7 +4619,7 @@
     <mc:Choice Requires="p159">
       <p:transition/>
     </mc:Choice>
-    <mc:Fallback xmlns:w="http://schemas.openxmlformats.org/wordprocessingml/2006/main" xmlns:m="http://schemas.openxmlformats.org/officeDocument/2006/math" xmlns="">
+    <mc:Fallback xmlns="" xmlns:m="http://schemas.openxmlformats.org/officeDocument/2006/math" xmlns:w="http://schemas.openxmlformats.org/wordprocessingml/2006/main">
       <p:transition advClick="1"/>
     </mc:Fallback>
   </mc:AlternateContent>
@@ -5164,7 +5197,7 @@
     <mc:Choice Requires="p159">
       <p:transition/>
     </mc:Choice>
-    <mc:Fallback xmlns:w="http://schemas.openxmlformats.org/wordprocessingml/2006/main" xmlns:m="http://schemas.openxmlformats.org/officeDocument/2006/math" xmlns="">
+    <mc:Fallback xmlns="" xmlns:m="http://schemas.openxmlformats.org/officeDocument/2006/math" xmlns:w="http://schemas.openxmlformats.org/wordprocessingml/2006/main">
       <p:transition advClick="1"/>
     </mc:Fallback>
   </mc:AlternateContent>
@@ -5864,7 +5897,7 @@
     <mc:Choice Requires="p159">
       <p:transition/>
     </mc:Choice>
-    <mc:Fallback xmlns:w="http://schemas.openxmlformats.org/wordprocessingml/2006/main" xmlns:m="http://schemas.openxmlformats.org/officeDocument/2006/math" xmlns="">
+    <mc:Fallback xmlns="" xmlns:m="http://schemas.openxmlformats.org/officeDocument/2006/math" xmlns:w="http://schemas.openxmlformats.org/wordprocessingml/2006/main">
       <p:transition advClick="1"/>
     </mc:Fallback>
   </mc:AlternateContent>
@@ -6146,7 +6179,7 @@
     <mc:Choice Requires="p159">
       <p:transition/>
     </mc:Choice>
-    <mc:Fallback xmlns:w="http://schemas.openxmlformats.org/wordprocessingml/2006/main" xmlns:m="http://schemas.openxmlformats.org/officeDocument/2006/math" xmlns="">
+    <mc:Fallback xmlns="" xmlns:m="http://schemas.openxmlformats.org/officeDocument/2006/math" xmlns:w="http://schemas.openxmlformats.org/wordprocessingml/2006/main">
       <p:transition advClick="1"/>
     </mc:Fallback>
   </mc:AlternateContent>

--- a/presentation_charte_CFF.pptx
+++ b/presentation_charte_CFF.pptx
@@ -7,6 +7,9 @@
   <p:notesMasterIdLst>
     <p:notesMasterId r:id="rId10"/>
   </p:notesMasterIdLst>
+  <p:handoutMasterIdLst>
+    <p:handoutMasterId r:id="rId11"/>
+  </p:handoutMasterIdLst>
   <p:sldIdLst>
     <p:sldId id="256" r:id="rId2"/>
     <p:sldId id="257" r:id="rId3"/>
@@ -18,7 +21,7 @@
     <p:sldId id="263" r:id="rId9"/>
   </p:sldIdLst>
   <p:sldSz cx="12192000" cy="6858000"/>
-  <p:notesSz cx="6858000" cy="12192000"/>
+  <p:notesSz cx="7104063" cy="10234613"/>
   <p:defaultTextStyle>
     <a:lvl1pPr marL="0" algn="l" defTabSz="914400" rtl="0">
       <a:defRPr sz="1800">
@@ -130,6 +133,199 @@
 </p:presentation>
 </file>
 
+<file path=ppt/handoutMasters/handoutMaster1.xml><?xml version="1.0" encoding="utf-8"?>
+<p:handoutMaster xmlns:a="http://schemas.openxmlformats.org/drawingml/2006/main" xmlns:r="http://schemas.openxmlformats.org/officeDocument/2006/relationships" xmlns:p="http://schemas.openxmlformats.org/presentationml/2006/main">
+  <p:cSld>
+    <p:bg>
+      <p:bgRef idx="1001">
+        <a:schemeClr val="bg1"/>
+      </p:bgRef>
+    </p:bg>
+    <p:spTree>
+      <p:nvGrpSpPr>
+        <p:cNvPr id="1" name=""/>
+        <p:cNvGrpSpPr/>
+        <p:nvPr/>
+      </p:nvGrpSpPr>
+      <p:grpSpPr>
+        <a:xfrm>
+          <a:off x="0" y="0"/>
+          <a:ext cx="0" cy="0"/>
+          <a:chOff x="0" y="0"/>
+          <a:chExt cx="0" cy="0"/>
+        </a:xfrm>
+      </p:grpSpPr>
+      <p:sp>
+        <p:nvSpPr>
+          <p:cNvPr id="2" name="Espace réservé de l'en-tête 1">
+            <a:extLst>
+              <a:ext uri="{FF2B5EF4-FFF2-40B4-BE49-F238E27FC236}">
+                <a16:creationId xmlns:a16="http://schemas.microsoft.com/office/drawing/2014/main" id="{811DD157-2DB1-3883-1274-262ED1BB0770}"/>
+              </a:ext>
+            </a:extLst>
+          </p:cNvPr>
+          <p:cNvSpPr>
+            <a:spLocks noGrp="1"/>
+          </p:cNvSpPr>
+          <p:nvPr>
+            <p:ph type="hdr" sz="quarter"/>
+          </p:nvPr>
+        </p:nvSpPr>
+        <p:spPr>
+          <a:xfrm>
+            <a:off x="0" y="0"/>
+            <a:ext cx="3078427" cy="513064"/>
+          </a:xfrm>
+          <a:prstGeom prst="rect">
+            <a:avLst/>
+          </a:prstGeom>
+        </p:spPr>
+        <p:txBody>
+          <a:bodyPr vert="horz" lIns="91440" tIns="45720" rIns="91440" bIns="45720" rtlCol="0"/>
+          <a:lstStyle>
+            <a:lvl1pPr algn="l">
+              <a:defRPr sz="1200"/>
+            </a:lvl1pPr>
+          </a:lstStyle>
+          <a:p>
+            <a:endParaRPr lang="fr-CH"/>
+          </a:p>
+        </p:txBody>
+      </p:sp>
+      <p:sp>
+        <p:nvSpPr>
+          <p:cNvPr id="3" name="Espace réservé de la date 2">
+            <a:extLst>
+              <a:ext uri="{FF2B5EF4-FFF2-40B4-BE49-F238E27FC236}">
+                <a16:creationId xmlns:a16="http://schemas.microsoft.com/office/drawing/2014/main" id="{F96E6F2A-CF79-8878-24E5-292771B597E1}"/>
+              </a:ext>
+            </a:extLst>
+          </p:cNvPr>
+          <p:cNvSpPr>
+            <a:spLocks noGrp="1"/>
+          </p:cNvSpPr>
+          <p:nvPr>
+            <p:ph type="dt" sz="quarter" idx="1"/>
+          </p:nvPr>
+        </p:nvSpPr>
+        <p:spPr>
+          <a:xfrm>
+            <a:off x="4023992" y="0"/>
+            <a:ext cx="3078427" cy="513064"/>
+          </a:xfrm>
+          <a:prstGeom prst="rect">
+            <a:avLst/>
+          </a:prstGeom>
+        </p:spPr>
+        <p:txBody>
+          <a:bodyPr vert="horz" lIns="91440" tIns="45720" rIns="91440" bIns="45720" rtlCol="0"/>
+          <a:lstStyle>
+            <a:lvl1pPr algn="r">
+              <a:defRPr sz="1200"/>
+            </a:lvl1pPr>
+          </a:lstStyle>
+          <a:p>
+            <a:fld id="{4658A873-F427-4A02-B61E-BE328D354BC7}" type="datetimeFigureOut">
+              <a:rPr lang="fr-CH" smtClean="0"/>
+              <a:t>05.06.2026</a:t>
+            </a:fld>
+            <a:endParaRPr lang="fr-CH"/>
+          </a:p>
+        </p:txBody>
+      </p:sp>
+      <p:sp>
+        <p:nvSpPr>
+          <p:cNvPr id="4" name="Espace réservé du pied de page 3">
+            <a:extLst>
+              <a:ext uri="{FF2B5EF4-FFF2-40B4-BE49-F238E27FC236}">
+                <a16:creationId xmlns:a16="http://schemas.microsoft.com/office/drawing/2014/main" id="{27815657-C857-8E09-5F7A-62E946EA590D}"/>
+              </a:ext>
+            </a:extLst>
+          </p:cNvPr>
+          <p:cNvSpPr>
+            <a:spLocks noGrp="1"/>
+          </p:cNvSpPr>
+          <p:nvPr>
+            <p:ph type="ftr" sz="quarter" idx="2"/>
+          </p:nvPr>
+        </p:nvSpPr>
+        <p:spPr>
+          <a:xfrm>
+            <a:off x="0" y="9721550"/>
+            <a:ext cx="3078427" cy="513063"/>
+          </a:xfrm>
+          <a:prstGeom prst="rect">
+            <a:avLst/>
+          </a:prstGeom>
+        </p:spPr>
+        <p:txBody>
+          <a:bodyPr vert="horz" lIns="91440" tIns="45720" rIns="91440" bIns="45720" rtlCol="0" anchor="b"/>
+          <a:lstStyle>
+            <a:lvl1pPr algn="l">
+              <a:defRPr sz="1200"/>
+            </a:lvl1pPr>
+          </a:lstStyle>
+          <a:p>
+            <a:r>
+              <a:rPr lang="fr-CH"/>
+              <a:t>https://www.rts.ch/info/suisse/2025/article/billets-de-train-trop-chers-l-erreur-qui-penalise-les-abonnes-regionaux-29052779.html</a:t>
+            </a:r>
+          </a:p>
+        </p:txBody>
+      </p:sp>
+      <p:sp>
+        <p:nvSpPr>
+          <p:cNvPr id="5" name="Espace réservé du numéro de diapositive 4">
+            <a:extLst>
+              <a:ext uri="{FF2B5EF4-FFF2-40B4-BE49-F238E27FC236}">
+                <a16:creationId xmlns:a16="http://schemas.microsoft.com/office/drawing/2014/main" id="{15CB52D6-694B-D536-58AA-4C4F9D70CB53}"/>
+              </a:ext>
+            </a:extLst>
+          </p:cNvPr>
+          <p:cNvSpPr>
+            <a:spLocks noGrp="1"/>
+          </p:cNvSpPr>
+          <p:nvPr>
+            <p:ph type="sldNum" sz="quarter" idx="3"/>
+          </p:nvPr>
+        </p:nvSpPr>
+        <p:spPr>
+          <a:xfrm>
+            <a:off x="4023992" y="9721550"/>
+            <a:ext cx="3078427" cy="513063"/>
+          </a:xfrm>
+          <a:prstGeom prst="rect">
+            <a:avLst/>
+          </a:prstGeom>
+        </p:spPr>
+        <p:txBody>
+          <a:bodyPr vert="horz" lIns="91440" tIns="45720" rIns="91440" bIns="45720" rtlCol="0" anchor="b"/>
+          <a:lstStyle>
+            <a:lvl1pPr algn="r">
+              <a:defRPr sz="1200"/>
+            </a:lvl1pPr>
+          </a:lstStyle>
+          <a:p>
+            <a:fld id="{172283BD-0A6C-47D8-9CF1-D58156F552D3}" type="slidenum">
+              <a:rPr lang="fr-CH" smtClean="0"/>
+              <a:t>‹N°›</a:t>
+            </a:fld>
+            <a:endParaRPr lang="fr-CH"/>
+          </a:p>
+        </p:txBody>
+      </p:sp>
+    </p:spTree>
+    <p:extLst>
+      <p:ext uri="{BB962C8B-B14F-4D97-AF65-F5344CB8AC3E}">
+        <p14:creationId xmlns:p14="http://schemas.microsoft.com/office/powerpoint/2010/main" val="4075614187"/>
+      </p:ext>
+    </p:extLst>
+  </p:cSld>
+  <p:clrMap bg1="lt1" tx1="dk1" bg2="lt2" tx2="dk2" accent1="accent1" accent2="accent2" accent3="accent3" accent4="accent4" accent5="accent5" accent6="accent6" hlink="hlink" folHlink="folHlink"/>
+  <p:hf hdr="0" ftr="0" dt="0"/>
+</p:handoutMaster>
+</file>
+
 <file path=ppt/notesMasters/notesMaster1.xml><?xml version="1.0" encoding="utf-8"?>
 <p:notesMaster xmlns:a="http://schemas.openxmlformats.org/drawingml/2006/main" xmlns:r="http://schemas.openxmlformats.org/officeDocument/2006/relationships" xmlns:p="http://schemas.openxmlformats.org/presentationml/2006/main">
   <p:cSld>
@@ -165,7 +361,7 @@
         <p:spPr bwMode="auto">
           <a:xfrm>
             <a:off x="0" y="0"/>
-            <a:ext cx="2971800" cy="458788"/>
+            <a:ext cx="3078427" cy="385131"/>
           </a:xfrm>
           <a:prstGeom prst="rect">
             <a:avLst/>
@@ -198,8 +394,8 @@
         </p:nvSpPr>
         <p:spPr bwMode="auto">
           <a:xfrm>
-            <a:off x="3884613" y="0"/>
-            <a:ext cx="2971800" cy="458788"/>
+            <a:off x="4023992" y="0"/>
+            <a:ext cx="3078427" cy="385131"/>
           </a:xfrm>
           <a:prstGeom prst="rect">
             <a:avLst/>
@@ -236,8 +432,8 @@
         </p:nvSpPr>
         <p:spPr bwMode="auto">
           <a:xfrm>
-            <a:off x="685800" y="1143000"/>
-            <a:ext cx="5486400" cy="3086100"/>
+            <a:off x="1249363" y="958850"/>
+            <a:ext cx="4606925" cy="2590800"/>
           </a:xfrm>
           <a:prstGeom prst="rect">
             <a:avLst/>
@@ -272,8 +468,8 @@
         </p:nvSpPr>
         <p:spPr bwMode="auto">
           <a:xfrm>
-            <a:off x="685800" y="4400550"/>
-            <a:ext cx="5486400" cy="3600450"/>
+            <a:off x="710407" y="3694056"/>
+            <a:ext cx="5683250" cy="3022409"/>
           </a:xfrm>
           <a:prstGeom prst="rect">
             <a:avLst/>
@@ -346,8 +542,8 @@
         </p:nvSpPr>
         <p:spPr bwMode="auto">
           <a:xfrm>
-            <a:off x="0" y="8685213"/>
-            <a:ext cx="2971800" cy="458787"/>
+            <a:off x="0" y="7290830"/>
+            <a:ext cx="3078427" cy="385130"/>
           </a:xfrm>
           <a:prstGeom prst="rect">
             <a:avLst/>
@@ -364,7 +560,10 @@
             <a:pPr>
               <a:defRPr/>
             </a:pPr>
-            <a:endParaRPr lang="en-US"/>
+            <a:r>
+              <a:rPr lang="en-US"/>
+              <a:t>https://www.rts.ch/info/suisse/2025/article/billets-de-train-trop-chers-l-erreur-qui-penalise-les-abonnes-regionaux-29052779.html</a:t>
+            </a:r>
           </a:p>
         </p:txBody>
       </p:sp>
@@ -380,8 +579,8 @@
         </p:nvSpPr>
         <p:spPr bwMode="auto">
           <a:xfrm>
-            <a:off x="3884613" y="8685213"/>
-            <a:ext cx="2971800" cy="458787"/>
+            <a:off x="4023992" y="7290830"/>
+            <a:ext cx="3078427" cy="385130"/>
           </a:xfrm>
           <a:prstGeom prst="rect">
             <a:avLst/>
@@ -409,6 +608,7 @@
     </p:spTree>
   </p:cSld>
   <p:clrMap bg1="lt1" tx1="dk1" bg2="lt2" tx2="dk2" accent1="accent1" accent2="accent2" accent3="accent3" accent4="accent4" accent5="accent5" accent6="accent6" hlink="hlink" folHlink="folHlink"/>
+  <p:hf hdr="0" ftr="0" dt="0"/>
   <p:notesStyle>
     <a:lvl1pPr marL="0" algn="l" defTabSz="914400" rtl="0">
       <a:defRPr sz="1200">
@@ -815,10 +1015,7 @@
             <a:pPr>
               <a:defRPr/>
             </a:pPr>
-            <a:r>
-              <a:rPr lang="en-US"/>
-              <a:t>Arthur : sur l'IA (prix EasyRide, fraude, prévision d'affluence), nous posons quatre garde-fous : transparence, contrôle humain pour toute décision à conséquences, audit des biais, et non-substitution du jugement humain. L'algorithme aide, mais ne tranche jamais seul une amende ou un blocage.</a:t>
-            </a:r>
+            <a:endParaRPr lang="en-US" dirty="0"/>
           </a:p>
         </p:txBody>
       </p:sp>
@@ -903,10 +1100,7 @@
             <a:pPr>
               <a:defRPr/>
             </a:pPr>
-            <a:r>
-              <a:rPr lang="en-US"/>
-              <a:t>Arthur : dans un service public, la confiance est essentielle. Nous minimisons les données, les hébergeons en Suisse, refusons toute revente publicitaire et tout historique permanent des trajets. Et nous refusons la biométrie obligatoire : on doit pouvoir se déplacer sans être identifié ni tracé.</a:t>
-            </a:r>
+            <a:endParaRPr lang="en-US" dirty="0"/>
           </a:p>
         </p:txBody>
       </p:sp>
@@ -1266,7 +1460,7 @@
   <p:sldLayoutIdLst>
     <p:sldLayoutId id="2147483649" r:id="rId1"/>
   </p:sldLayoutIdLst>
-  <p:hf sldNum="0" hdr="0" ftr="0" dt="0"/>
+  <p:hf sldNum="0" hdr="0" dt="0"/>
   <p:txStyles>
     <p:titleStyle>
       <a:lvl1pPr algn="ctr" defTabSz="914400" rtl="0">
@@ -3374,7 +3568,7 @@
               <a:defRPr/>
             </a:pPr>
             <a:r>
-              <a:rPr lang="en-US" sz="1650" b="1">
+              <a:rPr lang="en-US" sz="1650" b="1" dirty="0">
                 <a:solidFill>
                   <a:srgbClr val="1F2328"/>
                 </a:solidFill>
@@ -3385,6 +3579,116 @@
               <a:t>Transparence :</a:t>
             </a:r>
             <a:r>
+              <a:rPr lang="en-US" sz="1650" dirty="0">
+                <a:solidFill>
+                  <a:srgbClr val="5B6470"/>
+                </a:solidFill>
+                <a:latin typeface="Calibri"/>
+                <a:ea typeface="Calibri"/>
+                <a:cs typeface="Calibri"/>
+              </a:rPr>
+              <a:t>  savoir </a:t>
+            </a:r>
+            <a:r>
+              <a:rPr lang="en-US" sz="1650" dirty="0" err="1">
+                <a:solidFill>
+                  <a:srgbClr val="5B6470"/>
+                </a:solidFill>
+                <a:latin typeface="Calibri"/>
+                <a:ea typeface="Calibri"/>
+                <a:cs typeface="Calibri"/>
+              </a:rPr>
+              <a:t>quand</a:t>
+            </a:r>
+            <a:r>
+              <a:rPr lang="en-US" sz="1650" dirty="0">
+                <a:solidFill>
+                  <a:srgbClr val="5B6470"/>
+                </a:solidFill>
+                <a:latin typeface="Calibri"/>
+                <a:ea typeface="Calibri"/>
+                <a:cs typeface="Calibri"/>
+              </a:rPr>
+              <a:t> </a:t>
+            </a:r>
+            <a:r>
+              <a:rPr lang="en-US" sz="1650" dirty="0" err="1">
+                <a:solidFill>
+                  <a:srgbClr val="5B6470"/>
+                </a:solidFill>
+                <a:latin typeface="Calibri"/>
+                <a:ea typeface="Calibri"/>
+                <a:cs typeface="Calibri"/>
+              </a:rPr>
+              <a:t>une</a:t>
+            </a:r>
+            <a:r>
+              <a:rPr lang="en-US" sz="1650" dirty="0">
+                <a:solidFill>
+                  <a:srgbClr val="5B6470"/>
+                </a:solidFill>
+                <a:latin typeface="Calibri"/>
+                <a:ea typeface="Calibri"/>
+                <a:cs typeface="Calibri"/>
+              </a:rPr>
+              <a:t> </a:t>
+            </a:r>
+            <a:r>
+              <a:rPr lang="en-US" sz="1650" dirty="0" err="1">
+                <a:solidFill>
+                  <a:srgbClr val="5B6470"/>
+                </a:solidFill>
+                <a:latin typeface="Calibri"/>
+                <a:ea typeface="Calibri"/>
+                <a:cs typeface="Calibri"/>
+              </a:rPr>
+              <a:t>décision</a:t>
+            </a:r>
+            <a:r>
+              <a:rPr lang="en-US" sz="1650" dirty="0">
+                <a:solidFill>
+                  <a:srgbClr val="5B6470"/>
+                </a:solidFill>
+                <a:latin typeface="Calibri"/>
+                <a:ea typeface="Calibri"/>
+                <a:cs typeface="Calibri"/>
+              </a:rPr>
+              <a:t> est </a:t>
+            </a:r>
+            <a:r>
+              <a:rPr lang="en-US" sz="1650" dirty="0" err="1">
+                <a:solidFill>
+                  <a:srgbClr val="5B6470"/>
+                </a:solidFill>
+                <a:latin typeface="Calibri"/>
+                <a:ea typeface="Calibri"/>
+                <a:cs typeface="Calibri"/>
+              </a:rPr>
+              <a:t>automatisée</a:t>
+            </a:r>
+            <a:r>
+              <a:rPr lang="en-US" sz="1650" dirty="0">
+                <a:solidFill>
+                  <a:srgbClr val="5B6470"/>
+                </a:solidFill>
+                <a:latin typeface="Calibri"/>
+                <a:ea typeface="Calibri"/>
+                <a:cs typeface="Calibri"/>
+              </a:rPr>
+              <a:t> et comment un prix est </a:t>
+            </a:r>
+            <a:r>
+              <a:rPr lang="en-US" sz="1650" dirty="0" err="1">
+                <a:solidFill>
+                  <a:srgbClr val="5B6470"/>
+                </a:solidFill>
+                <a:latin typeface="Calibri"/>
+                <a:ea typeface="Calibri"/>
+                <a:cs typeface="Calibri"/>
+              </a:rPr>
+              <a:t>calculé</a:t>
+            </a:r>
+            <a:r>
               <a:rPr lang="en-US" sz="1650">
                 <a:solidFill>
                   <a:srgbClr val="5B6470"/>
@@ -3393,9 +3697,16 @@
                 <a:ea typeface="Calibri"/>
                 <a:cs typeface="Calibri"/>
               </a:rPr>
-              <a:t>  savoir quand une décision est automatisée et comment un prix est calculé.</a:t>
-            </a:r>
-            <a:endParaRPr lang="en-US" sz="1650"/>
+              <a:t>.</a:t>
+            </a:r>
+            <a:endParaRPr lang="en-US" sz="1650" baseline="30000" dirty="0">
+              <a:solidFill>
+                <a:srgbClr val="5B6470"/>
+              </a:solidFill>
+              <a:latin typeface="Calibri"/>
+              <a:ea typeface="Calibri"/>
+              <a:cs typeface="Calibri"/>
+            </a:endParaRPr>
           </a:p>
         </p:txBody>
       </p:sp>
@@ -3495,7 +3806,7 @@
               <a:defRPr/>
             </a:pPr>
             <a:r>
-              <a:rPr lang="en-US" sz="1650" b="1">
+              <a:rPr lang="en-US" sz="1650" b="1" dirty="0">
                 <a:solidFill>
                   <a:srgbClr val="1F2328"/>
                 </a:solidFill>
@@ -3506,7 +3817,7 @@
               <a:t>« Human in the loop » :</a:t>
             </a:r>
             <a:r>
-              <a:rPr lang="en-US" sz="1650">
+              <a:rPr lang="en-US" sz="1650" dirty="0">
                 <a:solidFill>
                   <a:srgbClr val="5B6470"/>
                 </a:solidFill>
@@ -3514,9 +3825,163 @@
                 <a:ea typeface="Calibri"/>
                 <a:cs typeface="Calibri"/>
               </a:rPr>
-              <a:t>  aucune décision lourde (amende, blocage) prise par l'algorithme seul.</a:t>
-            </a:r>
-            <a:endParaRPr lang="en-US" sz="1650"/>
+              <a:t>  </a:t>
+            </a:r>
+            <a:r>
+              <a:rPr lang="en-US" sz="1650" dirty="0" err="1">
+                <a:solidFill>
+                  <a:srgbClr val="5B6470"/>
+                </a:solidFill>
+                <a:latin typeface="Calibri"/>
+                <a:ea typeface="Calibri"/>
+                <a:cs typeface="Calibri"/>
+              </a:rPr>
+              <a:t>aucune</a:t>
+            </a:r>
+            <a:r>
+              <a:rPr lang="en-US" sz="1650" dirty="0">
+                <a:solidFill>
+                  <a:srgbClr val="5B6470"/>
+                </a:solidFill>
+                <a:latin typeface="Calibri"/>
+                <a:ea typeface="Calibri"/>
+                <a:cs typeface="Calibri"/>
+              </a:rPr>
+              <a:t> </a:t>
+            </a:r>
+            <a:r>
+              <a:rPr lang="en-US" sz="1650" dirty="0" err="1">
+                <a:solidFill>
+                  <a:srgbClr val="5B6470"/>
+                </a:solidFill>
+                <a:latin typeface="Calibri"/>
+                <a:ea typeface="Calibri"/>
+                <a:cs typeface="Calibri"/>
+              </a:rPr>
+              <a:t>décision</a:t>
+            </a:r>
+            <a:r>
+              <a:rPr lang="en-US" sz="1650" dirty="0">
+                <a:solidFill>
+                  <a:srgbClr val="5B6470"/>
+                </a:solidFill>
+                <a:latin typeface="Calibri"/>
+                <a:ea typeface="Calibri"/>
+                <a:cs typeface="Calibri"/>
+              </a:rPr>
+              <a:t> </a:t>
+            </a:r>
+            <a:r>
+              <a:rPr lang="en-US" sz="1650" dirty="0" err="1">
+                <a:solidFill>
+                  <a:srgbClr val="5B6470"/>
+                </a:solidFill>
+                <a:latin typeface="Calibri"/>
+                <a:ea typeface="Calibri"/>
+                <a:cs typeface="Calibri"/>
+              </a:rPr>
+              <a:t>lourde</a:t>
+            </a:r>
+            <a:r>
+              <a:rPr lang="en-US" sz="1650" dirty="0">
+                <a:solidFill>
+                  <a:srgbClr val="5B6470"/>
+                </a:solidFill>
+                <a:latin typeface="Calibri"/>
+                <a:ea typeface="Calibri"/>
+                <a:cs typeface="Calibri"/>
+              </a:rPr>
+              <a:t> (</a:t>
+            </a:r>
+            <a:r>
+              <a:rPr lang="en-US" sz="1650" dirty="0" err="1">
+                <a:solidFill>
+                  <a:srgbClr val="5B6470"/>
+                </a:solidFill>
+                <a:latin typeface="Calibri"/>
+                <a:ea typeface="Calibri"/>
+                <a:cs typeface="Calibri"/>
+              </a:rPr>
+              <a:t>amende</a:t>
+            </a:r>
+            <a:r>
+              <a:rPr lang="en-US" sz="1650" dirty="0">
+                <a:solidFill>
+                  <a:srgbClr val="5B6470"/>
+                </a:solidFill>
+                <a:latin typeface="Calibri"/>
+                <a:ea typeface="Calibri"/>
+                <a:cs typeface="Calibri"/>
+              </a:rPr>
+              <a:t>, </a:t>
+            </a:r>
+            <a:r>
+              <a:rPr lang="en-US" sz="1650" dirty="0" err="1">
+                <a:solidFill>
+                  <a:srgbClr val="5B6470"/>
+                </a:solidFill>
+                <a:latin typeface="Calibri"/>
+                <a:ea typeface="Calibri"/>
+                <a:cs typeface="Calibri"/>
+              </a:rPr>
+              <a:t>blocage</a:t>
+            </a:r>
+            <a:r>
+              <a:rPr lang="en-US" sz="1650" dirty="0">
+                <a:solidFill>
+                  <a:srgbClr val="5B6470"/>
+                </a:solidFill>
+                <a:latin typeface="Calibri"/>
+                <a:ea typeface="Calibri"/>
+                <a:cs typeface="Calibri"/>
+              </a:rPr>
+              <a:t>) </a:t>
+            </a:r>
+            <a:r>
+              <a:rPr lang="en-US" sz="1650" dirty="0" err="1">
+                <a:solidFill>
+                  <a:srgbClr val="5B6470"/>
+                </a:solidFill>
+                <a:latin typeface="Calibri"/>
+                <a:ea typeface="Calibri"/>
+                <a:cs typeface="Calibri"/>
+              </a:rPr>
+              <a:t>prise</a:t>
+            </a:r>
+            <a:r>
+              <a:rPr lang="en-US" sz="1650" dirty="0">
+                <a:solidFill>
+                  <a:srgbClr val="5B6470"/>
+                </a:solidFill>
+                <a:latin typeface="Calibri"/>
+                <a:ea typeface="Calibri"/>
+                <a:cs typeface="Calibri"/>
+              </a:rPr>
+              <a:t> par </a:t>
+            </a:r>
+            <a:r>
+              <a:rPr lang="en-US" sz="1650" dirty="0" err="1">
+                <a:solidFill>
+                  <a:srgbClr val="5B6470"/>
+                </a:solidFill>
+                <a:latin typeface="Calibri"/>
+                <a:ea typeface="Calibri"/>
+                <a:cs typeface="Calibri"/>
+              </a:rPr>
+              <a:t>l'algorithme</a:t>
+            </a:r>
+            <a:r>
+              <a:rPr lang="en-US" sz="1650" dirty="0">
+                <a:solidFill>
+                  <a:srgbClr val="5B6470"/>
+                </a:solidFill>
+                <a:latin typeface="Calibri"/>
+                <a:ea typeface="Calibri"/>
+                <a:cs typeface="Calibri"/>
+              </a:rPr>
+              <a:t> seul.</a:t>
+            </a:r>
+            <a:endParaRPr lang="en-US" sz="1650" dirty="0"/>
           </a:p>
         </p:txBody>
       </p:sp>
@@ -3595,7 +4060,7 @@
         </p:nvSpPr>
         <p:spPr bwMode="auto">
           <a:xfrm>
-            <a:off x="1417320" y="4210812"/>
+            <a:off x="1356360" y="5262371"/>
             <a:ext cx="10058400" cy="768096"/>
           </a:xfrm>
           <a:prstGeom prst="rect">
@@ -3616,7 +4081,7 @@
               <a:defRPr/>
             </a:pPr>
             <a:r>
-              <a:rPr lang="en-US" sz="1650" b="1">
+              <a:rPr lang="en-US" sz="1650" b="1" dirty="0">
                 <a:solidFill>
                   <a:srgbClr val="1F2328"/>
                 </a:solidFill>
@@ -3624,10 +4089,54 @@
                 <a:ea typeface="Calibri"/>
                 <a:cs typeface="Calibri"/>
               </a:rPr>
-              <a:t>Lutte contre les biais :</a:t>
-            </a:r>
-            <a:r>
-              <a:rPr lang="en-US" sz="1650">
+              <a:t>Lutte </a:t>
+            </a:r>
+            <a:r>
+              <a:rPr lang="en-US" sz="1650" b="1" dirty="0" err="1">
+                <a:solidFill>
+                  <a:srgbClr val="1F2328"/>
+                </a:solidFill>
+                <a:latin typeface="Calibri"/>
+                <a:ea typeface="Calibri"/>
+                <a:cs typeface="Calibri"/>
+              </a:rPr>
+              <a:t>contre</a:t>
+            </a:r>
+            <a:r>
+              <a:rPr lang="en-US" sz="1650" b="1" dirty="0">
+                <a:solidFill>
+                  <a:srgbClr val="1F2328"/>
+                </a:solidFill>
+                <a:latin typeface="Calibri"/>
+                <a:ea typeface="Calibri"/>
+                <a:cs typeface="Calibri"/>
+              </a:rPr>
+              <a:t> les </a:t>
+            </a:r>
+            <a:r>
+              <a:rPr lang="en-US" sz="1650" b="1" dirty="0" err="1">
+                <a:solidFill>
+                  <a:srgbClr val="1F2328"/>
+                </a:solidFill>
+                <a:latin typeface="Calibri"/>
+                <a:ea typeface="Calibri"/>
+                <a:cs typeface="Calibri"/>
+              </a:rPr>
+              <a:t>biais</a:t>
+            </a:r>
+            <a:r>
+              <a:rPr lang="en-US" sz="1650" b="1" dirty="0">
+                <a:solidFill>
+                  <a:srgbClr val="1F2328"/>
+                </a:solidFill>
+                <a:latin typeface="Calibri"/>
+                <a:ea typeface="Calibri"/>
+                <a:cs typeface="Calibri"/>
+              </a:rPr>
+              <a:t> :</a:t>
+            </a:r>
+            <a:r>
+              <a:rPr lang="en-US" sz="1650" dirty="0">
                 <a:solidFill>
                   <a:srgbClr val="5B6470"/>
                 </a:solidFill>
@@ -3635,9 +4144,97 @@
                 <a:ea typeface="Calibri"/>
                 <a:cs typeface="Calibri"/>
               </a:rPr>
-              <a:t>  audits pour ne pas désavantager selon le revenu, l'âge, le quartier, le handicap.</a:t>
-            </a:r>
-            <a:endParaRPr lang="en-US" sz="1650"/>
+              <a:t>  audits pour ne pas </a:t>
+            </a:r>
+            <a:r>
+              <a:rPr lang="en-US" sz="1650" dirty="0" err="1">
+                <a:solidFill>
+                  <a:srgbClr val="5B6470"/>
+                </a:solidFill>
+                <a:latin typeface="Calibri"/>
+                <a:ea typeface="Calibri"/>
+                <a:cs typeface="Calibri"/>
+              </a:rPr>
+              <a:t>désavantager</a:t>
+            </a:r>
+            <a:r>
+              <a:rPr lang="en-US" sz="1650" dirty="0">
+                <a:solidFill>
+                  <a:srgbClr val="5B6470"/>
+                </a:solidFill>
+                <a:latin typeface="Calibri"/>
+                <a:ea typeface="Calibri"/>
+                <a:cs typeface="Calibri"/>
+              </a:rPr>
+              <a:t> </a:t>
+            </a:r>
+            <a:r>
+              <a:rPr lang="en-US" sz="1650" dirty="0" err="1">
+                <a:solidFill>
+                  <a:srgbClr val="5B6470"/>
+                </a:solidFill>
+                <a:latin typeface="Calibri"/>
+                <a:ea typeface="Calibri"/>
+                <a:cs typeface="Calibri"/>
+              </a:rPr>
+              <a:t>selon</a:t>
+            </a:r>
+            <a:r>
+              <a:rPr lang="en-US" sz="1650" dirty="0">
+                <a:solidFill>
+                  <a:srgbClr val="5B6470"/>
+                </a:solidFill>
+                <a:latin typeface="Calibri"/>
+                <a:ea typeface="Calibri"/>
+                <a:cs typeface="Calibri"/>
+              </a:rPr>
+              <a:t> le </a:t>
+            </a:r>
+            <a:r>
+              <a:rPr lang="en-US" sz="1650" dirty="0" err="1">
+                <a:solidFill>
+                  <a:srgbClr val="5B6470"/>
+                </a:solidFill>
+                <a:latin typeface="Calibri"/>
+                <a:ea typeface="Calibri"/>
+                <a:cs typeface="Calibri"/>
+              </a:rPr>
+              <a:t>revenu</a:t>
+            </a:r>
+            <a:r>
+              <a:rPr lang="en-US" sz="1650" dirty="0">
+                <a:solidFill>
+                  <a:srgbClr val="5B6470"/>
+                </a:solidFill>
+                <a:latin typeface="Calibri"/>
+                <a:ea typeface="Calibri"/>
+                <a:cs typeface="Calibri"/>
+              </a:rPr>
+              <a:t>, </a:t>
+            </a:r>
+            <a:r>
+              <a:rPr lang="en-US" sz="1650" dirty="0" err="1">
+                <a:solidFill>
+                  <a:srgbClr val="5B6470"/>
+                </a:solidFill>
+                <a:latin typeface="Calibri"/>
+                <a:ea typeface="Calibri"/>
+                <a:cs typeface="Calibri"/>
+              </a:rPr>
+              <a:t>l'âge</a:t>
+            </a:r>
+            <a:r>
+              <a:rPr lang="en-US" sz="1650" dirty="0">
+                <a:solidFill>
+                  <a:srgbClr val="5B6470"/>
+                </a:solidFill>
+                <a:latin typeface="Calibri"/>
+                <a:ea typeface="Calibri"/>
+                <a:cs typeface="Calibri"/>
+              </a:rPr>
+              <a:t>, le quartier, le handicap.</a:t>
+            </a:r>
+            <a:endParaRPr lang="en-US" sz="1650" dirty="0"/>
           </a:p>
         </p:txBody>
       </p:sp>
@@ -3716,7 +4313,7 @@
         </p:nvSpPr>
         <p:spPr bwMode="auto">
           <a:xfrm>
-            <a:off x="1417320" y="5262372"/>
+            <a:off x="1389888" y="4208493"/>
             <a:ext cx="10058400" cy="768096"/>
           </a:xfrm>
           <a:prstGeom prst="rect">
@@ -3737,7 +4334,7 @@
               <a:defRPr/>
             </a:pPr>
             <a:r>
-              <a:rPr lang="en-US" sz="1650" b="1">
+              <a:rPr lang="en-US" sz="1650" b="1" dirty="0">
                 <a:solidFill>
                   <a:srgbClr val="1F2328"/>
                 </a:solidFill>
@@ -3745,10 +4342,32 @@
                 <a:ea typeface="Calibri"/>
                 <a:cs typeface="Calibri"/>
               </a:rPr>
-              <a:t>L'IA assiste,</a:t>
-            </a:r>
-            <a:r>
-              <a:rPr lang="en-US" sz="1650">
+              <a:t>L'IA </a:t>
+            </a:r>
+            <a:r>
+              <a:rPr lang="en-US" sz="1650" b="1" dirty="0" err="1">
+                <a:solidFill>
+                  <a:srgbClr val="1F2328"/>
+                </a:solidFill>
+                <a:latin typeface="Calibri"/>
+                <a:ea typeface="Calibri"/>
+                <a:cs typeface="Calibri"/>
+              </a:rPr>
+              <a:t>assiste</a:t>
+            </a:r>
+            <a:r>
+              <a:rPr lang="en-US" sz="1650" b="1" dirty="0">
+                <a:solidFill>
+                  <a:srgbClr val="1F2328"/>
+                </a:solidFill>
+                <a:latin typeface="Calibri"/>
+                <a:ea typeface="Calibri"/>
+                <a:cs typeface="Calibri"/>
+              </a:rPr>
+              <a:t>,</a:t>
+            </a:r>
+            <a:r>
+              <a:rPr lang="en-US" sz="1650" dirty="0">
                 <a:solidFill>
                   <a:srgbClr val="5B6470"/>
                 </a:solidFill>
@@ -3756,9 +4375,158 @@
                 <a:ea typeface="Calibri"/>
                 <a:cs typeface="Calibri"/>
               </a:rPr>
-              <a:t>  elle ne remplace pas le jugement humain.</a:t>
-            </a:r>
-            <a:endParaRPr lang="en-US" sz="1650"/>
+              <a:t>  </a:t>
+            </a:r>
+            <a:r>
+              <a:rPr lang="en-US" sz="1650" dirty="0" err="1">
+                <a:solidFill>
+                  <a:srgbClr val="5B6470"/>
+                </a:solidFill>
+                <a:latin typeface="Calibri"/>
+                <a:ea typeface="Calibri"/>
+                <a:cs typeface="Calibri"/>
+              </a:rPr>
+              <a:t>elle</a:t>
+            </a:r>
+            <a:r>
+              <a:rPr lang="en-US" sz="1650" dirty="0">
+                <a:solidFill>
+                  <a:srgbClr val="5B6470"/>
+                </a:solidFill>
+                <a:latin typeface="Calibri"/>
+                <a:ea typeface="Calibri"/>
+                <a:cs typeface="Calibri"/>
+              </a:rPr>
+              <a:t> ne </a:t>
+            </a:r>
+            <a:r>
+              <a:rPr lang="en-US" sz="1650" dirty="0" err="1">
+                <a:solidFill>
+                  <a:srgbClr val="5B6470"/>
+                </a:solidFill>
+                <a:latin typeface="Calibri"/>
+                <a:ea typeface="Calibri"/>
+                <a:cs typeface="Calibri"/>
+              </a:rPr>
+              <a:t>remplace</a:t>
+            </a:r>
+            <a:r>
+              <a:rPr lang="en-US" sz="1650" dirty="0">
+                <a:solidFill>
+                  <a:srgbClr val="5B6470"/>
+                </a:solidFill>
+                <a:latin typeface="Calibri"/>
+                <a:ea typeface="Calibri"/>
+                <a:cs typeface="Calibri"/>
+              </a:rPr>
+              <a:t> pas le </a:t>
+            </a:r>
+            <a:r>
+              <a:rPr lang="en-US" sz="1650" dirty="0" err="1">
+                <a:solidFill>
+                  <a:srgbClr val="5B6470"/>
+                </a:solidFill>
+                <a:latin typeface="Calibri"/>
+                <a:ea typeface="Calibri"/>
+                <a:cs typeface="Calibri"/>
+              </a:rPr>
+              <a:t>jugement</a:t>
+            </a:r>
+            <a:r>
+              <a:rPr lang="en-US" sz="1650" dirty="0">
+                <a:solidFill>
+                  <a:srgbClr val="5B6470"/>
+                </a:solidFill>
+                <a:latin typeface="Calibri"/>
+                <a:ea typeface="Calibri"/>
+                <a:cs typeface="Calibri"/>
+              </a:rPr>
+              <a:t> </a:t>
+            </a:r>
+            <a:r>
+              <a:rPr lang="en-US" sz="1650" dirty="0" err="1">
+                <a:solidFill>
+                  <a:srgbClr val="5B6470"/>
+                </a:solidFill>
+                <a:latin typeface="Calibri"/>
+                <a:ea typeface="Calibri"/>
+                <a:cs typeface="Calibri"/>
+              </a:rPr>
+              <a:t>humain</a:t>
+            </a:r>
+            <a:r>
+              <a:rPr lang="en-US" sz="1650" dirty="0">
+                <a:solidFill>
+                  <a:srgbClr val="5B6470"/>
+                </a:solidFill>
+                <a:latin typeface="Calibri"/>
+                <a:ea typeface="Calibri"/>
+                <a:cs typeface="Calibri"/>
+              </a:rPr>
+              <a:t>.</a:t>
+            </a:r>
+            <a:endParaRPr lang="en-US" sz="1650" baseline="30000" dirty="0"/>
+          </a:p>
+        </p:txBody>
+      </p:sp>
+      <p:sp>
+        <p:nvSpPr>
+          <p:cNvPr id="2" name="ZoneTexte 1">
+            <a:extLst>
+              <a:ext uri="{FF2B5EF4-FFF2-40B4-BE49-F238E27FC236}">
+                <a16:creationId xmlns:a16="http://schemas.microsoft.com/office/drawing/2014/main" id="{7341BCD7-27BE-4AE9-510D-1A98B8E84F6E}"/>
+              </a:ext>
+            </a:extLst>
+          </p:cNvPr>
+          <p:cNvSpPr txBox="1"/>
+          <p:nvPr/>
+        </p:nvSpPr>
+        <p:spPr>
+          <a:xfrm>
+            <a:off x="171692" y="6428296"/>
+            <a:ext cx="5670509" cy="415498"/>
+          </a:xfrm>
+          <a:prstGeom prst="rect">
+            <a:avLst/>
+          </a:prstGeom>
+          <a:noFill/>
+        </p:spPr>
+        <p:txBody>
+          <a:bodyPr wrap="square" rtlCol="0">
+            <a:spAutoFit/>
+          </a:bodyPr>
+          <a:lstStyle/>
+          <a:p>
+            <a:r>
+              <a:rPr lang="fr-CH" sz="700" dirty="0"/>
+              <a:t>[1] </a:t>
+            </a:r>
+            <a:r>
+              <a:rPr lang="fr-CH" sz="700" dirty="0">
+                <a:hlinkClick r:id="rId4"/>
+              </a:rPr>
+              <a:t>https://www.rts.ch/info/suisse/2025/article/billets-de-train-trop-chers-l-erreur-qui-penalise-les-abonnes-regionaux-29052779.html</a:t>
+            </a:r>
+            <a:endParaRPr lang="fr-CH" sz="700" dirty="0"/>
+          </a:p>
+          <a:p>
+            <a:r>
+              <a:rPr lang="fr-CH" sz="700" dirty="0"/>
+              <a:t>[2] </a:t>
+            </a:r>
+            <a:r>
+              <a:rPr lang="fr-CH" sz="700" dirty="0">
+                <a:hlinkClick r:id="rId5"/>
+              </a:rPr>
+              <a:t>https://www.sbb.ch/fr/aide-et-contact/chatbot.html</a:t>
+            </a:r>
+            <a:endParaRPr lang="fr-CH" sz="700" dirty="0"/>
+          </a:p>
+          <a:p>
+            <a:r>
+              <a:rPr lang="fr-CH" sz="700" dirty="0"/>
+              <a:t> </a:t>
+            </a:r>
           </a:p>
         </p:txBody>
       </p:sp>
@@ -4057,7 +4825,7 @@
               <a:defRPr/>
             </a:pPr>
             <a:r>
-              <a:rPr lang="en-US" sz="1650" b="1">
+              <a:rPr lang="en-US" sz="1650" b="1" dirty="0" err="1">
                 <a:solidFill>
                   <a:srgbClr val="1F2328"/>
                 </a:solidFill>
@@ -4065,10 +4833,43 @@
                 <a:ea typeface="Calibri"/>
                 <a:cs typeface="Calibri"/>
               </a:rPr>
-              <a:t>Collecte minimale,</a:t>
-            </a:r>
-            <a:r>
-              <a:rPr lang="en-US" sz="1650">
+              <a:t>Collecte</a:t>
+            </a:r>
+            <a:r>
+              <a:rPr lang="en-US" sz="1650" b="1" dirty="0">
+                <a:solidFill>
+                  <a:srgbClr val="1F2328"/>
+                </a:solidFill>
+                <a:latin typeface="Calibri"/>
+                <a:ea typeface="Calibri"/>
+                <a:cs typeface="Calibri"/>
+              </a:rPr>
+              <a:t> </a:t>
+            </a:r>
+            <a:r>
+              <a:rPr lang="en-US" sz="1650" b="1" dirty="0" err="1">
+                <a:solidFill>
+                  <a:srgbClr val="1F2328"/>
+                </a:solidFill>
+                <a:latin typeface="Calibri"/>
+                <a:ea typeface="Calibri"/>
+                <a:cs typeface="Calibri"/>
+              </a:rPr>
+              <a:t>minimale</a:t>
+            </a:r>
+            <a:r>
+              <a:rPr lang="en-US" sz="1650" b="1" dirty="0">
+                <a:solidFill>
+                  <a:srgbClr val="1F2328"/>
+                </a:solidFill>
+                <a:latin typeface="Calibri"/>
+                <a:ea typeface="Calibri"/>
+                <a:cs typeface="Calibri"/>
+              </a:rPr>
+              <a:t>,</a:t>
+            </a:r>
+            <a:r>
+              <a:rPr lang="en-US" sz="1650" dirty="0">
                 <a:solidFill>
                   <a:srgbClr val="5B6470"/>
                 </a:solidFill>
@@ -4076,9 +4877,163 @@
                 <a:ea typeface="Calibri"/>
                 <a:cs typeface="Calibri"/>
               </a:rPr>
-              <a:t>  finalité limitée, données hébergées en Suisse.</a:t>
-            </a:r>
-            <a:endParaRPr lang="en-US" sz="1650"/>
+              <a:t>  </a:t>
+            </a:r>
+            <a:r>
+              <a:rPr lang="en-US" sz="1650" dirty="0" err="1">
+                <a:solidFill>
+                  <a:srgbClr val="5B6470"/>
+                </a:solidFill>
+                <a:latin typeface="Calibri"/>
+                <a:ea typeface="Calibri"/>
+                <a:cs typeface="Calibri"/>
+              </a:rPr>
+              <a:t>finalité</a:t>
+            </a:r>
+            <a:r>
+              <a:rPr lang="en-US" sz="1650" dirty="0">
+                <a:solidFill>
+                  <a:srgbClr val="5B6470"/>
+                </a:solidFill>
+                <a:latin typeface="Calibri"/>
+                <a:ea typeface="Calibri"/>
+                <a:cs typeface="Calibri"/>
+              </a:rPr>
+              <a:t> </a:t>
+            </a:r>
+            <a:r>
+              <a:rPr lang="en-US" sz="1650" dirty="0" err="1">
+                <a:solidFill>
+                  <a:srgbClr val="5B6470"/>
+                </a:solidFill>
+                <a:latin typeface="Calibri"/>
+                <a:ea typeface="Calibri"/>
+                <a:cs typeface="Calibri"/>
+              </a:rPr>
+              <a:t>limitée</a:t>
+            </a:r>
+            <a:r>
+              <a:rPr lang="en-US" sz="1650" dirty="0">
+                <a:solidFill>
+                  <a:srgbClr val="5B6470"/>
+                </a:solidFill>
+                <a:latin typeface="Calibri"/>
+                <a:ea typeface="Calibri"/>
+                <a:cs typeface="Calibri"/>
+              </a:rPr>
+              <a:t>, données </a:t>
+            </a:r>
+            <a:r>
+              <a:rPr lang="en-US" sz="1650" dirty="0" err="1">
+                <a:solidFill>
+                  <a:srgbClr val="5B6470"/>
+                </a:solidFill>
+                <a:latin typeface="Calibri"/>
+                <a:ea typeface="Calibri"/>
+                <a:cs typeface="Calibri"/>
+              </a:rPr>
+              <a:t>hébergées</a:t>
+            </a:r>
+            <a:r>
+              <a:rPr lang="en-US" sz="1650" dirty="0">
+                <a:solidFill>
+                  <a:srgbClr val="5B6470"/>
+                </a:solidFill>
+                <a:latin typeface="Calibri"/>
+                <a:ea typeface="Calibri"/>
+                <a:cs typeface="Calibri"/>
+              </a:rPr>
+              <a:t> </a:t>
+            </a:r>
+            <a:r>
+              <a:rPr lang="en-US" sz="1650" dirty="0" err="1">
+                <a:solidFill>
+                  <a:srgbClr val="5B6470"/>
+                </a:solidFill>
+                <a:latin typeface="Calibri"/>
+                <a:ea typeface="Calibri"/>
+                <a:cs typeface="Calibri"/>
+              </a:rPr>
+              <a:t>si</a:t>
+            </a:r>
+            <a:r>
+              <a:rPr lang="en-US" sz="1650" dirty="0">
+                <a:solidFill>
+                  <a:srgbClr val="5B6470"/>
+                </a:solidFill>
+                <a:latin typeface="Calibri"/>
+                <a:ea typeface="Calibri"/>
+                <a:cs typeface="Calibri"/>
+              </a:rPr>
+              <a:t> possible </a:t>
+            </a:r>
+            <a:r>
+              <a:rPr lang="en-US" sz="1650" dirty="0" err="1">
+                <a:solidFill>
+                  <a:srgbClr val="5B6470"/>
+                </a:solidFill>
+                <a:latin typeface="Calibri"/>
+                <a:ea typeface="Calibri"/>
+                <a:cs typeface="Calibri"/>
+              </a:rPr>
+              <a:t>en</a:t>
+            </a:r>
+            <a:r>
+              <a:rPr lang="en-US" sz="1650" dirty="0">
+                <a:solidFill>
+                  <a:srgbClr val="5B6470"/>
+                </a:solidFill>
+                <a:latin typeface="Calibri"/>
+                <a:ea typeface="Calibri"/>
+                <a:cs typeface="Calibri"/>
+              </a:rPr>
+              <a:t> Suisse </a:t>
+            </a:r>
+            <a:r>
+              <a:rPr lang="en-US" sz="1650" dirty="0" err="1">
+                <a:solidFill>
+                  <a:srgbClr val="5B6470"/>
+                </a:solidFill>
+                <a:latin typeface="Calibri"/>
+                <a:ea typeface="Calibri"/>
+                <a:cs typeface="Calibri"/>
+              </a:rPr>
+              <a:t>ou</a:t>
+            </a:r>
+            <a:r>
+              <a:rPr lang="en-US" sz="1650" dirty="0">
+                <a:solidFill>
+                  <a:srgbClr val="5B6470"/>
+                </a:solidFill>
+                <a:latin typeface="Calibri"/>
+                <a:ea typeface="Calibri"/>
+                <a:cs typeface="Calibri"/>
+              </a:rPr>
+              <a:t> </a:t>
+            </a:r>
+            <a:r>
+              <a:rPr lang="en-US" sz="1650" dirty="0" err="1">
+                <a:solidFill>
+                  <a:srgbClr val="5B6470"/>
+                </a:solidFill>
+                <a:latin typeface="Calibri"/>
+                <a:ea typeface="Calibri"/>
+                <a:cs typeface="Calibri"/>
+              </a:rPr>
+              <a:t>en</a:t>
+            </a:r>
+            <a:r>
+              <a:rPr lang="en-US" sz="1650" dirty="0">
+                <a:solidFill>
+                  <a:srgbClr val="5B6470"/>
+                </a:solidFill>
+                <a:latin typeface="Calibri"/>
+                <a:ea typeface="Calibri"/>
+                <a:cs typeface="Calibri"/>
+              </a:rPr>
+              <a:t> Europe.</a:t>
+            </a:r>
+            <a:endParaRPr lang="en-US" sz="1650" dirty="0"/>
           </a:p>
         </p:txBody>
       </p:sp>
@@ -4324,100 +5279,61 @@
           <a:bodyPr wrap="square" lIns="0" tIns="0" rIns="0" bIns="0" rtlCol="0" anchor="ctr"/>
           <a:lstStyle/>
           <a:p>
-            <a:pPr marL="0" indent="0">
+            <a:pPr>
               <a:lnSpc>
                 <a:spcPct val="102000"/>
               </a:lnSpc>
-              <a:buNone/>
-              <a:defRPr/>
-            </a:pPr>
+              <a:defRPr/>
+            </a:pPr>
+            <a:r>
+              <a:rPr lang="en-US" sz="1650" b="1" dirty="0">
+                <a:solidFill>
+                  <a:srgbClr val="1F2328"/>
+                </a:solidFill>
+                <a:ea typeface="Calibri"/>
+                <a:cs typeface="Calibri"/>
+              </a:rPr>
+              <a:t>Pas de </a:t>
+            </a:r>
             <a:r>
               <a:rPr lang="en-US" sz="1650" b="1" dirty="0" err="1">
                 <a:solidFill>
                   <a:srgbClr val="1F2328"/>
                 </a:solidFill>
-                <a:latin typeface="Calibri"/>
-                <a:ea typeface="Calibri"/>
-                <a:cs typeface="Calibri"/>
-              </a:rPr>
-              <a:t>Refus</a:t>
+                <a:ea typeface="Calibri"/>
+                <a:cs typeface="Calibri"/>
+              </a:rPr>
+              <a:t>traçage</a:t>
             </a:r>
             <a:r>
               <a:rPr lang="en-US" sz="1650" b="1" dirty="0">
                 <a:solidFill>
                   <a:srgbClr val="1F2328"/>
                 </a:solidFill>
-                <a:latin typeface="Calibri"/>
-                <a:ea typeface="Calibri"/>
-                <a:cs typeface="Calibri"/>
-              </a:rPr>
-              <a:t> d'un </a:t>
-            </a:r>
-            <a:r>
-              <a:rPr lang="en-US" sz="1650" b="1" dirty="0" err="1">
-                <a:solidFill>
-                  <a:srgbClr val="1F2328"/>
-                </a:solidFill>
-                <a:latin typeface="Calibri"/>
-                <a:ea typeface="Calibri"/>
-                <a:cs typeface="Calibri"/>
-              </a:rPr>
-              <a:t>historique</a:t>
-            </a:r>
-            <a:r>
-              <a:rPr lang="en-US" sz="1650" dirty="0">
+                <a:ea typeface="Calibri"/>
+                <a:cs typeface="Calibri"/>
+              </a:rPr>
+              <a:t>,</a:t>
+            </a:r>
+            <a:r>
+              <a:rPr lang="fr-FR" sz="1650" b="1" dirty="0">
                 <a:solidFill>
                   <a:srgbClr val="5B6470"/>
                 </a:solidFill>
-                <a:latin typeface="Calibri"/>
-                <a:ea typeface="Calibri"/>
-                <a:cs typeface="Calibri"/>
-              </a:rPr>
-              <a:t>  </a:t>
-            </a:r>
-            <a:r>
-              <a:rPr lang="en-US" sz="1650" dirty="0" err="1">
+                <a:ea typeface="Calibri"/>
+                <a:cs typeface="Calibri"/>
+              </a:rPr>
+              <a:t> </a:t>
+            </a:r>
+            <a:r>
+              <a:rPr lang="fr-FR" sz="1650" dirty="0">
                 <a:solidFill>
                   <a:srgbClr val="5B6470"/>
                 </a:solidFill>
-                <a:latin typeface="Calibri"/>
-                <a:ea typeface="Calibri"/>
-                <a:cs typeface="Calibri"/>
-              </a:rPr>
-              <a:t>exhaustif</a:t>
-            </a:r>
-            <a:r>
-              <a:rPr lang="en-US" sz="1650" dirty="0">
-                <a:solidFill>
-                  <a:srgbClr val="5B6470"/>
-                </a:solidFill>
-                <a:latin typeface="Calibri"/>
-                <a:ea typeface="Calibri"/>
-                <a:cs typeface="Calibri"/>
-              </a:rPr>
-              <a:t> et permanent des </a:t>
-            </a:r>
-            <a:r>
-              <a:rPr lang="en-US" sz="1650" dirty="0" err="1">
-                <a:solidFill>
-                  <a:srgbClr val="5B6470"/>
-                </a:solidFill>
-                <a:latin typeface="Calibri"/>
-                <a:ea typeface="Calibri"/>
-                <a:cs typeface="Calibri"/>
-              </a:rPr>
-              <a:t>déplacements</a:t>
-            </a:r>
-            <a:r>
-              <a:rPr lang="en-US" sz="1650" dirty="0">
-                <a:solidFill>
-                  <a:srgbClr val="5B6470"/>
-                </a:solidFill>
-                <a:latin typeface="Calibri"/>
-                <a:ea typeface="Calibri"/>
-                <a:cs typeface="Calibri"/>
-              </a:rPr>
-              <a:t>.</a:t>
+                <a:ea typeface="Calibri"/>
+                <a:cs typeface="Calibri"/>
+              </a:rPr>
+              <a:t>de profilage ou surveillance des utilisateurs</a:t>
             </a:r>
             <a:endParaRPr lang="en-US" sz="1650" dirty="0"/>
           </a:p>
@@ -4511,13 +5427,23 @@
           <a:bodyPr wrap="square" lIns="0" tIns="0" rIns="0" bIns="0" rtlCol="0" anchor="ctr"/>
           <a:lstStyle/>
           <a:p>
-            <a:pPr marL="0" indent="0">
+            <a:pPr>
               <a:lnSpc>
                 <a:spcPct val="102000"/>
               </a:lnSpc>
-              <a:buNone/>
-              <a:defRPr/>
-            </a:pPr>
+              <a:defRPr/>
+            </a:pPr>
+            <a:r>
+              <a:rPr lang="en-US" sz="1650" b="1" dirty="0" err="1">
+                <a:solidFill>
+                  <a:srgbClr val="1F2328"/>
+                </a:solidFill>
+                <a:latin typeface="Calibri"/>
+                <a:ea typeface="Calibri"/>
+                <a:cs typeface="Calibri"/>
+              </a:rPr>
+              <a:t>Clarté</a:t>
+            </a:r>
             <a:r>
               <a:rPr lang="en-US" sz="1650" b="1" dirty="0">
                 <a:solidFill>
@@ -4527,54 +5453,10 @@
                 <a:ea typeface="Calibri"/>
                 <a:cs typeface="Calibri"/>
               </a:rPr>
-              <a:t>Pas de </a:t>
-            </a:r>
-            <a:r>
-              <a:rPr lang="en-US" sz="1650" b="1" dirty="0" err="1">
-                <a:solidFill>
-                  <a:srgbClr val="1F2328"/>
-                </a:solidFill>
-                <a:latin typeface="Calibri"/>
-                <a:ea typeface="Calibri"/>
-                <a:cs typeface="Calibri"/>
-              </a:rPr>
-              <a:t>biométrie</a:t>
-            </a:r>
-            <a:r>
-              <a:rPr lang="en-US" sz="1650" b="1" dirty="0">
-                <a:solidFill>
-                  <a:srgbClr val="1F2328"/>
-                </a:solidFill>
-                <a:latin typeface="Calibri"/>
-                <a:ea typeface="Calibri"/>
-                <a:cs typeface="Calibri"/>
-              </a:rPr>
-              <a:t> </a:t>
-            </a:r>
-            <a:r>
-              <a:rPr lang="en-US" sz="1650" b="1" dirty="0" err="1">
-                <a:solidFill>
-                  <a:srgbClr val="1F2328"/>
-                </a:solidFill>
-                <a:latin typeface="Calibri"/>
-                <a:ea typeface="Calibri"/>
-                <a:cs typeface="Calibri"/>
-              </a:rPr>
-              <a:t>imposée</a:t>
-            </a:r>
-            <a:r>
-              <a:rPr lang="en-US" sz="1650" b="1" dirty="0">
-                <a:solidFill>
-                  <a:srgbClr val="1F2328"/>
-                </a:solidFill>
-                <a:latin typeface="Calibri"/>
-                <a:ea typeface="Calibri"/>
-                <a:cs typeface="Calibri"/>
-              </a:rPr>
-              <a:t> :</a:t>
-            </a:r>
-            <a:r>
-              <a:rPr lang="en-US" sz="1650" dirty="0">
+              <a:t> et sécurité : </a:t>
+            </a:r>
+            <a:r>
+              <a:rPr lang="fr-FR" sz="1650" dirty="0">
                 <a:solidFill>
                   <a:srgbClr val="5B6470"/>
                 </a:solidFill>
@@ -4582,31 +5464,68 @@
                 <a:ea typeface="Calibri"/>
                 <a:cs typeface="Calibri"/>
               </a:rPr>
-              <a:t>  voyager de façon anonyme </a:t>
-            </a:r>
-            <a:r>
-              <a:rPr lang="en-US" sz="1650" dirty="0" err="1">
+              <a:t>t</a:t>
+            </a:r>
+            <a:r>
+              <a:rPr lang="fr-FR" sz="1650" dirty="0">
                 <a:solidFill>
                   <a:srgbClr val="5B6470"/>
                 </a:solidFill>
-                <a:latin typeface="Calibri"/>
-                <a:ea typeface="Calibri"/>
-                <a:cs typeface="Calibri"/>
-              </a:rPr>
-              <a:t>reste</a:t>
-            </a:r>
-            <a:r>
-              <a:rPr lang="en-US" sz="1650" dirty="0">
-                <a:solidFill>
-                  <a:srgbClr val="5B6470"/>
-                </a:solidFill>
-                <a:latin typeface="Calibri"/>
-                <a:ea typeface="Calibri"/>
-                <a:cs typeface="Calibri"/>
-              </a:rPr>
-              <a:t> possible.</a:t>
-            </a:r>
-            <a:endParaRPr lang="en-US" sz="1650" dirty="0"/>
+                <a:ea typeface="Calibri"/>
+                <a:cs typeface="Calibri"/>
+              </a:rPr>
+              <a:t>ransparence sur les données collectées</a:t>
+            </a:r>
+            <a:endParaRPr lang="fr-CH" sz="1650" b="1" dirty="0">
+              <a:solidFill>
+                <a:srgbClr val="1F2328"/>
+              </a:solidFill>
+              <a:latin typeface="Calibri"/>
+              <a:ea typeface="Calibri"/>
+              <a:cs typeface="Calibri"/>
+            </a:endParaRPr>
+          </a:p>
+        </p:txBody>
+      </p:sp>
+      <p:sp>
+        <p:nvSpPr>
+          <p:cNvPr id="10" name="ZoneTexte 9">
+            <a:extLst>
+              <a:ext uri="{FF2B5EF4-FFF2-40B4-BE49-F238E27FC236}">
+                <a16:creationId xmlns:a16="http://schemas.microsoft.com/office/drawing/2014/main" id="{CB22C43A-645E-E46F-FD70-2B0B7D1A6839}"/>
+              </a:ext>
+            </a:extLst>
+          </p:cNvPr>
+          <p:cNvSpPr txBox="1"/>
+          <p:nvPr/>
+        </p:nvSpPr>
+        <p:spPr bwMode="auto">
+          <a:xfrm>
+            <a:off x="171692" y="6428296"/>
+            <a:ext cx="5670509" cy="200055"/>
+          </a:xfrm>
+          <a:prstGeom prst="rect">
+            <a:avLst/>
+          </a:prstGeom>
+          <a:noFill/>
+        </p:spPr>
+        <p:txBody>
+          <a:bodyPr wrap="square" rtlCol="0">
+            <a:spAutoFit/>
+          </a:bodyPr>
+          <a:lstStyle/>
+          <a:p>
+            <a:r>
+              <a:rPr lang="fr-CH" sz="700" dirty="0"/>
+              <a:t>[1] </a:t>
+            </a:r>
+            <a:r>
+              <a:rPr lang="fr-CH" sz="700" dirty="0">
+                <a:hlinkClick r:id="rId4"/>
+              </a:rPr>
+              <a:t>https://www.rts.ch/info/suisse/13789416-les-cff-veulent-equiper-leurs-gares-de-cameras-a-reconnaissance-faciale.html</a:t>
+            </a:r>
+            <a:endParaRPr lang="fr-CH" sz="700" dirty="0"/>
           </a:p>
         </p:txBody>
       </p:sp>
@@ -6695,4 +7614,319 @@
     </a:ext>
   </a:extLst>
 </a:theme>
+</file>
+
+<file path=ppt/theme/theme3.xml><?xml version="1.0" encoding="utf-8"?>
+<a:theme xmlns:a="http://schemas.openxmlformats.org/drawingml/2006/main" name="Thème Office">
+  <a:themeElements>
+    <a:clrScheme name="Office">
+      <a:dk1>
+        <a:sysClr val="windowText" lastClr="000000"/>
+      </a:dk1>
+      <a:lt1>
+        <a:sysClr val="window" lastClr="FFFFFF"/>
+      </a:lt1>
+      <a:dk2>
+        <a:srgbClr val="0E2841"/>
+      </a:dk2>
+      <a:lt2>
+        <a:srgbClr val="E8E8E8"/>
+      </a:lt2>
+      <a:accent1>
+        <a:srgbClr val="156082"/>
+      </a:accent1>
+      <a:accent2>
+        <a:srgbClr val="E97132"/>
+      </a:accent2>
+      <a:accent3>
+        <a:srgbClr val="196B24"/>
+      </a:accent3>
+      <a:accent4>
+        <a:srgbClr val="0F9ED5"/>
+      </a:accent4>
+      <a:accent5>
+        <a:srgbClr val="A02B93"/>
+      </a:accent5>
+      <a:accent6>
+        <a:srgbClr val="4EA72E"/>
+      </a:accent6>
+      <a:hlink>
+        <a:srgbClr val="467886"/>
+      </a:hlink>
+      <a:folHlink>
+        <a:srgbClr val="96607D"/>
+      </a:folHlink>
+    </a:clrScheme>
+    <a:fontScheme name="Office">
+      <a:majorFont>
+        <a:latin typeface="Aptos Display" panose="02110004020202020204"/>
+        <a:ea typeface=""/>
+        <a:cs typeface=""/>
+        <a:font script="Jpan" typeface="游ゴシック Light"/>
+        <a:font script="Hang" typeface="맑은 고딕"/>
+        <a:font script="Hans" typeface="等线 Light"/>
+        <a:font script="Hant" typeface="新細明體"/>
+        <a:font script="Arab" typeface="Times New Roman"/>
+        <a:font script="Hebr" typeface="Times New Roman"/>
+        <a:font script="Thai" typeface="Angsana New"/>
+        <a:font script="Ethi" typeface="Nyala"/>
+        <a:font script="Beng" typeface="Vrinda"/>
+        <a:font script="Gujr" typeface="Shruti"/>
+        <a:font script="Khmr" typeface="MoolBoran"/>
+        <a:font script="Knda" typeface="Tunga"/>
+        <a:font script="Guru" typeface="Raavi"/>
+        <a:font script="Cans" typeface="Euphemia"/>
+        <a:font script="Cher" typeface="Plantagenet Cherokee"/>
+        <a:font script="Yiii" typeface="Microsoft Yi Baiti"/>
+        <a:font script="Tibt" typeface="Microsoft Himalaya"/>
+        <a:font script="Thaa" typeface="MV Boli"/>
+        <a:font script="Deva" typeface="Mangal"/>
+        <a:font script="Telu" typeface="Gautami"/>
+        <a:font script="Taml" typeface="Latha"/>
+        <a:font script="Syrc" typeface="Estrangelo Edessa"/>
+        <a:font script="Orya" typeface="Kalinga"/>
+        <a:font script="Mlym" typeface="Kartika"/>
+        <a:font script="Laoo" typeface="DokChampa"/>
+        <a:font script="Sinh" typeface="Iskoola Pota"/>
+        <a:font script="Mong" typeface="Mongolian Baiti"/>
+        <a:font script="Viet" typeface="Times New Roman"/>
+        <a:font script="Uigh" typeface="Microsoft Uighur"/>
+        <a:font script="Geor" typeface="Sylfaen"/>
+        <a:font script="Armn" typeface="Arial"/>
+        <a:font script="Bugi" typeface="Leelawadee UI"/>
+        <a:font script="Bopo" typeface="Microsoft JhengHei"/>
+        <a:font script="Java" typeface="Javanese Text"/>
+        <a:font script="Lisu" typeface="Segoe UI"/>
+        <a:font script="Mymr" typeface="Myanmar Text"/>
+        <a:font script="Nkoo" typeface="Ebrima"/>
+        <a:font script="Olck" typeface="Nirmala UI"/>
+        <a:font script="Osma" typeface="Ebrima"/>
+        <a:font script="Phag" typeface="Phagspa"/>
+        <a:font script="Syrn" typeface="Estrangelo Edessa"/>
+        <a:font script="Syrj" typeface="Estrangelo Edessa"/>
+        <a:font script="Syre" typeface="Estrangelo Edessa"/>
+        <a:font script="Sora" typeface="Nirmala UI"/>
+        <a:font script="Tale" typeface="Microsoft Tai Le"/>
+        <a:font script="Talu" typeface="Microsoft New Tai Lue"/>
+        <a:font script="Tfng" typeface="Ebrima"/>
+      </a:majorFont>
+      <a:minorFont>
+        <a:latin typeface="Aptos" panose="02110004020202020204"/>
+        <a:ea typeface=""/>
+        <a:cs typeface=""/>
+        <a:font script="Jpan" typeface="游ゴシック"/>
+        <a:font script="Hang" typeface="맑은 고딕"/>
+        <a:font script="Hans" typeface="等线"/>
+        <a:font script="Hant" typeface="新細明體"/>
+        <a:font script="Arab" typeface="Arial"/>
+        <a:font script="Hebr" typeface="Arial"/>
+        <a:font script="Thai" typeface="Cordia New"/>
+        <a:font script="Ethi" typeface="Nyala"/>
+        <a:font script="Beng" typeface="Vrinda"/>
+        <a:font script="Gujr" typeface="Shruti"/>
+        <a:font script="Khmr" typeface="DaunPenh"/>
+        <a:font script="Knda" typeface="Tunga"/>
+        <a:font script="Guru" typeface="Raavi"/>
+        <a:font script="Cans" typeface="Euphemia"/>
+        <a:font script="Cher" typeface="Plantagenet Cherokee"/>
+        <a:font script="Yiii" typeface="Microsoft Yi Baiti"/>
+        <a:font script="Tibt" typeface="Microsoft Himalaya"/>
+        <a:font script="Thaa" typeface="MV Boli"/>
+        <a:font script="Deva" typeface="Mangal"/>
+        <a:font script="Telu" typeface="Gautami"/>
+        <a:font script="Taml" typeface="Latha"/>
+        <a:font script="Syrc" typeface="Estrangelo Edessa"/>
+        <a:font script="Orya" typeface="Kalinga"/>
+        <a:font script="Mlym" typeface="Kartika"/>
+        <a:font script="Laoo" typeface="DokChampa"/>
+        <a:font script="Sinh" typeface="Iskoola Pota"/>
+        <a:font script="Mong" typeface="Mongolian Baiti"/>
+        <a:font script="Viet" typeface="Arial"/>
+        <a:font script="Uigh" typeface="Microsoft Uighur"/>
+        <a:font script="Geor" typeface="Sylfaen"/>
+        <a:font script="Armn" typeface="Arial"/>
+        <a:font script="Bugi" typeface="Leelawadee UI"/>
+        <a:font script="Bopo" typeface="Microsoft JhengHei"/>
+        <a:font script="Java" typeface="Javanese Text"/>
+        <a:font script="Lisu" typeface="Segoe UI"/>
+        <a:font script="Mymr" typeface="Myanmar Text"/>
+        <a:font script="Nkoo" typeface="Ebrima"/>
+        <a:font script="Olck" typeface="Nirmala UI"/>
+        <a:font script="Osma" typeface="Ebrima"/>
+        <a:font script="Phag" typeface="Phagspa"/>
+        <a:font script="Syrn" typeface="Estrangelo Edessa"/>
+        <a:font script="Syrj" typeface="Estrangelo Edessa"/>
+        <a:font script="Syre" typeface="Estrangelo Edessa"/>
+        <a:font script="Sora" typeface="Nirmala UI"/>
+        <a:font script="Tale" typeface="Microsoft Tai Le"/>
+        <a:font script="Talu" typeface="Microsoft New Tai Lue"/>
+        <a:font script="Tfng" typeface="Ebrima"/>
+      </a:minorFont>
+    </a:fontScheme>
+    <a:fmtScheme name="Office">
+      <a:fillStyleLst>
+        <a:solidFill>
+          <a:schemeClr val="phClr"/>
+        </a:solidFill>
+        <a:gradFill rotWithShape="1">
+          <a:gsLst>
+            <a:gs pos="0">
+              <a:schemeClr val="phClr">
+                <a:lumMod val="110000"/>
+                <a:satMod val="105000"/>
+                <a:tint val="67000"/>
+              </a:schemeClr>
+            </a:gs>
+            <a:gs pos="50000">
+              <a:schemeClr val="phClr">
+                <a:lumMod val="105000"/>
+                <a:satMod val="103000"/>
+                <a:tint val="73000"/>
+              </a:schemeClr>
+            </a:gs>
+            <a:gs pos="100000">
+              <a:schemeClr val="phClr">
+                <a:lumMod val="105000"/>
+                <a:satMod val="109000"/>
+                <a:tint val="81000"/>
+              </a:schemeClr>
+            </a:gs>
+          </a:gsLst>
+          <a:lin ang="5400000" scaled="0"/>
+        </a:gradFill>
+        <a:gradFill rotWithShape="1">
+          <a:gsLst>
+            <a:gs pos="0">
+              <a:schemeClr val="phClr">
+                <a:satMod val="103000"/>
+                <a:lumMod val="102000"/>
+                <a:tint val="94000"/>
+              </a:schemeClr>
+            </a:gs>
+            <a:gs pos="50000">
+              <a:schemeClr val="phClr">
+                <a:satMod val="110000"/>
+                <a:lumMod val="100000"/>
+                <a:shade val="100000"/>
+              </a:schemeClr>
+            </a:gs>
+            <a:gs pos="100000">
+              <a:schemeClr val="phClr">
+                <a:lumMod val="99000"/>
+                <a:satMod val="120000"/>
+                <a:shade val="78000"/>
+              </a:schemeClr>
+            </a:gs>
+          </a:gsLst>
+          <a:lin ang="5400000" scaled="0"/>
+        </a:gradFill>
+      </a:fillStyleLst>
+      <a:lnStyleLst>
+        <a:ln w="12700" cap="flat" cmpd="sng" algn="ctr">
+          <a:solidFill>
+            <a:schemeClr val="phClr"/>
+          </a:solidFill>
+          <a:prstDash val="solid"/>
+          <a:miter lim="800000"/>
+        </a:ln>
+        <a:ln w="19050" cap="flat" cmpd="sng" algn="ctr">
+          <a:solidFill>
+            <a:schemeClr val="phClr"/>
+          </a:solidFill>
+          <a:prstDash val="solid"/>
+          <a:miter lim="800000"/>
+        </a:ln>
+        <a:ln w="25400" cap="flat" cmpd="sng" algn="ctr">
+          <a:solidFill>
+            <a:schemeClr val="phClr"/>
+          </a:solidFill>
+          <a:prstDash val="solid"/>
+          <a:miter lim="800000"/>
+        </a:ln>
+      </a:lnStyleLst>
+      <a:effectStyleLst>
+        <a:effectStyle>
+          <a:effectLst/>
+        </a:effectStyle>
+        <a:effectStyle>
+          <a:effectLst/>
+        </a:effectStyle>
+        <a:effectStyle>
+          <a:effectLst>
+            <a:outerShdw blurRad="57150" dist="19050" dir="5400000" algn="ctr" rotWithShape="0">
+              <a:srgbClr val="000000">
+                <a:alpha val="63000"/>
+              </a:srgbClr>
+            </a:outerShdw>
+          </a:effectLst>
+        </a:effectStyle>
+      </a:effectStyleLst>
+      <a:bgFillStyleLst>
+        <a:solidFill>
+          <a:schemeClr val="phClr"/>
+        </a:solidFill>
+        <a:solidFill>
+          <a:schemeClr val="phClr">
+            <a:tint val="95000"/>
+            <a:satMod val="170000"/>
+          </a:schemeClr>
+        </a:solidFill>
+        <a:gradFill rotWithShape="1">
+          <a:gsLst>
+            <a:gs pos="0">
+              <a:schemeClr val="phClr">
+                <a:tint val="93000"/>
+                <a:satMod val="150000"/>
+                <a:shade val="98000"/>
+                <a:lumMod val="102000"/>
+              </a:schemeClr>
+            </a:gs>
+            <a:gs pos="50000">
+              <a:schemeClr val="phClr">
+                <a:tint val="98000"/>
+                <a:satMod val="130000"/>
+                <a:shade val="90000"/>
+                <a:lumMod val="103000"/>
+              </a:schemeClr>
+            </a:gs>
+            <a:gs pos="100000">
+              <a:schemeClr val="phClr">
+                <a:shade val="63000"/>
+                <a:satMod val="120000"/>
+              </a:schemeClr>
+            </a:gs>
+          </a:gsLst>
+          <a:lin ang="5400000" scaled="0"/>
+        </a:gradFill>
+      </a:bgFillStyleLst>
+    </a:fmtScheme>
+  </a:themeElements>
+  <a:objectDefaults>
+    <a:lnDef>
+      <a:spPr/>
+      <a:bodyPr/>
+      <a:lstStyle/>
+      <a:style>
+        <a:lnRef idx="2">
+          <a:schemeClr val="accent1"/>
+        </a:lnRef>
+        <a:fillRef idx="0">
+          <a:schemeClr val="accent1"/>
+        </a:fillRef>
+        <a:effectRef idx="1">
+          <a:schemeClr val="accent1"/>
+        </a:effectRef>
+        <a:fontRef idx="minor">
+          <a:schemeClr val="tx1"/>
+        </a:fontRef>
+      </a:style>
+    </a:lnDef>
+  </a:objectDefaults>
+  <a:extraClrSchemeLst/>
+  <a:extLst>
+    <a:ext uri="{05A4C25C-085E-4340-85A3-A5531E510DB2}">
+      <thm15:themeFamily xmlns:thm15="http://schemas.microsoft.com/office/thememl/2012/main" name="Office Theme" id="{2E142A2C-CD16-42D6-873A-C26D2A0506FA}" vid="{1BDDFF52-6CD6-40A5-AB3C-68EB2F1E4D0A}"/>
+    </a:ext>
+  </a:extLst>
+</a:theme>
 </file>